--- a/docs/PDF-Inspector-TFM.pptx
+++ b/docs/PDF-Inspector-TFM.pptx
@@ -4155,7 +4155,7 @@
                 <a:ea typeface="IBM Plex Sans" pitchFamily="34" charset="-122"/>
                 <a:cs typeface="IBM Plex Sans" pitchFamily="34" charset="-120"/>
               </a:rPr>
-              <a:t>353</a:t>
+              <a:t>356</a:t>
             </a:r>
             <a:endParaRPr lang="en-US" sz="6000" dirty="0"/>
           </a:p>

--- a/docs/PDF-Inspector-TFM.pptx
+++ b/docs/PDF-Inspector-TFM.pptx
@@ -20,9 +20,11 @@
     <p:sldId id="268" r:id="rId14"/>
     <p:sldId id="269" r:id="rId15"/>
     <p:sldId id="270" r:id="rId16"/>
+    <p:sldId id="271" r:id="rId17"/>
+    <p:sldId id="272" r:id="rId18"/>
   </p:sldIdLst>
   <p:notesMasterIdLst>
-    <p:notesMasterId r:id="rId17"/>
+    <p:notesMasterId r:id="rId19"/>
   </p:notesMasterIdLst>
   <p:sldSz cx="12192000" cy="6858000"/>
   <p:notesSz cx="6858000" cy="12192000"/>
@@ -604,7 +606,7 @@
           <a:p>
             <a:r>
               <a:rPr lang="en-US" dirty="0"/>
-              <a:t>Licencia GPL v3, compatible con PDFBox (Apache-2.0) y Bouncy Castle (MIT). El build usa el wrapper de Maven incluido.</a:t>
+              <a:t>Captura real de la pantalla Firmar con un PDF de demostración seleccionado. El servidor no recibe el PDF sin firmar: AutoFirma hace la operación criptográfica en el equipo del usuario, y el PDF firmado solo se envía si se pulsa «Validar este PDF».</a:t>
             </a:r>
             <a:endParaRPr lang="en-US" dirty="0"/>
           </a:p>
@@ -692,7 +694,7 @@
           <a:p>
             <a:r>
               <a:rPr lang="en-US" dirty="0"/>
-              <a:t>La prueba de carga en CI falla si el contenedor se reinicia, lo mata el OOM o aparece un OutOfMemoryError en los logs.</a:t>
+              <a:t>Licencia GPL v3, compatible con PDFBox (Apache-2.0) y Bouncy Castle (MIT). El build usa el wrapper de Maven incluido.</a:t>
             </a:r>
             <a:endParaRPr lang="en-US" dirty="0"/>
           </a:p>
@@ -780,7 +782,7 @@
           <a:p>
             <a:r>
               <a:rPr lang="en-US" dirty="0"/>
-              <a:t>Docker se salta el cortafuegos ufw al publicar puertos, por eso el puerto 8963 se publica solo en 127.0.0.1 en el compose, y Caddy llega a él por la red del host.</a:t>
+              <a:t>Las pruebas de mutación con PIT (perfil aparte, unos 6 minutos) eliminan el 74 % de los mutantes: los tests no solo recorren el código, también comprueban lo que hace. La prueba de carga falla si el contenedor se reinicia, lo mata el OOM o aparece un OutOfMemoryError en los logs. Las dos únicas exclusiones de SpotBugs están justificadas por escrito.</a:t>
             </a:r>
             <a:endParaRPr lang="en-US" dirty="0"/>
           </a:p>
@@ -868,7 +870,7 @@
           <a:p>
             <a:r>
               <a:rPr lang="en-US" dirty="0"/>
-              <a:t>Medición en el VPS de OVHcloud con un PDF sintético de 83 MB, lanzando las peticiones desde el propio servidor. Con max-concurrent 1 y 5 segundos de espera: 2 respuestas 200 y 3 respuestas 503, con un máximo de 753 MiB. Con max-concurrent 2 y 30 segundos: 5 respuestas 200, con un máximo de 1013 MiB. Además el usuario subió 4 PDFs reales, uno de 50 MB, sin fallos y con un pico de 871 MiB.</a:t>
+              <a:t>Cada hallazgo se reprodujo primero con un test que fallaba y después se corrigió (TDD). La bomba de descompresión se comprobó en el servidor real: ahora responde 200 en menos de un segundo, con el PDF/A como «no validado» y sin reiniciar el contenedor. Tras la corrección del sello de tiempo, la cadena del firmante se valida en la fecha del sello solo si la TSA es de confianza; si no, a fecha de hoy, como recomiendan las normas ETSI.</a:t>
             </a:r>
             <a:endParaRPr lang="en-US" dirty="0"/>
           </a:p>
@@ -956,7 +958,7 @@
           <a:p>
             <a:r>
               <a:rPr lang="en-US" dirty="0"/>
-              <a:t>La carga automática de las listas de confianza (TSL) queda como trabajo futuro. Los subfiltros no soportados se informan como UNSUPPORTED en vez de fallar.</a:t>
+              <a:t>Docker se salta el cortafuegos ufw al publicar puertos, por eso el puerto 8963 se publica solo en 127.0.0.1 en el compose, y Caddy llega a él por la red del host.</a:t>
             </a:r>
             <a:endParaRPr lang="en-US" dirty="0"/>
           </a:p>
@@ -1044,7 +1046,7 @@
           <a:p>
             <a:r>
               <a:rPr lang="en-US" dirty="0"/>
-              <a:t>Cierre y turno de preguntas. La demo está en línea: subir un PDF firmado y un PDF grande para enseñar el veredicto y el tiempo de respuesta.</a:t>
+              <a:t>Medición en el VPS de OVHcloud con un PDF sintético de 83 MB, lanzando las peticiones desde el propio servidor. Con max-concurrent 1 y 5 segundos de espera: 2 respuestas 200 y 3 respuestas 503, con un máximo de 753 MiB. Con max-concurrent 2 y 30 segundos: 5 respuestas 200, con un máximo de 1013 MiB. Además el usuario subió 4 PDFs reales, uno de 50 MB, sin fallos y con un pico de 871 MiB.</a:t>
             </a:r>
             <a:endParaRPr lang="en-US" dirty="0"/>
           </a:p>
@@ -1068,6 +1070,182 @@
             <a:fld id="{F7021451-1387-4CA6-816F-3879F97B5CBC}" type="slidenum">
               <a:rPr lang="en-US"/>
               <a:t>15</a:t>
+            </a:fld>
+            <a:endParaRPr lang="en-US"/>
+          </a:p>
+        </p:txBody>
+      </p:sp>
+    </p:spTree>
+    <p:extLst>
+      <p:ext uri="{BB962C8B-B14F-4D97-AF65-F5344CB8AC3E}">
+        <p14:creationId xmlns:p14="http://schemas.microsoft.com/office/powerpoint/2010/main" val="1024086991"/>
+      </p:ext>
+    </p:extLst>
+  </p:cSld>
+  <p:clrMapOvr>
+    <a:masterClrMapping/>
+  </p:clrMapOvr>
+</p:notes>
+</file>
+
+<file path=ppt/notesSlides/notesSlide16.xml><?xml version="1.0" encoding="utf-8"?>
+<p:notes xmlns:a="http://schemas.openxmlformats.org/drawingml/2006/main" xmlns:r="http://schemas.openxmlformats.org/officeDocument/2006/relationships" xmlns:p="http://schemas.openxmlformats.org/presentationml/2006/main">
+  <p:cSld>
+    <p:spTree>
+      <p:nvGrpSpPr>
+        <p:cNvPr id="1" name=""/>
+        <p:cNvGrpSpPr/>
+        <p:nvPr/>
+      </p:nvGrpSpPr>
+      <p:grpSpPr>
+        <a:xfrm>
+          <a:off x="0" y="0"/>
+          <a:ext cx="0" cy="0"/>
+          <a:chOff x="0" y="0"/>
+          <a:chExt cx="0" cy="0"/>
+        </a:xfrm>
+      </p:grpSpPr>
+      <p:sp>
+        <p:nvSpPr>
+          <p:cNvPr id="2" name="Slide Image Placeholder 1"/>
+          <p:cNvSpPr>
+            <a:spLocks noGrp="1" noRot="1" noChangeAspect="1"/>
+          </p:cNvSpPr>
+          <p:nvPr>
+            <p:ph type="sldImg"/>
+          </p:nvPr>
+        </p:nvSpPr>
+        <p:spPr/>
+      </p:sp>
+      <p:sp>
+        <p:nvSpPr>
+          <p:cNvPr id="3" name="Notes Placeholder 2"/>
+          <p:cNvSpPr>
+            <a:spLocks noGrp="1"/>
+          </p:cNvSpPr>
+          <p:nvPr>
+            <p:ph type="body" idx="1"/>
+          </p:nvPr>
+        </p:nvSpPr>
+        <p:spPr/>
+        <p:txBody>
+          <a:bodyPr/>
+          <a:lstStyle/>
+          <a:p>
+            <a:r>
+              <a:rPr lang="en-US" dirty="0"/>
+              <a:t>La carga automática de las listas de confianza (TSL) queda como trabajo futuro. Los subfiltros no soportados se informan como UNSUPPORTED en vez de fallar.</a:t>
+            </a:r>
+            <a:endParaRPr lang="en-US" dirty="0"/>
+          </a:p>
+        </p:txBody>
+      </p:sp>
+      <p:sp>
+        <p:nvSpPr>
+          <p:cNvPr id="4" name="Slide Number Placeholder 3"/>
+          <p:cNvSpPr>
+            <a:spLocks noGrp="1"/>
+          </p:cNvSpPr>
+          <p:nvPr>
+            <p:ph type="sldNum" sz="quarter" idx="10"/>
+          </p:nvPr>
+        </p:nvSpPr>
+        <p:spPr/>
+        <p:txBody>
+          <a:bodyPr/>
+          <a:lstStyle/>
+          <a:p>
+            <a:fld id="{F7021451-1387-4CA6-816F-3879F97B5CBC}" type="slidenum">
+              <a:rPr lang="en-US"/>
+              <a:t>16</a:t>
+            </a:fld>
+            <a:endParaRPr lang="en-US"/>
+          </a:p>
+        </p:txBody>
+      </p:sp>
+    </p:spTree>
+    <p:extLst>
+      <p:ext uri="{BB962C8B-B14F-4D97-AF65-F5344CB8AC3E}">
+        <p14:creationId xmlns:p14="http://schemas.microsoft.com/office/powerpoint/2010/main" val="1024086991"/>
+      </p:ext>
+    </p:extLst>
+  </p:cSld>
+  <p:clrMapOvr>
+    <a:masterClrMapping/>
+  </p:clrMapOvr>
+</p:notes>
+</file>
+
+<file path=ppt/notesSlides/notesSlide17.xml><?xml version="1.0" encoding="utf-8"?>
+<p:notes xmlns:a="http://schemas.openxmlformats.org/drawingml/2006/main" xmlns:r="http://schemas.openxmlformats.org/officeDocument/2006/relationships" xmlns:p="http://schemas.openxmlformats.org/presentationml/2006/main">
+  <p:cSld>
+    <p:spTree>
+      <p:nvGrpSpPr>
+        <p:cNvPr id="1" name=""/>
+        <p:cNvGrpSpPr/>
+        <p:nvPr/>
+      </p:nvGrpSpPr>
+      <p:grpSpPr>
+        <a:xfrm>
+          <a:off x="0" y="0"/>
+          <a:ext cx="0" cy="0"/>
+          <a:chOff x="0" y="0"/>
+          <a:chExt cx="0" cy="0"/>
+        </a:xfrm>
+      </p:grpSpPr>
+      <p:sp>
+        <p:nvSpPr>
+          <p:cNvPr id="2" name="Slide Image Placeholder 1"/>
+          <p:cNvSpPr>
+            <a:spLocks noGrp="1" noRot="1" noChangeAspect="1"/>
+          </p:cNvSpPr>
+          <p:nvPr>
+            <p:ph type="sldImg"/>
+          </p:nvPr>
+        </p:nvSpPr>
+        <p:spPr/>
+      </p:sp>
+      <p:sp>
+        <p:nvSpPr>
+          <p:cNvPr id="3" name="Notes Placeholder 2"/>
+          <p:cNvSpPr>
+            <a:spLocks noGrp="1"/>
+          </p:cNvSpPr>
+          <p:nvPr>
+            <p:ph type="body" idx="1"/>
+          </p:nvPr>
+        </p:nvSpPr>
+        <p:spPr/>
+        <p:txBody>
+          <a:bodyPr/>
+          <a:lstStyle/>
+          <a:p>
+            <a:r>
+              <a:rPr lang="en-US" dirty="0"/>
+              <a:t>Cierre y turno de preguntas. La demo está en línea: subir un PDF firmado y un PDF grande para enseñar el veredicto y el tiempo de respuesta.</a:t>
+            </a:r>
+            <a:endParaRPr lang="en-US" dirty="0"/>
+          </a:p>
+        </p:txBody>
+      </p:sp>
+      <p:sp>
+        <p:nvSpPr>
+          <p:cNvPr id="4" name="Slide Number Placeholder 3"/>
+          <p:cNvSpPr>
+            <a:spLocks noGrp="1"/>
+          </p:cNvSpPr>
+          <p:nvPr>
+            <p:ph type="sldNum" sz="quarter" idx="10"/>
+          </p:nvPr>
+        </p:nvSpPr>
+        <p:spPr/>
+        <p:txBody>
+          <a:bodyPr/>
+          <a:lstStyle/>
+          <a:p>
+            <a:fld id="{F7021451-1387-4CA6-816F-3879F97B5CBC}" type="slidenum">
+              <a:rPr lang="en-US"/>
+              <a:t>17</a:t>
             </a:fld>
             <a:endParaRPr lang="en-US"/>
           </a:p>
@@ -1660,7 +1838,7 @@
           <a:p>
             <a:r>
               <a:rPr lang="en-US" dirty="0"/>
-              <a:t>Capturas reales de la aplicación. Los PDF y los certificados son de demostración (firmante «Ana García (demo)», CA raíz de demostración cargada como ancla de confianza solo para esta prueba); no hay datos reales. A la izquierda, el documento recién firmado; a la derecha, el mismo documento con una actualización incremental añadida después de firmar: la firma sigue siendo matemáticamente correcta para su revisión, pero el veredicto es inválido porque ninguna firma cubre el contenido final.</a:t>
+              <a:t>Capturas reales de la aplicación. Los PDF y los certificados son de demostración (firmante «Ana García (demo)», CA raíz de demostración cargada como ancla de confianza solo para esta prueba, también para su TSA, así que el sello es de confianza y fija la fecha de validación); no hay datos reales. A la izquierda, el documento recién firmado; a la derecha, el mismo documento con una actualización incremental añadida después de firmar: la firma sigue siendo matemáticamente correcta para su revisión, pero el veredicto es inválido porque ninguna firma cubre el contenido final.</a:t>
             </a:r>
             <a:endParaRPr lang="en-US" dirty="0"/>
           </a:p>
@@ -1748,7 +1926,7 @@
           <a:p>
             <a:r>
               <a:rPr lang="en-US" dirty="0"/>
-              <a:t>Captura real de la pantalla Firmar con un PDF de demostración seleccionado. El servidor no recibe el PDF sin firmar: AutoFirma hace la operación criptográfica en el equipo del usuario, y el PDF firmado solo se envía si se pulsa «Validar este PDF».</a:t>
+              <a:t>Captura real del mismo contrato de demostración: cuatro páginas, una A4 girada 90° y un plano A3 horizontal con recorte. Un documento de 200 páginas A4 iguales queda en una sola línea. El cálculo se hace en una sola pasada con un mapa cuya clave es rotación más ancho por alto.</a:t>
             </a:r>
             <a:endParaRPr lang="en-US" dirty="0"/>
           </a:p>
@@ -1820,9 +1998,144 @@
 </p:sldLayout>
 </file>
 
+<file path=ppt/slideLayouts/slideLayout2.xml><?xml version="1.0" encoding="utf-8"?>
+<p:sldLayout xmlns:a="http://schemas.openxmlformats.org/drawingml/2006/main" xmlns:r="http://schemas.openxmlformats.org/officeDocument/2006/relationships" xmlns:p="http://schemas.openxmlformats.org/presentationml/2006/main" preserve="1">
+  <p:cSld name="Title and body">
+    <p:bg>
+      <p:bgPr>
+        <a:solidFill>
+          <a:srgbClr val="F6F5F0"/>
+        </a:solidFill>
+      </p:bgPr>
+    </p:bg>
+    <p:spTree>
+      <p:nvGrpSpPr>
+        <p:cNvPr id="1" name=""/>
+        <p:cNvGrpSpPr/>
+        <p:nvPr/>
+      </p:nvGrpSpPr>
+      <p:grpSpPr>
+        <a:xfrm>
+          <a:off x="0" y="0"/>
+          <a:ext cx="0" cy="0"/>
+          <a:chOff x="0" y="0"/>
+          <a:chExt cx="0" cy="0"/>
+        </a:xfrm>
+      </p:grpSpPr>
+      <p:sp>
+        <p:nvSpPr>
+          <p:cNvPr id="2" name="Title Placeholder 1"/>
+          <p:cNvSpPr/>
+          <p:nvPr>
+            <p:ph type="title"/>
+          </p:nvPr>
+        </p:nvSpPr>
+        <p:spPr>
+          <a:xfrm>
+            <a:off x="812800" y="1163241"/>
+            <a:ext cx="10566400" cy="502841"/>
+          </a:xfrm>
+          <a:prstGeom prst="rect">
+            <a:avLst/>
+          </a:prstGeom>
+          <a:noFill/>
+          <a:ln/>
+        </p:spPr>
+        <p:txBody>
+          <a:bodyPr wrap="square" lIns="0" tIns="0" rIns="0" bIns="0" rtlCol="0" anchor="t"/>
+          <a:lstStyle>
+            <a:lvl1pPr algn="l" indent="0" marL="0">
+              <a:lnSpc>
+                <a:spcPct val="115000"/>
+              </a:lnSpc>
+              <a:buNone/>
+              <a:defRPr lang="en-US" sz="3600" dirty="0">
+                <a:solidFill>
+                  <a:srgbClr val="14213D"/>
+                </a:solidFill>
+                <a:latin typeface="Source Serif 4" pitchFamily="34" charset="0"/>
+                <a:ea typeface="Source Serif 4" pitchFamily="34" charset="-122"/>
+                <a:cs typeface="Source Serif 4" pitchFamily="34" charset="-120"/>
+              </a:defRPr>
+            </a:lvl1pPr>
+          </a:lstStyle>
+          <a:p>
+            <a:pPr algn="l" indent="0" marL="0">
+              <a:lnSpc>
+                <a:spcPct val="115000"/>
+              </a:lnSpc>
+              <a:buNone/>
+            </a:pPr>
+            <a:endParaRPr lang="en-US" sz="3600" dirty="0"/>
+          </a:p>
+        </p:txBody>
+      </p:sp>
+      <p:sp>
+        <p:nvSpPr>
+          <p:cNvPr id="3" name="Text Placeholder 2"/>
+          <p:cNvSpPr/>
+          <p:nvPr>
+            <p:ph idx="101" type="body"/>
+          </p:nvPr>
+        </p:nvSpPr>
+        <p:spPr>
+          <a:xfrm>
+            <a:off x="812800" y="1970881"/>
+            <a:ext cx="10566400" cy="4074319"/>
+          </a:xfrm>
+          <a:prstGeom prst="rect">
+            <a:avLst/>
+          </a:prstGeom>
+          <a:noFill/>
+          <a:ln/>
+        </p:spPr>
+        <p:txBody>
+          <a:bodyPr wrap="square" lIns="0" tIns="0" rIns="0" bIns="0" rtlCol="0" anchor="t"/>
+          <a:lstStyle>
+            <a:lvl1pPr algn="l" indent="0" marL="0">
+              <a:lnSpc>
+                <a:spcPct val="140000"/>
+              </a:lnSpc>
+              <a:buNone/>
+              <a:defRPr lang="en-US" sz="1600" dirty="0">
+                <a:solidFill>
+                  <a:srgbClr val="14213D"/>
+                </a:solidFill>
+                <a:latin typeface="IBM Plex Sans" pitchFamily="34" charset="0"/>
+                <a:ea typeface="IBM Plex Sans" pitchFamily="34" charset="-122"/>
+                <a:cs typeface="IBM Plex Sans" pitchFamily="34" charset="-120"/>
+              </a:defRPr>
+            </a:lvl1pPr>
+          </a:lstStyle>
+          <a:p>
+            <a:pPr algn="l" indent="0" marL="0">
+              <a:lnSpc>
+                <a:spcPct val="140000"/>
+              </a:lnSpc>
+              <a:buNone/>
+            </a:pPr>
+            <a:endParaRPr lang="en-US" sz="1600" dirty="0"/>
+          </a:p>
+        </p:txBody>
+      </p:sp>
+    </p:spTree>
+  </p:cSld>
+  <p:clrMapOvr>
+    <a:masterClrMapping/>
+  </p:clrMapOvr>
+</p:sldLayout>
+</file>
+
 <file path=ppt/slideMasters/slideMaster1.xml><?xml version="1.0" encoding="utf-8"?>
 <p:sldMaster xmlns:a="http://schemas.openxmlformats.org/drawingml/2006/main" xmlns:r="http://schemas.openxmlformats.org/officeDocument/2006/relationships" xmlns:p="http://schemas.openxmlformats.org/presentationml/2006/main">
   <p:cSld>
+    <p:bg>
+      <p:bgPr>
+        <a:solidFill>
+          <a:srgbClr val="F6F5F0"/>
+        </a:solidFill>
+      </p:bgPr>
+    </p:bg>
     <p:spTree>
       <p:nvGrpSpPr>
         <p:cNvPr id="1" name=""/>
@@ -1842,6 +2155,7 @@
   <p:clrMap bg1="lt1" tx1="dk1" bg2="lt2" tx2="dk2" accent1="accent1" accent2="accent2" accent3="accent3" accent4="accent4" accent5="accent5" accent6="accent6" hlink="hlink" folHlink="folHlink"/>
   <p:sldLayoutIdLst>
     <p:sldLayoutId id="2147483649" r:id="rId1"/>
+    <p:sldLayoutId id="2147483650" r:id="rId2"/>
   </p:sldLayoutIdLst>
   <p:hf sldNum="0" hdr="0" ftr="0" dt="0"/>
   <p:txStyles>
@@ -2169,7 +2483,9 @@
         <p:nvSpPr>
           <p:cNvPr id="3" name="Text 1"/>
           <p:cNvSpPr/>
-          <p:nvPr/>
+          <p:nvPr>
+            <p:ph type="title"/>
+          </p:nvPr>
         </p:nvSpPr>
         <p:spPr>
           <a:xfrm>
@@ -2195,13 +2511,13 @@
               <a:buNone/>
             </a:pPr>
             <a:r>
-              <a:rPr lang="en-US" sz="6000" b="1" dirty="0">
+              <a:rPr lang="en-US" sz="6000" b="1" i="0" dirty="0">
                 <a:solidFill>
                   <a:srgbClr val="F6F5F0"/>
                 </a:solidFill>
-                <a:latin typeface="Source Serif 4" pitchFamily="34" charset="0"/>
-                <a:ea typeface="Source Serif 4" pitchFamily="34" charset="-122"/>
-                <a:cs typeface="Source Serif 4" pitchFamily="34" charset="-120"/>
+                <a:latin typeface="Source Serif 4" pitchFamily="18" charset="0"/>
+                <a:ea typeface="Source Serif 4" pitchFamily="18" charset="-122"/>
+                <a:cs typeface="Source Serif 4" pitchFamily="18" charset="-120"/>
               </a:rPr>
               <a:t>PDF Inspector &amp; Signature Verifier</a:t>
             </a:r>
@@ -2262,7 +2578,7 @@
         <p:spPr>
           <a:xfrm>
             <a:off x="812800" y="6202759"/>
-            <a:ext cx="2874345" cy="274241"/>
+            <a:ext cx="3348752" cy="274241"/>
           </a:xfrm>
           <a:prstGeom prst="rect">
             <a:avLst/>
@@ -2367,7 +2683,7 @@
                 <a:ea typeface="IBM Plex Sans" pitchFamily="34" charset="-122"/>
                 <a:cs typeface="IBM Plex Sans" pitchFamily="34" charset="-120"/>
               </a:rPr>
-              <a:t>STACK</a:t>
+              <a:t>FIRMAR, EN LA APLICACIÓN</a:t>
             </a:r>
             <a:endParaRPr lang="en-US" sz="1400" dirty="0"/>
           </a:p>
@@ -2377,7 +2693,9 @@
         <p:nvSpPr>
           <p:cNvPr id="3" name="Text 1"/>
           <p:cNvSpPr/>
-          <p:nvPr/>
+          <p:nvPr>
+            <p:ph type="title"/>
+          </p:nvPr>
         </p:nvSpPr>
         <p:spPr>
           <a:xfrm>
@@ -2403,13 +2721,383 @@
               <a:buNone/>
             </a:pPr>
             <a:r>
-              <a:rPr lang="en-US" sz="3600" b="1" dirty="0">
+              <a:rPr lang="en-US" sz="3600" b="1" i="0" dirty="0">
                 <a:solidFill>
                   <a:srgbClr val="14213D"/>
                 </a:solidFill>
-                <a:latin typeface="Source Serif 4" pitchFamily="34" charset="0"/>
-                <a:ea typeface="Source Serif 4" pitchFamily="34" charset="-122"/>
-                <a:cs typeface="Source Serif 4" pitchFamily="34" charset="-120"/>
+                <a:latin typeface="Source Serif 4" pitchFamily="18" charset="0"/>
+                <a:ea typeface="Source Serif 4" pitchFamily="18" charset="-122"/>
+                <a:cs typeface="Source Serif 4" pitchFamily="18" charset="-120"/>
+              </a:rPr>
+              <a:t>Firma con AutoFirma sin salir del navegador</a:t>
+            </a:r>
+            <a:endParaRPr lang="en-US" sz="3600" dirty="0"/>
+          </a:p>
+        </p:txBody>
+      </p:sp>
+      <p:sp>
+        <p:nvSpPr>
+          <p:cNvPr id="4" name="Shape 2"/>
+          <p:cNvSpPr/>
+          <p:nvPr/>
+        </p:nvSpPr>
+        <p:spPr>
+          <a:xfrm>
+            <a:off x="812800" y="1970881"/>
+            <a:ext cx="6223000" cy="3790950"/>
+          </a:xfrm>
+          <a:prstGeom prst="roundRect">
+            <a:avLst>
+              <a:gd name="adj" fmla="val 2680"/>
+            </a:avLst>
+          </a:prstGeom>
+          <a:solidFill>
+            <a:srgbClr val="FFFFFF"/>
+          </a:solidFill>
+          <a:ln/>
+        </p:spPr>
+      </p:sp>
+      <p:pic>
+        <p:nvPicPr>
+          <p:cNvPr id="5" name="Image 0" descr="Pantalla Firmar: aviso de que la clave privada nunca sale del equipo, zona para soltar el PDF (hasta 80 MB), fichero seleccionado y campo opcional «Motivo de la firma»">    </p:cNvPr>
+          <p:cNvPicPr>
+            <a:picLocks noChangeAspect="1"/>
+          </p:cNvPicPr>
+          <p:nvPr/>
+        </p:nvPicPr>
+        <p:blipFill>
+          <a:blip r:embed="rId1"/>
+          <a:srcRect l="-81" r="-81" t="0" b="0"/>
+          <a:stretch/>
+        </p:blipFill>
+        <p:spPr>
+          <a:xfrm>
+            <a:off x="819150" y="1977231"/>
+            <a:ext cx="6210300" cy="3778250"/>
+          </a:xfrm>
+          <a:prstGeom prst="roundRect">
+            <a:avLst>
+              <a:gd name="adj" fmla="val 2521"/>
+            </a:avLst>
+          </a:prstGeom>
+        </p:spPr>
+      </p:pic>
+      <p:sp>
+        <p:nvSpPr>
+          <p:cNvPr id="6" name="Shape 3"/>
+          <p:cNvSpPr/>
+          <p:nvPr/>
+        </p:nvSpPr>
+        <p:spPr>
+          <a:xfrm>
+            <a:off x="815975" y="1974056"/>
+            <a:ext cx="6216650" cy="3784600"/>
+          </a:xfrm>
+          <a:prstGeom prst="roundRect">
+            <a:avLst>
+              <a:gd name="adj" fmla="val 2601"/>
+            </a:avLst>
+          </a:prstGeom>
+          <a:noFill/>
+          <a:ln w="6350">
+            <a:solidFill>
+              <a:srgbClr val="DAD8CF"/>
+            </a:solidFill>
+            <a:prstDash val="solid"/>
+          </a:ln>
+        </p:spPr>
+      </p:sp>
+      <p:sp>
+        <p:nvSpPr>
+          <p:cNvPr id="7" name="Text 4"/>
+          <p:cNvSpPr/>
+          <p:nvPr/>
+        </p:nvSpPr>
+        <p:spPr>
+          <a:xfrm>
+            <a:off x="7340600" y="1970881"/>
+            <a:ext cx="4159758" cy="594320"/>
+          </a:xfrm>
+          <a:prstGeom prst="rect">
+            <a:avLst/>
+          </a:prstGeom>
+          <a:noFill/>
+          <a:ln/>
+        </p:spPr>
+        <p:txBody>
+          <a:bodyPr wrap="square" lIns="0" tIns="0" rIns="0" bIns="0" rtlCol="0" anchor="t">
+            <a:normAutofit/>
+          </a:bodyPr>
+          <a:lstStyle/>
+          <a:p>
+            <a:pPr algn="l" indent="0" marL="0">
+              <a:lnSpc>
+                <a:spcPts val="2240"/>
+              </a:lnSpc>
+              <a:buNone/>
+            </a:pPr>
+            <a:r>
+              <a:rPr lang="en-US" sz="1600" dirty="0">
+                <a:solidFill>
+                  <a:srgbClr val="14213D"/>
+                </a:solidFill>
+                <a:latin typeface="IBM Plex Sans" pitchFamily="34" charset="0"/>
+                <a:ea typeface="IBM Plex Sans" pitchFamily="34" charset="-122"/>
+                <a:cs typeface="IBM Plex Sans" pitchFamily="34" charset="-120"/>
+              </a:rPr>
+              <a:t>1. Se elige el PDF y, si se quiere, el motivo de la firma.</a:t>
+            </a:r>
+            <a:endParaRPr lang="en-US" sz="1600" dirty="0"/>
+          </a:p>
+        </p:txBody>
+      </p:sp>
+      <p:sp>
+        <p:nvSpPr>
+          <p:cNvPr id="8" name="Text 5"/>
+          <p:cNvSpPr/>
+          <p:nvPr/>
+        </p:nvSpPr>
+        <p:spPr>
+          <a:xfrm>
+            <a:off x="7340600" y="2717602"/>
+            <a:ext cx="4159758" cy="594320"/>
+          </a:xfrm>
+          <a:prstGeom prst="rect">
+            <a:avLst/>
+          </a:prstGeom>
+          <a:noFill/>
+          <a:ln/>
+        </p:spPr>
+        <p:txBody>
+          <a:bodyPr wrap="square" lIns="0" tIns="0" rIns="0" bIns="0" rtlCol="0" anchor="t">
+            <a:normAutofit/>
+          </a:bodyPr>
+          <a:lstStyle/>
+          <a:p>
+            <a:pPr algn="l" indent="0" marL="0">
+              <a:lnSpc>
+                <a:spcPts val="2240"/>
+              </a:lnSpc>
+              <a:buNone/>
+            </a:pPr>
+            <a:r>
+              <a:rPr lang="en-US" sz="1600" dirty="0">
+                <a:solidFill>
+                  <a:srgbClr val="14213D"/>
+                </a:solidFill>
+                <a:latin typeface="IBM Plex Sans" pitchFamily="34" charset="0"/>
+                <a:ea typeface="IBM Plex Sans" pitchFamily="34" charset="-122"/>
+                <a:cs typeface="IBM Plex Sans" pitchFamily="34" charset="-120"/>
+              </a:rPr>
+              <a:t>2. AutoFirma abre su selector de certificado y firma en el equipo.</a:t>
+            </a:r>
+            <a:endParaRPr lang="en-US" sz="1600" dirty="0"/>
+          </a:p>
+        </p:txBody>
+      </p:sp>
+      <p:sp>
+        <p:nvSpPr>
+          <p:cNvPr id="9" name="Text 6"/>
+          <p:cNvSpPr/>
+          <p:nvPr/>
+        </p:nvSpPr>
+        <p:spPr>
+          <a:xfrm>
+            <a:off x="7340600" y="3464322"/>
+            <a:ext cx="4159758" cy="594320"/>
+          </a:xfrm>
+          <a:prstGeom prst="rect">
+            <a:avLst/>
+          </a:prstGeom>
+          <a:noFill/>
+          <a:ln/>
+        </p:spPr>
+        <p:txBody>
+          <a:bodyPr wrap="square" lIns="0" tIns="0" rIns="0" bIns="0" rtlCol="0" anchor="t">
+            <a:normAutofit/>
+          </a:bodyPr>
+          <a:lstStyle/>
+          <a:p>
+            <a:pPr algn="l" indent="0" marL="0">
+              <a:lnSpc>
+                <a:spcPts val="2240"/>
+              </a:lnSpc>
+              <a:buNone/>
+            </a:pPr>
+            <a:r>
+              <a:rPr lang="en-US" sz="1600" dirty="0">
+                <a:solidFill>
+                  <a:srgbClr val="14213D"/>
+                </a:solidFill>
+                <a:latin typeface="IBM Plex Sans" pitchFamily="34" charset="0"/>
+                <a:ea typeface="IBM Plex Sans" pitchFamily="34" charset="-122"/>
+                <a:cs typeface="IBM Plex Sans" pitchFamily="34" charset="-120"/>
+              </a:rPr>
+              <a:t>3. Se descarga el PDF firmado o se valida con un clic.</a:t>
+            </a:r>
+            <a:endParaRPr lang="en-US" sz="1600" dirty="0"/>
+          </a:p>
+        </p:txBody>
+      </p:sp>
+      <p:sp>
+        <p:nvSpPr>
+          <p:cNvPr id="10" name="Text 7"/>
+          <p:cNvSpPr/>
+          <p:nvPr/>
+        </p:nvSpPr>
+        <p:spPr>
+          <a:xfrm>
+            <a:off x="812800" y="6238280"/>
+            <a:ext cx="2807970" cy="238720"/>
+          </a:xfrm>
+          <a:prstGeom prst="rect">
+            <a:avLst/>
+          </a:prstGeom>
+          <a:noFill/>
+          <a:ln/>
+        </p:spPr>
+        <p:txBody>
+          <a:bodyPr wrap="square" lIns="0" tIns="0" rIns="0" bIns="0" rtlCol="0" anchor="t">
+            <a:normAutofit/>
+          </a:bodyPr>
+          <a:lstStyle/>
+          <a:p>
+            <a:pPr algn="l" indent="0" marL="0">
+              <a:lnSpc>
+                <a:spcPts val="1680"/>
+              </a:lnSpc>
+              <a:buNone/>
+            </a:pPr>
+            <a:r>
+              <a:rPr lang="en-US" sz="1200" dirty="0">
+                <a:solidFill>
+                  <a:srgbClr val="5B6478"/>
+                </a:solidFill>
+                <a:latin typeface="IBM Plex Sans" pitchFamily="34" charset="0"/>
+                <a:ea typeface="IBM Plex Sans" pitchFamily="34" charset="-122"/>
+                <a:cs typeface="IBM Plex Sans" pitchFamily="34" charset="-120"/>
+              </a:rPr>
+              <a:t>PDF Inspector &amp; Signature Verifier</a:t>
+            </a:r>
+            <a:endParaRPr lang="en-US" sz="1200" dirty="0"/>
+          </a:p>
+        </p:txBody>
+      </p:sp>
+    </p:spTree>
+  </p:cSld>
+  <p:clrMapOvr>
+    <a:masterClrMapping/>
+  </p:clrMapOvr>
+</p:sld>
+</file>
+
+<file path=ppt/slides/slide11.xml><?xml version="1.0" encoding="utf-8"?>
+<p:sld xmlns:a="http://schemas.openxmlformats.org/drawingml/2006/main" xmlns:r="http://schemas.openxmlformats.org/officeDocument/2006/relationships" xmlns:p="http://schemas.openxmlformats.org/presentationml/2006/main">
+  <p:cSld name="Slide 11">
+    <p:bg>
+      <p:bgPr>
+        <a:solidFill>
+          <a:srgbClr val="F6F5F0"/>
+        </a:solidFill>
+      </p:bgPr>
+    </p:bg>
+    <p:spTree>
+      <p:nvGrpSpPr>
+        <p:cNvPr id="1" name=""/>
+        <p:cNvGrpSpPr/>
+        <p:nvPr/>
+      </p:nvGrpSpPr>
+      <p:grpSpPr>
+        <a:xfrm>
+          <a:off x="0" y="0"/>
+          <a:ext cx="0" cy="0"/>
+          <a:chOff x="0" y="0"/>
+          <a:chExt cx="0" cy="0"/>
+        </a:xfrm>
+      </p:grpSpPr>
+      <p:sp>
+        <p:nvSpPr>
+          <p:cNvPr id="2" name="Text 0"/>
+          <p:cNvSpPr/>
+          <p:nvPr/>
+        </p:nvSpPr>
+        <p:spPr>
+          <a:xfrm>
+            <a:off x="812800" y="812800"/>
+            <a:ext cx="10883392" cy="274241"/>
+          </a:xfrm>
+          <a:prstGeom prst="rect">
+            <a:avLst/>
+          </a:prstGeom>
+          <a:noFill/>
+          <a:ln/>
+        </p:spPr>
+        <p:txBody>
+          <a:bodyPr wrap="square" lIns="0" tIns="0" rIns="0" bIns="0" rtlCol="0" anchor="t">
+            <a:normAutofit/>
+          </a:bodyPr>
+          <a:lstStyle/>
+          <a:p>
+            <a:pPr algn="l" indent="0" marL="0">
+              <a:lnSpc>
+                <a:spcPts val="1960"/>
+              </a:lnSpc>
+              <a:buNone/>
+            </a:pPr>
+            <a:r>
+              <a:rPr lang="en-US" sz="1400" b="1" spc="150" kern="0" dirty="0">
+                <a:solidFill>
+                  <a:srgbClr val="1F7A6D"/>
+                </a:solidFill>
+                <a:latin typeface="IBM Plex Sans" pitchFamily="34" charset="0"/>
+                <a:ea typeface="IBM Plex Sans" pitchFamily="34" charset="-122"/>
+                <a:cs typeface="IBM Plex Sans" pitchFamily="34" charset="-120"/>
+              </a:rPr>
+              <a:t>STACK</a:t>
+            </a:r>
+            <a:endParaRPr lang="en-US" sz="1400" dirty="0"/>
+          </a:p>
+        </p:txBody>
+      </p:sp>
+      <p:sp>
+        <p:nvSpPr>
+          <p:cNvPr id="3" name="Text 1"/>
+          <p:cNvSpPr/>
+          <p:nvPr>
+            <p:ph type="title"/>
+          </p:nvPr>
+        </p:nvSpPr>
+        <p:spPr>
+          <a:xfrm>
+            <a:off x="812800" y="1163241"/>
+            <a:ext cx="10883392" cy="528241"/>
+          </a:xfrm>
+          <a:prstGeom prst="rect">
+            <a:avLst/>
+          </a:prstGeom>
+          <a:noFill/>
+          <a:ln/>
+        </p:spPr>
+        <p:txBody>
+          <a:bodyPr wrap="square" lIns="0" tIns="0" rIns="0" bIns="0" rtlCol="0" anchor="t">
+            <a:normAutofit/>
+          </a:bodyPr>
+          <a:lstStyle/>
+          <a:p>
+            <a:pPr algn="l" indent="0" marL="0">
+              <a:lnSpc>
+                <a:spcPts val="3960"/>
+              </a:lnSpc>
+              <a:buNone/>
+            </a:pPr>
+            <a:r>
+              <a:rPr lang="en-US" sz="3600" b="1" i="0" dirty="0">
+                <a:solidFill>
+                  <a:srgbClr val="14213D"/>
+                </a:solidFill>
+                <a:latin typeface="Source Serif 4" pitchFamily="18" charset="0"/>
+                <a:ea typeface="Source Serif 4" pitchFamily="18" charset="-122"/>
+                <a:cs typeface="Source Serif 4" pitchFamily="18" charset="-120"/>
               </a:rPr>
               <a:t>Java 25 y librerías estándar del ecosistema</a:t>
             </a:r>
@@ -3935,7 +4623,7 @@
         <p:spPr>
           <a:xfrm>
             <a:off x="812800" y="6238280"/>
-            <a:ext cx="2410174" cy="238720"/>
+            <a:ext cx="2807970" cy="238720"/>
           </a:xfrm>
           <a:prstGeom prst="rect">
             <a:avLst/>
@@ -3978,9 +4666,9 @@
 </p:sld>
 </file>
 
-<file path=ppt/slides/slide11.xml><?xml version="1.0" encoding="utf-8"?>
+<file path=ppt/slides/slide12.xml><?xml version="1.0" encoding="utf-8"?>
 <p:sld xmlns:a="http://schemas.openxmlformats.org/drawingml/2006/main" xmlns:r="http://schemas.openxmlformats.org/officeDocument/2006/relationships" xmlns:p="http://schemas.openxmlformats.org/presentationml/2006/main">
-  <p:cSld name="Slide 11">
+  <p:cSld name="Slide 12">
     <p:bg>
       <p:bgPr>
         <a:solidFill>
@@ -4050,7 +4738,9 @@
         <p:nvSpPr>
           <p:cNvPr id="3" name="Text 1"/>
           <p:cNvSpPr/>
-          <p:nvPr/>
+          <p:nvPr>
+            <p:ph type="title"/>
+          </p:nvPr>
         </p:nvSpPr>
         <p:spPr>
           <a:xfrm>
@@ -4076,13 +4766,13 @@
               <a:buNone/>
             </a:pPr>
             <a:r>
-              <a:rPr lang="en-US" sz="3600" b="1" dirty="0">
+              <a:rPr lang="en-US" sz="3600" b="1" i="0" dirty="0">
                 <a:solidFill>
                   <a:srgbClr val="F6F5F0"/>
                 </a:solidFill>
-                <a:latin typeface="Source Serif 4" pitchFamily="34" charset="0"/>
-                <a:ea typeface="Source Serif 4" pitchFamily="34" charset="-122"/>
-                <a:cs typeface="Source Serif 4" pitchFamily="34" charset="-120"/>
+                <a:latin typeface="Source Serif 4" pitchFamily="18" charset="0"/>
+                <a:ea typeface="Source Serif 4" pitchFamily="18" charset="-122"/>
+                <a:cs typeface="Source Serif 4" pitchFamily="18" charset="-120"/>
               </a:rPr>
               <a:t>Cada cambio pasa por la integración continua</a:t>
             </a:r>
@@ -4099,11 +4789,11 @@
         <p:spPr>
           <a:xfrm>
             <a:off x="815975" y="1974056"/>
-            <a:ext cx="3621584" cy="2591891"/>
+            <a:ext cx="3621584" cy="2896791"/>
           </a:xfrm>
           <a:prstGeom prst="roundRect">
             <a:avLst>
-              <a:gd name="adj" fmla="val 3797"/>
+              <a:gd name="adj" fmla="val 3398"/>
             </a:avLst>
           </a:prstGeom>
           <a:solidFill>
@@ -4155,7 +4845,7 @@
                 <a:ea typeface="IBM Plex Sans" pitchFamily="34" charset="-122"/>
                 <a:cs typeface="IBM Plex Sans" pitchFamily="34" charset="-120"/>
               </a:rPr>
-              <a:t>356</a:t>
+              <a:t>486</a:t>
             </a:r>
             <a:endParaRPr lang="en-US" sz="6000" dirty="0"/>
           </a:p>
@@ -4170,7 +4860,7 @@
         <p:spPr>
           <a:xfrm>
             <a:off x="1073150" y="3044031"/>
-            <a:ext cx="3200451" cy="573881"/>
+            <a:ext cx="3200451" cy="848122"/>
           </a:xfrm>
           <a:prstGeom prst="rect">
             <a:avLst/>
@@ -4199,7 +4889,7 @@
                 <a:ea typeface="IBM Plex Sans" pitchFamily="34" charset="-122"/>
                 <a:cs typeface="IBM Plex Sans" pitchFamily="34" charset="-120"/>
               </a:rPr>
-              <a:t>tests automáticos, incluidos los de arquitectura con ArchUnit.</a:t>
+              <a:t>tests automáticos, incluidos los de arquitectura con ArchUnit, con un 91 % de cobertura de líneas.</a:t>
             </a:r>
             <a:endParaRPr lang="en-US" sz="1600" dirty="0"/>
           </a:p>
@@ -4214,11 +4904,11 @@
         <p:spPr>
           <a:xfrm>
             <a:off x="4647109" y="1974056"/>
-            <a:ext cx="6728916" cy="2591891"/>
+            <a:ext cx="6728916" cy="2896791"/>
           </a:xfrm>
           <a:prstGeom prst="roundRect">
             <a:avLst>
-              <a:gd name="adj" fmla="val 3797"/>
+              <a:gd name="adj" fmla="val 3398"/>
             </a:avLst>
           </a:prstGeom>
           <a:solidFill>
@@ -4270,7 +4960,7 @@
                 <a:ea typeface="IBM Plex Sans" pitchFamily="34" charset="-122"/>
                 <a:cs typeface="IBM Plex Sans" pitchFamily="34" charset="-120"/>
               </a:rPr>
-              <a:t>GitHub Actions en cada </a:t>
+              <a:t>Puertas en cada </a:t>
             </a:r>
             <a:r>
               <a:rPr lang="en-US" sz="1800" b="1" i="1" dirty="0">
@@ -4283,6 +4973,17 @@
               </a:rPr>
               <a:t>push</a:t>
             </a:r>
+            <a:r>
+              <a:rPr lang="en-US" sz="1800" b="1" dirty="0">
+                <a:solidFill>
+                  <a:srgbClr val="F6F5F0"/>
+                </a:solidFill>
+                <a:latin typeface="IBM Plex Sans" pitchFamily="34" charset="0"/>
+                <a:ea typeface="IBM Plex Sans" pitchFamily="34" charset="-122"/>
+                <a:cs typeface="IBM Plex Sans" pitchFamily="34" charset="-120"/>
+              </a:rPr>
+              <a:t> (GitHub Actions)</a:t>
+            </a:r>
             <a:endParaRPr lang="en-US" sz="1800" dirty="0"/>
           </a:p>
         </p:txBody>
@@ -4296,28 +4997,28 @@
         <p:spPr>
           <a:xfrm>
             <a:off x="4904284" y="2632472"/>
-            <a:ext cx="6401003" cy="309860"/>
-          </a:xfrm>
-          <a:prstGeom prst="rect">
-            <a:avLst/>
-          </a:prstGeom>
-          <a:noFill/>
-          <a:ln/>
-        </p:spPr>
-        <p:txBody>
-          <a:bodyPr wrap="square" lIns="0" tIns="0" rIns="0" bIns="0" rtlCol="0" anchor="t">
-            <a:normAutofit/>
-          </a:bodyPr>
-          <a:lstStyle/>
-          <a:p>
-            <a:pPr algn="l" indent="0" marL="0">
-              <a:lnSpc>
-                <a:spcPts val="2240"/>
-              </a:lnSpc>
-              <a:buNone/>
-            </a:pPr>
-            <a:r>
-              <a:rPr lang="en-US" sz="1600" dirty="0">
+            <a:ext cx="6401003" cy="292100"/>
+          </a:xfrm>
+          <a:prstGeom prst="rect">
+            <a:avLst/>
+          </a:prstGeom>
+          <a:noFill/>
+          <a:ln/>
+        </p:spPr>
+        <p:txBody>
+          <a:bodyPr wrap="square" lIns="0" tIns="0" rIns="0" bIns="0" rtlCol="0" anchor="t">
+            <a:normAutofit/>
+          </a:bodyPr>
+          <a:lstStyle/>
+          <a:p>
+            <a:pPr algn="l" indent="0" marL="0">
+              <a:lnSpc>
+                <a:spcPts val="2100"/>
+              </a:lnSpc>
+              <a:buNone/>
+            </a:pPr>
+            <a:r>
+              <a:rPr lang="en-US" sz="1500" dirty="0">
                 <a:solidFill>
                   <a:srgbClr val="C9D1E3"/>
                 </a:solidFill>
@@ -4325,10 +5026,43 @@
                 <a:ea typeface="IBM Plex Sans" pitchFamily="34" charset="-122"/>
                 <a:cs typeface="IBM Plex Sans" pitchFamily="34" charset="-120"/>
               </a:rPr>
-              <a:t>1. Compila y ejecuta todos los tests (</a:t>
-            </a:r>
-            <a:r>
-              <a:rPr lang="en-US" sz="1600" b="1" dirty="0">
+              <a:t>1. Compila y ejecuta todos los tests; falla si la cobertura baja del 88 %.</a:t>
+            </a:r>
+            <a:endParaRPr lang="en-US" sz="1500" dirty="0"/>
+          </a:p>
+        </p:txBody>
+      </p:sp>
+      <p:sp>
+        <p:nvSpPr>
+          <p:cNvPr id="10" name="Text 8"/>
+          <p:cNvSpPr/>
+          <p:nvPr/>
+        </p:nvSpPr>
+        <p:spPr>
+          <a:xfrm>
+            <a:off x="4904284" y="3026172"/>
+            <a:ext cx="6401003" cy="558800"/>
+          </a:xfrm>
+          <a:prstGeom prst="rect">
+            <a:avLst/>
+          </a:prstGeom>
+          <a:noFill/>
+          <a:ln/>
+        </p:spPr>
+        <p:txBody>
+          <a:bodyPr wrap="square" lIns="0" tIns="0" rIns="0" bIns="0" rtlCol="0" anchor="t">
+            <a:normAutofit/>
+          </a:bodyPr>
+          <a:lstStyle/>
+          <a:p>
+            <a:pPr algn="l" indent="0" marL="0">
+              <a:lnSpc>
+                <a:spcPts val="2100"/>
+              </a:lnSpc>
+              <a:buNone/>
+            </a:pPr>
+            <a:r>
+              <a:rPr lang="en-US" sz="1500" dirty="0">
                 <a:solidFill>
                   <a:srgbClr val="C9D1E3"/>
                 </a:solidFill>
@@ -4336,10 +5070,43 @@
                 <a:ea typeface="IBM Plex Sans" pitchFamily="34" charset="-122"/>
                 <a:cs typeface="IBM Plex Sans" pitchFamily="34" charset="-120"/>
               </a:rPr>
-              <a:t>./mvnw verify</a:t>
-            </a:r>
-            <a:r>
-              <a:rPr lang="en-US" sz="1600" dirty="0">
+              <a:t>2. Análisis estático: SpotBugs con FindSecBugs, PMD y código duplicado (CPD) sin avisos bloqueantes.</a:t>
+            </a:r>
+            <a:endParaRPr lang="en-US" sz="1500" dirty="0"/>
+          </a:p>
+        </p:txBody>
+      </p:sp>
+      <p:sp>
+        <p:nvSpPr>
+          <p:cNvPr id="11" name="Text 9"/>
+          <p:cNvSpPr/>
+          <p:nvPr/>
+        </p:nvSpPr>
+        <p:spPr>
+          <a:xfrm>
+            <a:off x="4904284" y="3686572"/>
+            <a:ext cx="6401003" cy="292100"/>
+          </a:xfrm>
+          <a:prstGeom prst="rect">
+            <a:avLst/>
+          </a:prstGeom>
+          <a:noFill/>
+          <a:ln/>
+        </p:spPr>
+        <p:txBody>
+          <a:bodyPr wrap="square" lIns="0" tIns="0" rIns="0" bIns="0" rtlCol="0" anchor="t">
+            <a:normAutofit/>
+          </a:bodyPr>
+          <a:lstStyle/>
+          <a:p>
+            <a:pPr algn="l" indent="0" marL="0">
+              <a:lnSpc>
+                <a:spcPts val="2100"/>
+              </a:lnSpc>
+              <a:buNone/>
+            </a:pPr>
+            <a:r>
+              <a:rPr lang="en-US" sz="1500" dirty="0">
                 <a:solidFill>
                   <a:srgbClr val="C9D1E3"/>
                 </a:solidFill>
@@ -4347,43 +5114,43 @@
                 <a:ea typeface="IBM Plex Sans" pitchFamily="34" charset="-122"/>
                 <a:cs typeface="IBM Plex Sans" pitchFamily="34" charset="-120"/>
               </a:rPr>
-              <a:t>).</a:t>
-            </a:r>
-            <a:endParaRPr lang="en-US" sz="1600" dirty="0"/>
-          </a:p>
-        </p:txBody>
-      </p:sp>
-      <p:sp>
-        <p:nvSpPr>
-          <p:cNvPr id="10" name="Text 8"/>
-          <p:cNvSpPr/>
-          <p:nvPr/>
-        </p:nvSpPr>
-        <p:spPr>
-          <a:xfrm>
-            <a:off x="4904284" y="3043932"/>
-            <a:ext cx="6401003" cy="594320"/>
-          </a:xfrm>
-          <a:prstGeom prst="rect">
-            <a:avLst/>
-          </a:prstGeom>
-          <a:noFill/>
-          <a:ln/>
-        </p:spPr>
-        <p:txBody>
-          <a:bodyPr wrap="square" lIns="0" tIns="0" rIns="0" bIns="0" rtlCol="0" anchor="t">
-            <a:normAutofit/>
-          </a:bodyPr>
-          <a:lstStyle/>
-          <a:p>
-            <a:pPr algn="l" indent="0" marL="0">
-              <a:lnSpc>
-                <a:spcPts val="2240"/>
-              </a:lnSpc>
-              <a:buNone/>
-            </a:pPr>
-            <a:r>
-              <a:rPr lang="en-US" sz="1600" dirty="0">
+              <a:t>3. CodeQL de GitHub, sin alertas.</a:t>
+            </a:r>
+            <a:endParaRPr lang="en-US" sz="1500" dirty="0"/>
+          </a:p>
+        </p:txBody>
+      </p:sp>
+      <p:sp>
+        <p:nvSpPr>
+          <p:cNvPr id="12" name="Text 10"/>
+          <p:cNvSpPr/>
+          <p:nvPr/>
+        </p:nvSpPr>
+        <p:spPr>
+          <a:xfrm>
+            <a:off x="4904284" y="4080272"/>
+            <a:ext cx="6401003" cy="558800"/>
+          </a:xfrm>
+          <a:prstGeom prst="rect">
+            <a:avLst/>
+          </a:prstGeom>
+          <a:noFill/>
+          <a:ln/>
+        </p:spPr>
+        <p:txBody>
+          <a:bodyPr wrap="square" lIns="0" tIns="0" rIns="0" bIns="0" rtlCol="0" anchor="t">
+            <a:normAutofit/>
+          </a:bodyPr>
+          <a:lstStyle/>
+          <a:p>
+            <a:pPr algn="l" indent="0" marL="0">
+              <a:lnSpc>
+                <a:spcPts val="2100"/>
+              </a:lnSpc>
+              <a:buNone/>
+            </a:pPr>
+            <a:r>
+              <a:rPr lang="en-US" sz="1500" dirty="0">
                 <a:solidFill>
                   <a:srgbClr val="C9D1E3"/>
                 </a:solidFill>
@@ -4391,53 +5158,9 @@
                 <a:ea typeface="IBM Plex Sans" pitchFamily="34" charset="-122"/>
                 <a:cs typeface="IBM Plex Sans" pitchFamily="34" charset="-120"/>
               </a:rPr>
-              <a:t>2. Construye la imagen Docker y la arranca con los límites de producción.</a:t>
-            </a:r>
-            <a:endParaRPr lang="en-US" sz="1600" dirty="0"/>
-          </a:p>
-        </p:txBody>
-      </p:sp>
-      <p:sp>
-        <p:nvSpPr>
-          <p:cNvPr id="11" name="Text 9"/>
-          <p:cNvSpPr/>
-          <p:nvPr/>
-        </p:nvSpPr>
-        <p:spPr>
-          <a:xfrm>
-            <a:off x="4904284" y="3739852"/>
-            <a:ext cx="6401003" cy="594320"/>
-          </a:xfrm>
-          <a:prstGeom prst="rect">
-            <a:avLst/>
-          </a:prstGeom>
-          <a:noFill/>
-          <a:ln/>
-        </p:spPr>
-        <p:txBody>
-          <a:bodyPr wrap="square" lIns="0" tIns="0" rIns="0" bIns="0" rtlCol="0" anchor="t">
-            <a:normAutofit/>
-          </a:bodyPr>
-          <a:lstStyle/>
-          <a:p>
-            <a:pPr algn="l" indent="0" marL="0">
-              <a:lnSpc>
-                <a:spcPts val="2240"/>
-              </a:lnSpc>
-              <a:buNone/>
-            </a:pPr>
-            <a:r>
-              <a:rPr lang="en-US" sz="1600" dirty="0">
-                <a:solidFill>
-                  <a:srgbClr val="C9D1E3"/>
-                </a:solidFill>
-                <a:latin typeface="IBM Plex Sans" pitchFamily="34" charset="0"/>
-                <a:ea typeface="IBM Plex Sans" pitchFamily="34" charset="-122"/>
-                <a:cs typeface="IBM Plex Sans" pitchFamily="34" charset="-120"/>
-              </a:rPr>
-              <a:t>3. Prueba de carga: 5 subidas simultáneas de ~79 MB, sin reinicios ni fallos por memoria.</a:t>
-            </a:r>
-            <a:endParaRPr lang="en-US" sz="1600" dirty="0"/>
+              <a:t>4. Imagen Docker con los límites de producción y prueba de carga: 5 subidas simultáneas de ~79 MB.</a:t>
+            </a:r>
+            <a:endParaRPr lang="en-US" sz="1500" dirty="0"/>
           </a:p>
         </p:txBody>
       </p:sp>
@@ -4449,9 +5172,9 @@
 </p:sld>
 </file>
 
-<file path=ppt/slides/slide12.xml><?xml version="1.0" encoding="utf-8"?>
+<file path=ppt/slides/slide13.xml><?xml version="1.0" encoding="utf-8"?>
 <p:sld xmlns:a="http://schemas.openxmlformats.org/drawingml/2006/main" xmlns:r="http://schemas.openxmlformats.org/officeDocument/2006/relationships" xmlns:p="http://schemas.openxmlformats.org/presentationml/2006/main">
-  <p:cSld name="Slide 12">
+  <p:cSld name="Slide 13">
     <p:bg>
       <p:bgPr>
         <a:solidFill>
@@ -4511,7 +5234,7 @@
                 <a:ea typeface="IBM Plex Sans" pitchFamily="34" charset="-122"/>
                 <a:cs typeface="IBM Plex Sans" pitchFamily="34" charset="-120"/>
               </a:rPr>
-              <a:t>DESPLIEGUE</a:t>
+              <a:t>SEGURIDAD</a:t>
             </a:r>
             <a:endParaRPr lang="en-US" sz="1400" dirty="0"/>
           </a:p>
@@ -4521,7 +5244,9 @@
         <p:nvSpPr>
           <p:cNvPr id="3" name="Text 1"/>
           <p:cNvSpPr/>
-          <p:nvPr/>
+          <p:nvPr>
+            <p:ph type="title"/>
+          </p:nvPr>
         </p:nvSpPr>
         <p:spPr>
           <a:xfrm>
@@ -4547,15 +5272,15 @@
               <a:buNone/>
             </a:pPr>
             <a:r>
-              <a:rPr lang="en-US" sz="3600" b="1" dirty="0">
+              <a:rPr lang="en-US" sz="3600" b="1" i="0" dirty="0">
                 <a:solidFill>
                   <a:srgbClr val="14213D"/>
                 </a:solidFill>
-                <a:latin typeface="Source Serif 4" pitchFamily="34" charset="0"/>
-                <a:ea typeface="Source Serif 4" pitchFamily="34" charset="-122"/>
-                <a:cs typeface="Source Serif 4" pitchFamily="34" charset="-120"/>
-              </a:rPr>
-              <a:t>Alojado en VPS</a:t>
+                <a:latin typeface="Source Serif 4" pitchFamily="18" charset="0"/>
+                <a:ea typeface="Source Serif 4" pitchFamily="18" charset="-122"/>
+                <a:cs typeface="Source Serif 4" pitchFamily="18" charset="-120"/>
+              </a:rPr>
+              <a:t>Auditado, atacado y corregido</a:t>
             </a:r>
             <a:endParaRPr lang="en-US" sz="3600" dirty="0"/>
           </a:p>
@@ -4570,11 +5295,11 @@
         <p:spPr>
           <a:xfrm>
             <a:off x="815975" y="1974056"/>
-            <a:ext cx="3380284" cy="2607270"/>
+            <a:ext cx="3397250" cy="2837954"/>
           </a:xfrm>
           <a:prstGeom prst="roundRect">
             <a:avLst>
-              <a:gd name="adj" fmla="val 3775"/>
+              <a:gd name="adj" fmla="val 3468"/>
             </a:avLst>
           </a:prstGeom>
           <a:solidFill>
@@ -4596,29 +5321,29 @@
         </p:nvSpPr>
         <p:spPr>
           <a:xfrm>
-            <a:off x="1073150" y="2231231"/>
-            <a:ext cx="2951912" cy="314920"/>
-          </a:xfrm>
-          <a:prstGeom prst="rect">
-            <a:avLst/>
-          </a:prstGeom>
-          <a:noFill/>
-          <a:ln/>
-        </p:spPr>
-        <p:txBody>
-          <a:bodyPr wrap="square" lIns="0" tIns="0" rIns="0" bIns="0" rtlCol="0" anchor="t">
-            <a:normAutofit/>
-          </a:bodyPr>
-          <a:lstStyle/>
-          <a:p>
-            <a:pPr algn="l" indent="0" marL="0">
-              <a:lnSpc>
-                <a:spcPts val="2280"/>
-              </a:lnSpc>
-              <a:buNone/>
-            </a:pPr>
-            <a:r>
-              <a:rPr lang="en-US" sz="1900" b="1" dirty="0">
+            <a:off x="1047750" y="2205831"/>
+            <a:ext cx="3021711" cy="284460"/>
+          </a:xfrm>
+          <a:prstGeom prst="rect">
+            <a:avLst/>
+          </a:prstGeom>
+          <a:noFill/>
+          <a:ln/>
+        </p:spPr>
+        <p:txBody>
+          <a:bodyPr wrap="square" lIns="0" tIns="0" rIns="0" bIns="0" rtlCol="0" anchor="t">
+            <a:normAutofit/>
+          </a:bodyPr>
+          <a:lstStyle/>
+          <a:p>
+            <a:pPr algn="l" indent="0" marL="0">
+              <a:lnSpc>
+                <a:spcPts val="2040"/>
+              </a:lnSpc>
+              <a:buNone/>
+            </a:pPr>
+            <a:r>
+              <a:rPr lang="en-US" sz="1700" b="1" dirty="0">
                 <a:solidFill>
                   <a:srgbClr val="14213D"/>
                 </a:solidFill>
@@ -4626,9 +5351,9 @@
                 <a:ea typeface="IBM Plex Sans" pitchFamily="34" charset="-122"/>
                 <a:cs typeface="IBM Plex Sans" pitchFamily="34" charset="-120"/>
               </a:rPr>
-              <a:t>Contenedor endurecido</a:t>
-            </a:r>
-            <a:endParaRPr lang="en-US" sz="1900" dirty="0"/>
+              <a:t>Cómo se revisó</a:t>
+            </a:r>
+            <a:endParaRPr lang="en-US" sz="1700" dirty="0"/>
           </a:p>
         </p:txBody>
       </p:sp>
@@ -4640,29 +5365,29 @@
         </p:nvSpPr>
         <p:spPr>
           <a:xfrm>
-            <a:off x="1073150" y="2622352"/>
-            <a:ext cx="2951912" cy="825500"/>
-          </a:xfrm>
-          <a:prstGeom prst="rect">
-            <a:avLst/>
-          </a:prstGeom>
-          <a:noFill/>
-          <a:ln/>
-        </p:spPr>
-        <p:txBody>
-          <a:bodyPr wrap="square" lIns="0" tIns="0" rIns="0" bIns="0" rtlCol="0" anchor="t">
-            <a:normAutofit/>
-          </a:bodyPr>
-          <a:lstStyle/>
-          <a:p>
-            <a:pPr algn="l" indent="0" marL="0">
-              <a:lnSpc>
-                <a:spcPts val="2100"/>
-              </a:lnSpc>
-              <a:buNone/>
-            </a:pPr>
-            <a:r>
-              <a:rPr lang="en-US" sz="1500" dirty="0">
+            <a:off x="1047750" y="2553791"/>
+            <a:ext cx="3021711" cy="487561"/>
+          </a:xfrm>
+          <a:prstGeom prst="rect">
+            <a:avLst/>
+          </a:prstGeom>
+          <a:noFill/>
+          <a:ln/>
+        </p:spPr>
+        <p:txBody>
+          <a:bodyPr wrap="square" lIns="0" tIns="0" rIns="0" bIns="0" rtlCol="0" anchor="t">
+            <a:normAutofit/>
+          </a:bodyPr>
+          <a:lstStyle/>
+          <a:p>
+            <a:pPr algn="l" indent="0" marL="0">
+              <a:lnSpc>
+                <a:spcPts val="1820"/>
+              </a:lnSpc>
+              <a:buNone/>
+            </a:pPr>
+            <a:r>
+              <a:rPr lang="en-US" sz="1300" dirty="0">
                 <a:solidFill>
                   <a:srgbClr val="4A5568"/>
                 </a:solidFill>
@@ -4670,9 +5395,9 @@
                 <a:ea typeface="IBM Plex Sans" pitchFamily="34" charset="-122"/>
                 <a:cs typeface="IBM Plex Sans" pitchFamily="34" charset="-120"/>
               </a:rPr>
-              <a:t>Imagen multi-etapa, usuario no root, sistema de ficheros de solo lectura, sin capacidades extra.</a:t>
-            </a:r>
-            <a:endParaRPr lang="en-US" sz="1500" dirty="0"/>
+              <a:t>Auditoría estática del código con Codex.</a:t>
+            </a:r>
+            <a:endParaRPr lang="en-US" sz="1300" dirty="0"/>
           </a:p>
         </p:txBody>
       </p:sp>
@@ -4684,29 +5409,29 @@
         </p:nvSpPr>
         <p:spPr>
           <a:xfrm>
-            <a:off x="1073150" y="3524052"/>
-            <a:ext cx="2951912" cy="825500"/>
-          </a:xfrm>
-          <a:prstGeom prst="rect">
-            <a:avLst/>
-          </a:prstGeom>
-          <a:noFill/>
-          <a:ln/>
-        </p:spPr>
-        <p:txBody>
-          <a:bodyPr wrap="square" lIns="0" tIns="0" rIns="0" bIns="0" rtlCol="0" anchor="t">
-            <a:normAutofit/>
-          </a:bodyPr>
-          <a:lstStyle/>
-          <a:p>
-            <a:pPr algn="l" indent="0" marL="0">
-              <a:lnSpc>
-                <a:spcPts val="2100"/>
-              </a:lnSpc>
-              <a:buNone/>
-            </a:pPr>
-            <a:r>
-              <a:rPr lang="en-US" sz="1500" dirty="0">
+            <a:off x="1047750" y="3104852"/>
+            <a:ext cx="3021711" cy="487561"/>
+          </a:xfrm>
+          <a:prstGeom prst="rect">
+            <a:avLst/>
+          </a:prstGeom>
+          <a:noFill/>
+          <a:ln/>
+        </p:spPr>
+        <p:txBody>
+          <a:bodyPr wrap="square" lIns="0" tIns="0" rIns="0" bIns="0" rtlCol="0" anchor="t">
+            <a:normAutofit/>
+          </a:bodyPr>
+          <a:lstStyle/>
+          <a:p>
+            <a:pPr algn="l" indent="0" marL="0">
+              <a:lnSpc>
+                <a:spcPts val="1820"/>
+              </a:lnSpc>
+              <a:buNone/>
+            </a:pPr>
+            <a:r>
+              <a:rPr lang="en-US" sz="1300" dirty="0">
                 <a:solidFill>
                   <a:srgbClr val="4A5568"/>
                 </a:solidFill>
@@ -4714,26 +5439,70 @@
                 <a:ea typeface="IBM Plex Sans" pitchFamily="34" charset="-122"/>
                 <a:cs typeface="IBM Plex Sans" pitchFamily="34" charset="-120"/>
               </a:rPr>
-              <a:t>Límite de 2 GB y perfil de JVM con cada región de memoria acotada.</a:t>
-            </a:r>
-            <a:endParaRPr lang="en-US" sz="1500" dirty="0"/>
-          </a:p>
-        </p:txBody>
-      </p:sp>
-      <p:sp>
-        <p:nvSpPr>
-          <p:cNvPr id="8" name="Shape 6"/>
-          <p:cNvSpPr/>
-          <p:nvPr/>
-        </p:nvSpPr>
-        <p:spPr>
-          <a:xfrm>
-            <a:off x="4405809" y="1974056"/>
-            <a:ext cx="3380383" cy="2607270"/>
+              <a:t>Pentest local con PDF hostiles y ataques SSRF.</a:t>
+            </a:r>
+            <a:endParaRPr lang="en-US" sz="1300" dirty="0"/>
+          </a:p>
+        </p:txBody>
+      </p:sp>
+      <p:sp>
+        <p:nvSpPr>
+          <p:cNvPr id="8" name="Text 6"/>
+          <p:cNvSpPr/>
+          <p:nvPr/>
+        </p:nvSpPr>
+        <p:spPr>
+          <a:xfrm>
+            <a:off x="1047750" y="3655913"/>
+            <a:ext cx="3021711" cy="487561"/>
+          </a:xfrm>
+          <a:prstGeom prst="rect">
+            <a:avLst/>
+          </a:prstGeom>
+          <a:noFill/>
+          <a:ln/>
+        </p:spPr>
+        <p:txBody>
+          <a:bodyPr wrap="square" lIns="0" tIns="0" rIns="0" bIns="0" rtlCol="0" anchor="t">
+            <a:normAutofit/>
+          </a:bodyPr>
+          <a:lstStyle/>
+          <a:p>
+            <a:pPr algn="l" indent="0" marL="0">
+              <a:lnSpc>
+                <a:spcPts val="1820"/>
+              </a:lnSpc>
+              <a:buNone/>
+            </a:pPr>
+            <a:r>
+              <a:rPr lang="en-US" sz="1300" dirty="0">
+                <a:solidFill>
+                  <a:srgbClr val="4A5568"/>
+                </a:solidFill>
+                <a:latin typeface="IBM Plex Sans" pitchFamily="34" charset="0"/>
+                <a:ea typeface="IBM Plex Sans" pitchFamily="34" charset="-122"/>
+                <a:cs typeface="IBM Plex Sans" pitchFamily="34" charset="-120"/>
+              </a:rPr>
+              <a:t>Dependencias contrastadas con OSV.dev.</a:t>
+            </a:r>
+            <a:endParaRPr lang="en-US" sz="1300" dirty="0"/>
+          </a:p>
+        </p:txBody>
+      </p:sp>
+      <p:sp>
+        <p:nvSpPr>
+          <p:cNvPr id="9" name="Shape 7"/>
+          <p:cNvSpPr/>
+          <p:nvPr/>
+        </p:nvSpPr>
+        <p:spPr>
+          <a:xfrm>
+            <a:off x="4397375" y="1974056"/>
+            <a:ext cx="3397250" cy="2837954"/>
           </a:xfrm>
           <a:prstGeom prst="roundRect">
             <a:avLst>
-              <a:gd name="adj" fmla="val 3775"/>
+              <a:gd name="adj" fmla="val 3468"/>
             </a:avLst>
           </a:prstGeom>
           <a:solidFill>
@@ -4749,35 +5518,35 @@
       </p:sp>
       <p:sp>
         <p:nvSpPr>
-          <p:cNvPr id="9" name="Text 7"/>
-          <p:cNvSpPr/>
-          <p:nvPr/>
-        </p:nvSpPr>
-        <p:spPr>
-          <a:xfrm>
-            <a:off x="4662984" y="2231231"/>
-            <a:ext cx="2952014" cy="314920"/>
-          </a:xfrm>
-          <a:prstGeom prst="rect">
-            <a:avLst/>
-          </a:prstGeom>
-          <a:noFill/>
-          <a:ln/>
-        </p:spPr>
-        <p:txBody>
-          <a:bodyPr wrap="square" lIns="0" tIns="0" rIns="0" bIns="0" rtlCol="0" anchor="t">
-            <a:normAutofit/>
-          </a:bodyPr>
-          <a:lstStyle/>
-          <a:p>
-            <a:pPr algn="l" indent="0" marL="0">
-              <a:lnSpc>
-                <a:spcPts val="2280"/>
-              </a:lnSpc>
-              <a:buNone/>
-            </a:pPr>
-            <a:r>
-              <a:rPr lang="en-US" sz="1900" b="1" dirty="0">
+          <p:cNvPr id="10" name="Text 8"/>
+          <p:cNvSpPr/>
+          <p:nvPr/>
+        </p:nvSpPr>
+        <p:spPr>
+          <a:xfrm>
+            <a:off x="4629150" y="2205831"/>
+            <a:ext cx="3021711" cy="284460"/>
+          </a:xfrm>
+          <a:prstGeom prst="rect">
+            <a:avLst/>
+          </a:prstGeom>
+          <a:noFill/>
+          <a:ln/>
+        </p:spPr>
+        <p:txBody>
+          <a:bodyPr wrap="square" lIns="0" tIns="0" rIns="0" bIns="0" rtlCol="0" anchor="t">
+            <a:normAutofit/>
+          </a:bodyPr>
+          <a:lstStyle/>
+          <a:p>
+            <a:pPr algn="l" indent="0" marL="0">
+              <a:lnSpc>
+                <a:spcPts val="2040"/>
+              </a:lnSpc>
+              <a:buNone/>
+            </a:pPr>
+            <a:r>
+              <a:rPr lang="en-US" sz="1700" b="1" dirty="0">
                 <a:solidFill>
                   <a:srgbClr val="14213D"/>
                 </a:solidFill>
@@ -4785,43 +5554,43 @@
                 <a:ea typeface="IBM Plex Sans" pitchFamily="34" charset="-122"/>
                 <a:cs typeface="IBM Plex Sans" pitchFamily="34" charset="-120"/>
               </a:rPr>
-              <a:t>Servidor</a:t>
-            </a:r>
-            <a:endParaRPr lang="en-US" sz="1900" dirty="0"/>
-          </a:p>
-        </p:txBody>
-      </p:sp>
-      <p:sp>
-        <p:nvSpPr>
-          <p:cNvPr id="10" name="Text 8"/>
-          <p:cNvSpPr/>
-          <p:nvPr/>
-        </p:nvSpPr>
-        <p:spPr>
-          <a:xfrm>
-            <a:off x="4662984" y="2622352"/>
-            <a:ext cx="2952014" cy="558800"/>
-          </a:xfrm>
-          <a:prstGeom prst="rect">
-            <a:avLst/>
-          </a:prstGeom>
-          <a:noFill/>
-          <a:ln/>
-        </p:spPr>
-        <p:txBody>
-          <a:bodyPr wrap="square" lIns="0" tIns="0" rIns="0" bIns="0" rtlCol="0" anchor="t">
-            <a:normAutofit/>
-          </a:bodyPr>
-          <a:lstStyle/>
-          <a:p>
-            <a:pPr algn="l" indent="0" marL="0">
-              <a:lnSpc>
-                <a:spcPts val="2100"/>
-              </a:lnSpc>
-              <a:buNone/>
-            </a:pPr>
-            <a:r>
-              <a:rPr lang="en-US" sz="1500" dirty="0">
+              <a:t>Encontrado y corregido</a:t>
+            </a:r>
+            <a:endParaRPr lang="en-US" sz="1700" dirty="0"/>
+          </a:p>
+        </p:txBody>
+      </p:sp>
+      <p:sp>
+        <p:nvSpPr>
+          <p:cNvPr id="11" name="Text 9"/>
+          <p:cNvSpPr/>
+          <p:nvPr/>
+        </p:nvSpPr>
+        <p:spPr>
+          <a:xfrm>
+            <a:off x="4629150" y="2553791"/>
+            <a:ext cx="3021711" cy="718641"/>
+          </a:xfrm>
+          <a:prstGeom prst="rect">
+            <a:avLst/>
+          </a:prstGeom>
+          <a:noFill/>
+          <a:ln/>
+        </p:spPr>
+        <p:txBody>
+          <a:bodyPr wrap="square" lIns="0" tIns="0" rIns="0" bIns="0" rtlCol="0" anchor="t">
+            <a:normAutofit/>
+          </a:bodyPr>
+          <a:lstStyle/>
+          <a:p>
+            <a:pPr algn="l" indent="0" marL="0">
+              <a:lnSpc>
+                <a:spcPts val="1820"/>
+              </a:lnSpc>
+              <a:buNone/>
+            </a:pPr>
+            <a:r>
+              <a:rPr lang="en-US" sz="1300" dirty="0">
                 <a:solidFill>
                   <a:srgbClr val="4A5568"/>
                 </a:solidFill>
@@ -4829,43 +5598,43 @@
                 <a:ea typeface="IBM Plex Sans" pitchFamily="34" charset="-122"/>
                 <a:cs typeface="IBM Plex Sans" pitchFamily="34" charset="-120"/>
               </a:rPr>
-              <a:t>OVHcloud VPS-1: 2 vCore, 4 GB, Ubuntu 24.04.</a:t>
-            </a:r>
-            <a:endParaRPr lang="en-US" sz="1500" dirty="0"/>
-          </a:p>
-        </p:txBody>
-      </p:sp>
-      <p:sp>
-        <p:nvSpPr>
-          <p:cNvPr id="11" name="Text 9"/>
-          <p:cNvSpPr/>
-          <p:nvPr/>
-        </p:nvSpPr>
-        <p:spPr>
-          <a:xfrm>
-            <a:off x="4662984" y="3257352"/>
-            <a:ext cx="2952014" cy="558800"/>
-          </a:xfrm>
-          <a:prstGeom prst="rect">
-            <a:avLst/>
-          </a:prstGeom>
-          <a:noFill/>
-          <a:ln/>
-        </p:spPr>
-        <p:txBody>
-          <a:bodyPr wrap="square" lIns="0" tIns="0" rIns="0" bIns="0" rtlCol="0" anchor="t">
-            <a:normAutofit/>
-          </a:bodyPr>
-          <a:lstStyle/>
-          <a:p>
-            <a:pPr algn="l" indent="0" marL="0">
-              <a:lnSpc>
-                <a:spcPts val="2100"/>
-              </a:lnSpc>
-              <a:buNone/>
-            </a:pPr>
-            <a:r>
-              <a:rPr lang="en-US" sz="1500" dirty="0">
+              <a:t>Un PDF de 510 KB que se descomprimía a 500 MB tumbaba el servicio.</a:t>
+            </a:r>
+            <a:endParaRPr lang="en-US" sz="1300" dirty="0"/>
+          </a:p>
+        </p:txBody>
+      </p:sp>
+      <p:sp>
+        <p:nvSpPr>
+          <p:cNvPr id="12" name="Text 10"/>
+          <p:cNvSpPr/>
+          <p:nvPr/>
+        </p:nvSpPr>
+        <p:spPr>
+          <a:xfrm>
+            <a:off x="4629150" y="3335933"/>
+            <a:ext cx="3021711" cy="718641"/>
+          </a:xfrm>
+          <a:prstGeom prst="rect">
+            <a:avLst/>
+          </a:prstGeom>
+          <a:noFill/>
+          <a:ln/>
+        </p:spPr>
+        <p:txBody>
+          <a:bodyPr wrap="square" lIns="0" tIns="0" rIns="0" bIns="0" rtlCol="0" anchor="t">
+            <a:normAutofit/>
+          </a:bodyPr>
+          <a:lstStyle/>
+          <a:p>
+            <a:pPr algn="l" indent="0" marL="0">
+              <a:lnSpc>
+                <a:spcPts val="1820"/>
+              </a:lnSpc>
+              <a:buNone/>
+            </a:pPr>
+            <a:r>
+              <a:rPr lang="en-US" sz="1300" dirty="0">
                 <a:solidFill>
                   <a:srgbClr val="4A5568"/>
                 </a:solidFill>
@@ -4873,26 +5642,70 @@
                 <a:ea typeface="IBM Plex Sans" pitchFamily="34" charset="-122"/>
                 <a:cs typeface="IBM Plex Sans" pitchFamily="34" charset="-120"/>
               </a:rPr>
-              <a:t>SSH solo con clave y cortafuegos con los puertos 22, 80 y 443.</a:t>
-            </a:r>
-            <a:endParaRPr lang="en-US" sz="1500" dirty="0"/>
-          </a:p>
-        </p:txBody>
-      </p:sp>
-      <p:sp>
-        <p:nvSpPr>
-          <p:cNvPr id="12" name="Shape 10"/>
-          <p:cNvSpPr/>
-          <p:nvPr/>
-        </p:nvSpPr>
-        <p:spPr>
-          <a:xfrm>
-            <a:off x="7995741" y="1974056"/>
-            <a:ext cx="3380284" cy="2607270"/>
+              <a:t>Un sello de tiempo falso podía dar por válida una firma con certificado caducado.</a:t>
+            </a:r>
+            <a:endParaRPr lang="en-US" sz="1300" dirty="0"/>
+          </a:p>
+        </p:txBody>
+      </p:sp>
+      <p:sp>
+        <p:nvSpPr>
+          <p:cNvPr id="13" name="Text 11"/>
+          <p:cNvSpPr/>
+          <p:nvPr/>
+        </p:nvSpPr>
+        <p:spPr>
+          <a:xfrm>
+            <a:off x="4629150" y="4118074"/>
+            <a:ext cx="3021711" cy="487561"/>
+          </a:xfrm>
+          <a:prstGeom prst="rect">
+            <a:avLst/>
+          </a:prstGeom>
+          <a:noFill/>
+          <a:ln/>
+        </p:spPr>
+        <p:txBody>
+          <a:bodyPr wrap="square" lIns="0" tIns="0" rIns="0" bIns="0" rtlCol="0" anchor="t">
+            <a:normAutofit/>
+          </a:bodyPr>
+          <a:lstStyle/>
+          <a:p>
+            <a:pPr algn="l" indent="0" marL="0">
+              <a:lnSpc>
+                <a:spcPts val="1820"/>
+              </a:lnSpc>
+              <a:buNone/>
+            </a:pPr>
+            <a:r>
+              <a:rPr lang="en-US" sz="1300" dirty="0">
+                <a:solidFill>
+                  <a:srgbClr val="4A5568"/>
+                </a:solidFill>
+                <a:latin typeface="IBM Plex Sans" pitchFamily="34" charset="0"/>
+                <a:ea typeface="IBM Plex Sans" pitchFamily="34" charset="-122"/>
+                <a:cs typeface="IBM Plex Sans" pitchFamily="34" charset="-120"/>
+              </a:rPr>
+              <a:t>Topes de recursos, revocación de toda la cadena y librerías parcheadas.</a:t>
+            </a:r>
+            <a:endParaRPr lang="en-US" sz="1300" dirty="0"/>
+          </a:p>
+        </p:txBody>
+      </p:sp>
+      <p:sp>
+        <p:nvSpPr>
+          <p:cNvPr id="14" name="Shape 12"/>
+          <p:cNvSpPr/>
+          <p:nvPr/>
+        </p:nvSpPr>
+        <p:spPr>
+          <a:xfrm>
+            <a:off x="7978775" y="1974056"/>
+            <a:ext cx="3397250" cy="2837954"/>
           </a:xfrm>
           <a:prstGeom prst="roundRect">
             <a:avLst>
-              <a:gd name="adj" fmla="val 3775"/>
+              <a:gd name="adj" fmla="val 3468"/>
             </a:avLst>
           </a:prstGeom>
           <a:solidFill>
@@ -4908,35 +5721,35 @@
       </p:sp>
       <p:sp>
         <p:nvSpPr>
-          <p:cNvPr id="13" name="Text 11"/>
-          <p:cNvSpPr/>
-          <p:nvPr/>
-        </p:nvSpPr>
-        <p:spPr>
-          <a:xfrm>
-            <a:off x="8252916" y="2231231"/>
-            <a:ext cx="2951912" cy="314920"/>
-          </a:xfrm>
-          <a:prstGeom prst="rect">
-            <a:avLst/>
-          </a:prstGeom>
-          <a:noFill/>
-          <a:ln/>
-        </p:spPr>
-        <p:txBody>
-          <a:bodyPr wrap="square" lIns="0" tIns="0" rIns="0" bIns="0" rtlCol="0" anchor="t">
-            <a:normAutofit/>
-          </a:bodyPr>
-          <a:lstStyle/>
-          <a:p>
-            <a:pPr algn="l" indent="0" marL="0">
-              <a:lnSpc>
-                <a:spcPts val="2280"/>
-              </a:lnSpc>
-              <a:buNone/>
-            </a:pPr>
-            <a:r>
-              <a:rPr lang="en-US" sz="1900" b="1" dirty="0">
+          <p:cNvPr id="15" name="Text 13"/>
+          <p:cNvSpPr/>
+          <p:nvPr/>
+        </p:nvSpPr>
+        <p:spPr>
+          <a:xfrm>
+            <a:off x="8210550" y="2205831"/>
+            <a:ext cx="3021711" cy="284460"/>
+          </a:xfrm>
+          <a:prstGeom prst="rect">
+            <a:avLst/>
+          </a:prstGeom>
+          <a:noFill/>
+          <a:ln/>
+        </p:spPr>
+        <p:txBody>
+          <a:bodyPr wrap="square" lIns="0" tIns="0" rIns="0" bIns="0" rtlCol="0" anchor="t">
+            <a:normAutofit/>
+          </a:bodyPr>
+          <a:lstStyle/>
+          <a:p>
+            <a:pPr algn="l" indent="0" marL="0">
+              <a:lnSpc>
+                <a:spcPts val="2040"/>
+              </a:lnSpc>
+              <a:buNone/>
+            </a:pPr>
+            <a:r>
+              <a:rPr lang="en-US" sz="1700" b="1" dirty="0">
                 <a:solidFill>
                   <a:srgbClr val="14213D"/>
                 </a:solidFill>
@@ -4944,43 +5757,43 @@
                 <a:ea typeface="IBM Plex Sans" pitchFamily="34" charset="-122"/>
                 <a:cs typeface="IBM Plex Sans" pitchFamily="34" charset="-120"/>
               </a:rPr>
-              <a:t>HTTPS</a:t>
-            </a:r>
-            <a:endParaRPr lang="en-US" sz="1900" dirty="0"/>
-          </a:p>
-        </p:txBody>
-      </p:sp>
-      <p:sp>
-        <p:nvSpPr>
-          <p:cNvPr id="14" name="Text 12"/>
-          <p:cNvSpPr/>
-          <p:nvPr/>
-        </p:nvSpPr>
-        <p:spPr>
-          <a:xfrm>
-            <a:off x="8252916" y="2622352"/>
-            <a:ext cx="2951912" cy="1092200"/>
-          </a:xfrm>
-          <a:prstGeom prst="rect">
-            <a:avLst/>
-          </a:prstGeom>
-          <a:noFill/>
-          <a:ln/>
-        </p:spPr>
-        <p:txBody>
-          <a:bodyPr wrap="square" lIns="0" tIns="0" rIns="0" bIns="0" rtlCol="0" anchor="t">
-            <a:normAutofit/>
-          </a:bodyPr>
-          <a:lstStyle/>
-          <a:p>
-            <a:pPr algn="l" indent="0" marL="0">
-              <a:lnSpc>
-                <a:spcPts val="2100"/>
-              </a:lnSpc>
-              <a:buNone/>
-            </a:pPr>
-            <a:r>
-              <a:rPr lang="en-US" sz="1500" dirty="0">
+              <a:t>Comprobado que resiste</a:t>
+            </a:r>
+            <a:endParaRPr lang="en-US" sz="1700" dirty="0"/>
+          </a:p>
+        </p:txBody>
+      </p:sp>
+      <p:sp>
+        <p:nvSpPr>
+          <p:cNvPr id="16" name="Text 14"/>
+          <p:cNvSpPr/>
+          <p:nvPr/>
+        </p:nvSpPr>
+        <p:spPr>
+          <a:xfrm>
+            <a:off x="8210550" y="2553791"/>
+            <a:ext cx="3021711" cy="718641"/>
+          </a:xfrm>
+          <a:prstGeom prst="rect">
+            <a:avLst/>
+          </a:prstGeom>
+          <a:noFill/>
+          <a:ln/>
+        </p:spPr>
+        <p:txBody>
+          <a:bodyPr wrap="square" lIns="0" tIns="0" rIns="0" bIns="0" rtlCol="0" anchor="t">
+            <a:normAutofit/>
+          </a:bodyPr>
+          <a:lstStyle/>
+          <a:p>
+            <a:pPr algn="l" indent="0" marL="0">
+              <a:lnSpc>
+                <a:spcPts val="1820"/>
+              </a:lnSpc>
+              <a:buNone/>
+            </a:pPr>
+            <a:r>
+              <a:rPr lang="en-US" sz="1300" dirty="0">
                 <a:solidFill>
                   <a:srgbClr val="4A5568"/>
                 </a:solidFill>
@@ -4988,43 +5801,43 @@
                 <a:ea typeface="IBM Plex Sans" pitchFamily="34" charset="-122"/>
                 <a:cs typeface="IBM Plex Sans" pitchFamily="34" charset="-120"/>
               </a:rPr>
-              <a:t>Proxy Caddy con certificado de Let's Encrypt renovado automáticamente y cabecera HSTS.</a:t>
-            </a:r>
-            <a:endParaRPr lang="en-US" sz="1500" dirty="0"/>
-          </a:p>
-        </p:txBody>
-      </p:sp>
-      <p:sp>
-        <p:nvSpPr>
-          <p:cNvPr id="15" name="Text 13"/>
-          <p:cNvSpPr/>
-          <p:nvPr/>
-        </p:nvSpPr>
-        <p:spPr>
-          <a:xfrm>
-            <a:off x="8252916" y="3790752"/>
-            <a:ext cx="2951912" cy="558800"/>
-          </a:xfrm>
-          <a:prstGeom prst="rect">
-            <a:avLst/>
-          </a:prstGeom>
-          <a:noFill/>
-          <a:ln/>
-        </p:spPr>
-        <p:txBody>
-          <a:bodyPr wrap="square" lIns="0" tIns="0" rIns="0" bIns="0" rtlCol="0" anchor="t">
-            <a:normAutofit/>
-          </a:bodyPr>
-          <a:lstStyle/>
-          <a:p>
-            <a:pPr algn="l" indent="0" marL="0">
-              <a:lnSpc>
-                <a:spcPts val="2100"/>
-              </a:lnSpc>
-              <a:buNone/>
-            </a:pPr>
-            <a:r>
-              <a:rPr lang="en-US" sz="1500" dirty="0">
+              <a:t>SSRF: los 7 destinos internos probados, bloqueados sin ninguna conexión.</a:t>
+            </a:r>
+            <a:endParaRPr lang="en-US" sz="1300" dirty="0"/>
+          </a:p>
+        </p:txBody>
+      </p:sp>
+      <p:sp>
+        <p:nvSpPr>
+          <p:cNvPr id="17" name="Text 15"/>
+          <p:cNvSpPr/>
+          <p:nvPr/>
+        </p:nvSpPr>
+        <p:spPr>
+          <a:xfrm>
+            <a:off x="8210550" y="3335933"/>
+            <a:ext cx="3021711" cy="487561"/>
+          </a:xfrm>
+          <a:prstGeom prst="rect">
+            <a:avLst/>
+          </a:prstGeom>
+          <a:noFill/>
+          <a:ln/>
+        </p:spPr>
+        <p:txBody>
+          <a:bodyPr wrap="square" lIns="0" tIns="0" rIns="0" bIns="0" rtlCol="0" anchor="t">
+            <a:normAutofit/>
+          </a:bodyPr>
+          <a:lstStyle/>
+          <a:p>
+            <a:pPr algn="l" indent="0" marL="0">
+              <a:lnSpc>
+                <a:spcPts val="1820"/>
+              </a:lnSpc>
+              <a:buNone/>
+            </a:pPr>
+            <a:r>
+              <a:rPr lang="en-US" sz="1300" dirty="0">
                 <a:solidFill>
                   <a:srgbClr val="4A5568"/>
                 </a:solidFill>
@@ -5032,22 +5845,66 @@
                 <a:ea typeface="IBM Plex Sans" pitchFamily="34" charset="-122"/>
                 <a:cs typeface="IBM Plex Sans" pitchFamily="34" charset="-120"/>
               </a:rPr>
-              <a:t>La aplicación solo escucha en el bucle local.</a:t>
-            </a:r>
-            <a:endParaRPr lang="en-US" sz="1500" dirty="0"/>
-          </a:p>
-        </p:txBody>
-      </p:sp>
-      <p:sp>
-        <p:nvSpPr>
-          <p:cNvPr id="16" name="Text 14"/>
+              <a:t>Errores sin trazas ni rutas internas; interfaz sin XSS.</a:t>
+            </a:r>
+            <a:endParaRPr lang="en-US" sz="1300" dirty="0"/>
+          </a:p>
+        </p:txBody>
+      </p:sp>
+      <p:sp>
+        <p:nvSpPr>
+          <p:cNvPr id="18" name="Text 16"/>
+          <p:cNvSpPr/>
+          <p:nvPr/>
+        </p:nvSpPr>
+        <p:spPr>
+          <a:xfrm>
+            <a:off x="8210550" y="3886994"/>
+            <a:ext cx="3021711" cy="487561"/>
+          </a:xfrm>
+          <a:prstGeom prst="rect">
+            <a:avLst/>
+          </a:prstGeom>
+          <a:noFill/>
+          <a:ln/>
+        </p:spPr>
+        <p:txBody>
+          <a:bodyPr wrap="square" lIns="0" tIns="0" rIns="0" bIns="0" rtlCol="0" anchor="t">
+            <a:normAutofit/>
+          </a:bodyPr>
+          <a:lstStyle/>
+          <a:p>
+            <a:pPr algn="l" indent="0" marL="0">
+              <a:lnSpc>
+                <a:spcPts val="1820"/>
+              </a:lnSpc>
+              <a:buNone/>
+            </a:pPr>
+            <a:r>
+              <a:rPr lang="en-US" sz="1300" dirty="0">
+                <a:solidFill>
+                  <a:srgbClr val="4A5568"/>
+                </a:solidFill>
+                <a:latin typeface="IBM Plex Sans" pitchFamily="34" charset="0"/>
+                <a:ea typeface="IBM Plex Sans" pitchFamily="34" charset="-122"/>
+                <a:cs typeface="IBM Plex Sans" pitchFamily="34" charset="-120"/>
+              </a:rPr>
+              <a:t>Límite de análisis simultáneos con 503 y recuperación.</a:t>
+            </a:r>
+            <a:endParaRPr lang="en-US" sz="1300" dirty="0"/>
+          </a:p>
+        </p:txBody>
+      </p:sp>
+      <p:sp>
+        <p:nvSpPr>
+          <p:cNvPr id="19" name="Text 17"/>
           <p:cNvSpPr/>
           <p:nvPr/>
         </p:nvSpPr>
         <p:spPr>
           <a:xfrm>
             <a:off x="812800" y="6238280"/>
-            <a:ext cx="2410174" cy="238720"/>
+            <a:ext cx="2807970" cy="238720"/>
           </a:xfrm>
           <a:prstGeom prst="rect">
             <a:avLst/>
@@ -5079,515 +5936,6 @@
               <a:t>PDF Inspector &amp; Signature Verifier</a:t>
             </a:r>
             <a:endParaRPr lang="en-US" sz="1200" dirty="0"/>
-          </a:p>
-        </p:txBody>
-      </p:sp>
-    </p:spTree>
-  </p:cSld>
-  <p:clrMapOvr>
-    <a:masterClrMapping/>
-  </p:clrMapOvr>
-</p:sld>
-</file>
-
-<file path=ppt/slides/slide13.xml><?xml version="1.0" encoding="utf-8"?>
-<p:sld xmlns:a="http://schemas.openxmlformats.org/drawingml/2006/main" xmlns:r="http://schemas.openxmlformats.org/officeDocument/2006/relationships" xmlns:p="http://schemas.openxmlformats.org/presentationml/2006/main">
-  <p:cSld name="Slide 13">
-    <p:bg>
-      <p:bgPr>
-        <a:solidFill>
-          <a:srgbClr val="14213D"/>
-        </a:solidFill>
-      </p:bgPr>
-    </p:bg>
-    <p:spTree>
-      <p:nvGrpSpPr>
-        <p:cNvPr id="1" name=""/>
-        <p:cNvGrpSpPr/>
-        <p:nvPr/>
-      </p:nvGrpSpPr>
-      <p:grpSpPr>
-        <a:xfrm>
-          <a:off x="0" y="0"/>
-          <a:ext cx="0" cy="0"/>
-          <a:chOff x="0" y="0"/>
-          <a:chExt cx="0" cy="0"/>
-        </a:xfrm>
-      </p:grpSpPr>
-      <p:sp>
-        <p:nvSpPr>
-          <p:cNvPr id="2" name="Text 0"/>
-          <p:cNvSpPr/>
-          <p:nvPr/>
-        </p:nvSpPr>
-        <p:spPr>
-          <a:xfrm>
-            <a:off x="812800" y="812800"/>
-            <a:ext cx="10883392" cy="274241"/>
-          </a:xfrm>
-          <a:prstGeom prst="rect">
-            <a:avLst/>
-          </a:prstGeom>
-          <a:noFill/>
-          <a:ln/>
-        </p:spPr>
-        <p:txBody>
-          <a:bodyPr wrap="square" lIns="0" tIns="0" rIns="0" bIns="0" rtlCol="0" anchor="t">
-            <a:normAutofit/>
-          </a:bodyPr>
-          <a:lstStyle/>
-          <a:p>
-            <a:pPr algn="l" indent="0" marL="0">
-              <a:lnSpc>
-                <a:spcPts val="1960"/>
-              </a:lnSpc>
-              <a:buNone/>
-            </a:pPr>
-            <a:r>
-              <a:rPr lang="en-US" sz="1400" b="1" spc="150" kern="0" dirty="0">
-                <a:solidFill>
-                  <a:srgbClr val="6CC5B5"/>
-                </a:solidFill>
-                <a:latin typeface="IBM Plex Sans" pitchFamily="34" charset="0"/>
-                <a:ea typeface="IBM Plex Sans" pitchFamily="34" charset="-122"/>
-                <a:cs typeface="IBM Plex Sans" pitchFamily="34" charset="-120"/>
-              </a:rPr>
-              <a:t>MEDIDAS REALES</a:t>
-            </a:r>
-            <a:endParaRPr lang="en-US" sz="1400" dirty="0"/>
-          </a:p>
-        </p:txBody>
-      </p:sp>
-      <p:sp>
-        <p:nvSpPr>
-          <p:cNvPr id="3" name="Text 1"/>
-          <p:cNvSpPr/>
-          <p:nvPr/>
-        </p:nvSpPr>
-        <p:spPr>
-          <a:xfrm>
-            <a:off x="812800" y="1163241"/>
-            <a:ext cx="10883392" cy="528241"/>
-          </a:xfrm>
-          <a:prstGeom prst="rect">
-            <a:avLst/>
-          </a:prstGeom>
-          <a:noFill/>
-          <a:ln/>
-        </p:spPr>
-        <p:txBody>
-          <a:bodyPr wrap="square" lIns="0" tIns="0" rIns="0" bIns="0" rtlCol="0" anchor="t">
-            <a:normAutofit/>
-          </a:bodyPr>
-          <a:lstStyle/>
-          <a:p>
-            <a:pPr algn="l" indent="0" marL="0">
-              <a:lnSpc>
-                <a:spcPts val="3960"/>
-              </a:lnSpc>
-              <a:buNone/>
-            </a:pPr>
-            <a:r>
-              <a:rPr lang="en-US" sz="3600" b="1" dirty="0">
-                <a:solidFill>
-                  <a:srgbClr val="F6F5F0"/>
-                </a:solidFill>
-                <a:latin typeface="Source Serif 4" pitchFamily="34" charset="0"/>
-                <a:ea typeface="Source Serif 4" pitchFamily="34" charset="-122"/>
-                <a:cs typeface="Source Serif 4" pitchFamily="34" charset="-120"/>
-              </a:rPr>
-              <a:t>PDFs de hasta 80 MB, medidos en el servidor</a:t>
-            </a:r>
-            <a:endParaRPr lang="en-US" sz="3600" dirty="0"/>
-          </a:p>
-        </p:txBody>
-      </p:sp>
-      <p:sp>
-        <p:nvSpPr>
-          <p:cNvPr id="4" name="Shape 2"/>
-          <p:cNvSpPr/>
-          <p:nvPr/>
-        </p:nvSpPr>
-        <p:spPr>
-          <a:xfrm>
-            <a:off x="815975" y="1974056"/>
-            <a:ext cx="3380284" cy="1812131"/>
-          </a:xfrm>
-          <a:prstGeom prst="roundRect">
-            <a:avLst>
-              <a:gd name="adj" fmla="val 5431"/>
-            </a:avLst>
-          </a:prstGeom>
-          <a:solidFill>
-            <a:srgbClr val="1E2F55"/>
-          </a:solidFill>
-          <a:ln w="6350">
-            <a:solidFill>
-              <a:srgbClr val="3A4C78"/>
-            </a:solidFill>
-            <a:prstDash val="solid"/>
-          </a:ln>
-        </p:spPr>
-      </p:sp>
-      <p:sp>
-        <p:nvSpPr>
-          <p:cNvPr id="5" name="Text 3"/>
-          <p:cNvSpPr/>
-          <p:nvPr/>
-        </p:nvSpPr>
-        <p:spPr>
-          <a:xfrm>
-            <a:off x="1073150" y="2231231"/>
-            <a:ext cx="2951912" cy="723900"/>
-          </a:xfrm>
-          <a:prstGeom prst="rect">
-            <a:avLst/>
-          </a:prstGeom>
-          <a:noFill/>
-          <a:ln/>
-        </p:spPr>
-        <p:txBody>
-          <a:bodyPr wrap="square" lIns="0" tIns="0" rIns="0" bIns="0" rtlCol="0" anchor="t">
-            <a:normAutofit/>
-          </a:bodyPr>
-          <a:lstStyle/>
-          <a:p>
-            <a:pPr algn="l" indent="0" marL="0">
-              <a:lnSpc>
-                <a:spcPts val="5500"/>
-              </a:lnSpc>
-              <a:buNone/>
-            </a:pPr>
-            <a:r>
-              <a:rPr lang="en-US" sz="5500" b="1" dirty="0">
-                <a:solidFill>
-                  <a:srgbClr val="6CC5B5"/>
-                </a:solidFill>
-                <a:latin typeface="IBM Plex Sans" pitchFamily="34" charset="0"/>
-                <a:ea typeface="IBM Plex Sans" pitchFamily="34" charset="-122"/>
-                <a:cs typeface="IBM Plex Sans" pitchFamily="34" charset="-120"/>
-              </a:rPr>
-              <a:t>5 de 5</a:t>
-            </a:r>
-            <a:endParaRPr lang="en-US" sz="5500" dirty="0"/>
-          </a:p>
-        </p:txBody>
-      </p:sp>
-      <p:sp>
-        <p:nvSpPr>
-          <p:cNvPr id="6" name="Text 4"/>
-          <p:cNvSpPr/>
-          <p:nvPr/>
-        </p:nvSpPr>
-        <p:spPr>
-          <a:xfrm>
-            <a:off x="1073150" y="2980531"/>
-            <a:ext cx="2951912" cy="573881"/>
-          </a:xfrm>
-          <a:prstGeom prst="rect">
-            <a:avLst/>
-          </a:prstGeom>
-          <a:noFill/>
-          <a:ln/>
-        </p:spPr>
-        <p:txBody>
-          <a:bodyPr wrap="square" lIns="0" tIns="0" rIns="0" bIns="0" rtlCol="0" anchor="t">
-            <a:normAutofit/>
-          </a:bodyPr>
-          <a:lstStyle/>
-          <a:p>
-            <a:pPr algn="l" indent="0" marL="0">
-              <a:lnSpc>
-                <a:spcPts val="2160"/>
-              </a:lnSpc>
-              <a:buNone/>
-            </a:pPr>
-            <a:r>
-              <a:rPr lang="en-US" sz="1600" dirty="0">
-                <a:solidFill>
-                  <a:srgbClr val="C9D1E3"/>
-                </a:solidFill>
-                <a:latin typeface="IBM Plex Sans" pitchFamily="34" charset="0"/>
-                <a:ea typeface="IBM Plex Sans" pitchFamily="34" charset="-122"/>
-                <a:cs typeface="IBM Plex Sans" pitchFamily="34" charset="-120"/>
-              </a:rPr>
-              <a:t>subidas simultáneas de 83 MB respondidas con éxito.</a:t>
-            </a:r>
-            <a:endParaRPr lang="en-US" sz="1600" dirty="0"/>
-          </a:p>
-        </p:txBody>
-      </p:sp>
-      <p:sp>
-        <p:nvSpPr>
-          <p:cNvPr id="7" name="Shape 5"/>
-          <p:cNvSpPr/>
-          <p:nvPr/>
-        </p:nvSpPr>
-        <p:spPr>
-          <a:xfrm>
-            <a:off x="4405809" y="1974056"/>
-            <a:ext cx="3380383" cy="1812131"/>
-          </a:xfrm>
-          <a:prstGeom prst="roundRect">
-            <a:avLst>
-              <a:gd name="adj" fmla="val 5431"/>
-            </a:avLst>
-          </a:prstGeom>
-          <a:solidFill>
-            <a:srgbClr val="1E2F55"/>
-          </a:solidFill>
-          <a:ln w="6350">
-            <a:solidFill>
-              <a:srgbClr val="3A4C78"/>
-            </a:solidFill>
-            <a:prstDash val="solid"/>
-          </a:ln>
-        </p:spPr>
-      </p:sp>
-      <p:sp>
-        <p:nvSpPr>
-          <p:cNvPr id="8" name="Text 6"/>
-          <p:cNvSpPr/>
-          <p:nvPr/>
-        </p:nvSpPr>
-        <p:spPr>
-          <a:xfrm>
-            <a:off x="4662984" y="2231231"/>
-            <a:ext cx="2952014" cy="723900"/>
-          </a:xfrm>
-          <a:prstGeom prst="rect">
-            <a:avLst/>
-          </a:prstGeom>
-          <a:noFill/>
-          <a:ln/>
-        </p:spPr>
-        <p:txBody>
-          <a:bodyPr wrap="square" lIns="0" tIns="0" rIns="0" bIns="0" rtlCol="0" anchor="t">
-            <a:normAutofit/>
-          </a:bodyPr>
-          <a:lstStyle/>
-          <a:p>
-            <a:pPr algn="l" indent="0" marL="0">
-              <a:lnSpc>
-                <a:spcPts val="5500"/>
-              </a:lnSpc>
-              <a:buNone/>
-            </a:pPr>
-            <a:r>
-              <a:rPr lang="en-US" sz="5500" b="1" dirty="0">
-                <a:solidFill>
-                  <a:srgbClr val="6CC5B5"/>
-                </a:solidFill>
-                <a:latin typeface="IBM Plex Sans" pitchFamily="34" charset="0"/>
-                <a:ea typeface="IBM Plex Sans" pitchFamily="34" charset="-122"/>
-                <a:cs typeface="IBM Plex Sans" pitchFamily="34" charset="-120"/>
-              </a:rPr>
-              <a:t>1013</a:t>
-            </a:r>
-            <a:endParaRPr lang="en-US" sz="5500" dirty="0"/>
-          </a:p>
-        </p:txBody>
-      </p:sp>
-      <p:sp>
-        <p:nvSpPr>
-          <p:cNvPr id="9" name="Text 7"/>
-          <p:cNvSpPr/>
-          <p:nvPr/>
-        </p:nvSpPr>
-        <p:spPr>
-          <a:xfrm>
-            <a:off x="4662984" y="2980531"/>
-            <a:ext cx="2952014" cy="573881"/>
-          </a:xfrm>
-          <a:prstGeom prst="rect">
-            <a:avLst/>
-          </a:prstGeom>
-          <a:noFill/>
-          <a:ln/>
-        </p:spPr>
-        <p:txBody>
-          <a:bodyPr wrap="square" lIns="0" tIns="0" rIns="0" bIns="0" rtlCol="0" anchor="t">
-            <a:normAutofit/>
-          </a:bodyPr>
-          <a:lstStyle/>
-          <a:p>
-            <a:pPr algn="l" indent="0" marL="0">
-              <a:lnSpc>
-                <a:spcPts val="2160"/>
-              </a:lnSpc>
-              <a:buNone/>
-            </a:pPr>
-            <a:r>
-              <a:rPr lang="en-US" sz="1600" dirty="0">
-                <a:solidFill>
-                  <a:srgbClr val="C9D1E3"/>
-                </a:solidFill>
-                <a:latin typeface="IBM Plex Sans" pitchFamily="34" charset="0"/>
-                <a:ea typeface="IBM Plex Sans" pitchFamily="34" charset="-122"/>
-                <a:cs typeface="IBM Plex Sans" pitchFamily="34" charset="-120"/>
-              </a:rPr>
-              <a:t>MiB de memoria máxima, sobre un límite de 2048.</a:t>
-            </a:r>
-            <a:endParaRPr lang="en-US" sz="1600" dirty="0"/>
-          </a:p>
-        </p:txBody>
-      </p:sp>
-      <p:sp>
-        <p:nvSpPr>
-          <p:cNvPr id="10" name="Shape 8"/>
-          <p:cNvSpPr/>
-          <p:nvPr/>
-        </p:nvSpPr>
-        <p:spPr>
-          <a:xfrm>
-            <a:off x="7995741" y="1974056"/>
-            <a:ext cx="3380284" cy="1812131"/>
-          </a:xfrm>
-          <a:prstGeom prst="roundRect">
-            <a:avLst>
-              <a:gd name="adj" fmla="val 5431"/>
-            </a:avLst>
-          </a:prstGeom>
-          <a:solidFill>
-            <a:srgbClr val="1E2F55"/>
-          </a:solidFill>
-          <a:ln w="6350">
-            <a:solidFill>
-              <a:srgbClr val="3A4C78"/>
-            </a:solidFill>
-            <a:prstDash val="solid"/>
-          </a:ln>
-        </p:spPr>
-      </p:sp>
-      <p:sp>
-        <p:nvSpPr>
-          <p:cNvPr id="11" name="Text 9"/>
-          <p:cNvSpPr/>
-          <p:nvPr/>
-        </p:nvSpPr>
-        <p:spPr>
-          <a:xfrm>
-            <a:off x="8252916" y="2231231"/>
-            <a:ext cx="2951912" cy="723900"/>
-          </a:xfrm>
-          <a:prstGeom prst="rect">
-            <a:avLst/>
-          </a:prstGeom>
-          <a:noFill/>
-          <a:ln/>
-        </p:spPr>
-        <p:txBody>
-          <a:bodyPr wrap="square" lIns="0" tIns="0" rIns="0" bIns="0" rtlCol="0" anchor="t">
-            <a:normAutofit/>
-          </a:bodyPr>
-          <a:lstStyle/>
-          <a:p>
-            <a:pPr algn="l" indent="0" marL="0">
-              <a:lnSpc>
-                <a:spcPts val="5500"/>
-              </a:lnSpc>
-              <a:buNone/>
-            </a:pPr>
-            <a:r>
-              <a:rPr lang="en-US" sz="5500" b="1" dirty="0">
-                <a:solidFill>
-                  <a:srgbClr val="6CC5B5"/>
-                </a:solidFill>
-                <a:latin typeface="IBM Plex Sans" pitchFamily="34" charset="0"/>
-                <a:ea typeface="IBM Plex Sans" pitchFamily="34" charset="-122"/>
-                <a:cs typeface="IBM Plex Sans" pitchFamily="34" charset="-120"/>
-              </a:rPr>
-              <a:t>0</a:t>
-            </a:r>
-            <a:endParaRPr lang="en-US" sz="5500" dirty="0"/>
-          </a:p>
-        </p:txBody>
-      </p:sp>
-      <p:sp>
-        <p:nvSpPr>
-          <p:cNvPr id="12" name="Text 10"/>
-          <p:cNvSpPr/>
-          <p:nvPr/>
-        </p:nvSpPr>
-        <p:spPr>
-          <a:xfrm>
-            <a:off x="8252916" y="2980531"/>
-            <a:ext cx="2951912" cy="573881"/>
-          </a:xfrm>
-          <a:prstGeom prst="rect">
-            <a:avLst/>
-          </a:prstGeom>
-          <a:noFill/>
-          <a:ln/>
-        </p:spPr>
-        <p:txBody>
-          <a:bodyPr wrap="square" lIns="0" tIns="0" rIns="0" bIns="0" rtlCol="0" anchor="t">
-            <a:normAutofit/>
-          </a:bodyPr>
-          <a:lstStyle/>
-          <a:p>
-            <a:pPr algn="l" indent="0" marL="0">
-              <a:lnSpc>
-                <a:spcPts val="2160"/>
-              </a:lnSpc>
-              <a:buNone/>
-            </a:pPr>
-            <a:r>
-              <a:rPr lang="en-US" sz="1600" dirty="0">
-                <a:solidFill>
-                  <a:srgbClr val="C9D1E3"/>
-                </a:solidFill>
-                <a:latin typeface="IBM Plex Sans" pitchFamily="34" charset="0"/>
-                <a:ea typeface="IBM Plex Sans" pitchFamily="34" charset="-122"/>
-                <a:cs typeface="IBM Plex Sans" pitchFamily="34" charset="-120"/>
-              </a:rPr>
-              <a:t>reinicios, cortes por memoria y errores de memoria en la JVM.</a:t>
-            </a:r>
-            <a:endParaRPr lang="en-US" sz="1600" dirty="0"/>
-          </a:p>
-        </p:txBody>
-      </p:sp>
-      <p:sp>
-        <p:nvSpPr>
-          <p:cNvPr id="13" name="Text 11"/>
-          <p:cNvSpPr/>
-          <p:nvPr/>
-        </p:nvSpPr>
-        <p:spPr>
-          <a:xfrm>
-            <a:off x="812800" y="4094163"/>
-            <a:ext cx="10464800" cy="594320"/>
-          </a:xfrm>
-          <a:prstGeom prst="rect">
-            <a:avLst/>
-          </a:prstGeom>
-          <a:noFill/>
-          <a:ln/>
-        </p:spPr>
-        <p:txBody>
-          <a:bodyPr wrap="square" lIns="0" tIns="0" rIns="0" bIns="0" rtlCol="0" anchor="t">
-            <a:normAutofit/>
-          </a:bodyPr>
-          <a:lstStyle/>
-          <a:p>
-            <a:pPr algn="l" indent="0" marL="0">
-              <a:lnSpc>
-                <a:spcPts val="2240"/>
-              </a:lnSpc>
-              <a:buNone/>
-            </a:pPr>
-            <a:r>
-              <a:rPr lang="en-US" sz="1600" dirty="0">
-                <a:solidFill>
-                  <a:srgbClr val="C9D1E3"/>
-                </a:solidFill>
-                <a:latin typeface="IBM Plex Sans" pitchFamily="34" charset="0"/>
-                <a:ea typeface="IBM Plex Sans" pitchFamily="34" charset="-122"/>
-                <a:cs typeface="IBM Plex Sans" pitchFamily="34" charset="-120"/>
-              </a:rPr>
-              <a:t>Un límite de dos análisis a la vez acota el consumo. Con un solo hueco y 5 s de espera, 3 de las 5 peticiones recibían un 503; con dos huecos y 30 s, ninguna.</a:t>
-            </a:r>
-            <a:endParaRPr lang="en-US" sz="1600" dirty="0"/>
           </a:p>
         </p:txBody>
       </p:sp>
@@ -5661,7 +6009,7 @@
                 <a:ea typeface="IBM Plex Sans" pitchFamily="34" charset="-122"/>
                 <a:cs typeface="IBM Plex Sans" pitchFamily="34" charset="-120"/>
               </a:rPr>
-              <a:t>ALCANCE Y LÍMITES</a:t>
+              <a:t>DESPLIEGUE</a:t>
             </a:r>
             <a:endParaRPr lang="en-US" sz="1400" dirty="0"/>
           </a:p>
@@ -5671,7 +6019,9 @@
         <p:nvSpPr>
           <p:cNvPr id="3" name="Text 1"/>
           <p:cNvSpPr/>
-          <p:nvPr/>
+          <p:nvPr>
+            <p:ph type="title"/>
+          </p:nvPr>
         </p:nvSpPr>
         <p:spPr>
           <a:xfrm>
@@ -5697,15 +6047,15 @@
               <a:buNone/>
             </a:pPr>
             <a:r>
-              <a:rPr lang="en-US" sz="3600" b="1" dirty="0">
+              <a:rPr lang="en-US" sz="3600" b="1" i="0" dirty="0">
                 <a:solidFill>
                   <a:srgbClr val="14213D"/>
                 </a:solidFill>
-                <a:latin typeface="Source Serif 4" pitchFamily="34" charset="0"/>
-                <a:ea typeface="Source Serif 4" pitchFamily="34" charset="-122"/>
-                <a:cs typeface="Source Serif 4" pitchFamily="34" charset="-120"/>
-              </a:rPr>
-              <a:t>Lo que hace y lo que queda fuera</a:t>
+                <a:latin typeface="Source Serif 4" pitchFamily="18" charset="0"/>
+                <a:ea typeface="Source Serif 4" pitchFamily="18" charset="-122"/>
+                <a:cs typeface="Source Serif 4" pitchFamily="18" charset="-120"/>
+              </a:rPr>
+              <a:t>Alojado en VPS</a:t>
             </a:r>
             <a:endParaRPr lang="en-US" sz="3600" dirty="0"/>
           </a:p>
@@ -5720,11 +6070,11 @@
         <p:spPr>
           <a:xfrm>
             <a:off x="815975" y="1974056"/>
-            <a:ext cx="5175250" cy="2724150"/>
+            <a:ext cx="3380284" cy="2607270"/>
           </a:xfrm>
           <a:prstGeom prst="roundRect">
             <a:avLst>
-              <a:gd name="adj" fmla="val 3613"/>
+              <a:gd name="adj" fmla="val 3775"/>
             </a:avLst>
           </a:prstGeom>
           <a:solidFill>
@@ -5747,28 +6097,28 @@
         <p:spPr>
           <a:xfrm>
             <a:off x="1073150" y="2231231"/>
-            <a:ext cx="4800727" cy="330200"/>
-          </a:xfrm>
-          <a:prstGeom prst="rect">
-            <a:avLst/>
-          </a:prstGeom>
-          <a:noFill/>
-          <a:ln/>
-        </p:spPr>
-        <p:txBody>
-          <a:bodyPr wrap="square" lIns="0" tIns="0" rIns="0" bIns="0" rtlCol="0" anchor="t">
-            <a:normAutofit/>
-          </a:bodyPr>
-          <a:lstStyle/>
-          <a:p>
-            <a:pPr algn="l" indent="0" marL="0">
-              <a:lnSpc>
-                <a:spcPts val="2400"/>
-              </a:lnSpc>
-              <a:buNone/>
-            </a:pPr>
-            <a:r>
-              <a:rPr lang="en-US" sz="2000" b="1" dirty="0">
+            <a:ext cx="2951912" cy="314920"/>
+          </a:xfrm>
+          <a:prstGeom prst="rect">
+            <a:avLst/>
+          </a:prstGeom>
+          <a:noFill/>
+          <a:ln/>
+        </p:spPr>
+        <p:txBody>
+          <a:bodyPr wrap="square" lIns="0" tIns="0" rIns="0" bIns="0" rtlCol="0" anchor="t">
+            <a:normAutofit/>
+          </a:bodyPr>
+          <a:lstStyle/>
+          <a:p>
+            <a:pPr algn="l" indent="0" marL="0">
+              <a:lnSpc>
+                <a:spcPts val="2280"/>
+              </a:lnSpc>
+              <a:buNone/>
+            </a:pPr>
+            <a:r>
+              <a:rPr lang="en-US" sz="1900" b="1" dirty="0">
                 <a:solidFill>
                   <a:srgbClr val="14213D"/>
                 </a:solidFill>
@@ -5776,9 +6126,9 @@
                 <a:ea typeface="IBM Plex Sans" pitchFamily="34" charset="-122"/>
                 <a:cs typeface="IBM Plex Sans" pitchFamily="34" charset="-120"/>
               </a:rPr>
-              <a:t>Decisiones</a:t>
-            </a:r>
-            <a:endParaRPr lang="en-US" sz="2000" dirty="0"/>
+              <a:t>Contenedor endurecido</a:t>
+            </a:r>
+            <a:endParaRPr lang="en-US" sz="1900" dirty="0"/>
           </a:p>
         </p:txBody>
       </p:sp>
@@ -5790,8 +6140,8 @@
         </p:nvSpPr>
         <p:spPr>
           <a:xfrm>
-            <a:off x="1073150" y="2637631"/>
-            <a:ext cx="4800727" cy="558800"/>
+            <a:off x="1073150" y="2622352"/>
+            <a:ext cx="2951912" cy="825500"/>
           </a:xfrm>
           <a:prstGeom prst="rect">
             <a:avLst/>
@@ -5820,7 +6170,7 @@
                 <a:ea typeface="IBM Plex Sans" pitchFamily="34" charset="-122"/>
                 <a:cs typeface="IBM Plex Sans" pitchFamily="34" charset="-120"/>
               </a:rPr>
-              <a:t>Servicio sin estado: no guarda documentos ni datos de usuario.</a:t>
+              <a:t>Imagen multi-etapa, usuario no root, sistema de ficheros de solo lectura, sin capacidades extra.</a:t>
             </a:r>
             <a:endParaRPr lang="en-US" sz="1500" dirty="0"/>
           </a:p>
@@ -5834,8 +6184,8 @@
         </p:nvSpPr>
         <p:spPr>
           <a:xfrm>
-            <a:off x="1073150" y="3272631"/>
-            <a:ext cx="4800727" cy="558800"/>
+            <a:off x="1073150" y="3524052"/>
+            <a:ext cx="2951912" cy="825500"/>
           </a:xfrm>
           <a:prstGeom prst="rect">
             <a:avLst/>
@@ -5864,7 +6214,7 @@
                 <a:ea typeface="IBM Plex Sans" pitchFamily="34" charset="-122"/>
                 <a:cs typeface="IBM Plex Sans" pitchFamily="34" charset="-120"/>
               </a:rPr>
-              <a:t>La revocación solo se consulta para cadenas de confianza, con protección frente a SSRF.</a:t>
+              <a:t>Límite de 2 GB y perfil de JVM con cada región de memoria acotada.</a:t>
             </a:r>
             <a:endParaRPr lang="en-US" sz="1500" dirty="0"/>
           </a:p>
@@ -5872,62 +6222,18 @@
       </p:sp>
       <p:sp>
         <p:nvSpPr>
-          <p:cNvPr id="8" name="Text 6"/>
-          <p:cNvSpPr/>
-          <p:nvPr/>
-        </p:nvSpPr>
-        <p:spPr>
-          <a:xfrm>
-            <a:off x="1073150" y="3907631"/>
-            <a:ext cx="4800727" cy="292100"/>
-          </a:xfrm>
-          <a:prstGeom prst="rect">
-            <a:avLst/>
-          </a:prstGeom>
-          <a:noFill/>
-          <a:ln/>
-        </p:spPr>
-        <p:txBody>
-          <a:bodyPr wrap="square" lIns="0" tIns="0" rIns="0" bIns="0" rtlCol="0" anchor="t">
-            <a:normAutofit/>
-          </a:bodyPr>
-          <a:lstStyle/>
-          <a:p>
-            <a:pPr algn="l" indent="0" marL="0">
-              <a:lnSpc>
-                <a:spcPts val="2100"/>
-              </a:lnSpc>
-              <a:buNone/>
-            </a:pPr>
-            <a:r>
-              <a:rPr lang="en-US" sz="1500" dirty="0">
-                <a:solidFill>
-                  <a:srgbClr val="4A5568"/>
-                </a:solidFill>
-                <a:latin typeface="IBM Plex Sans" pitchFamily="34" charset="0"/>
-                <a:ea typeface="IBM Plex Sans" pitchFamily="34" charset="-122"/>
-                <a:cs typeface="IBM Plex Sans" pitchFamily="34" charset="-120"/>
-              </a:rPr>
-              <a:t>El dominio no depende de ninguna librería.</a:t>
-            </a:r>
-            <a:endParaRPr lang="en-US" sz="1500" dirty="0"/>
-          </a:p>
-        </p:txBody>
-      </p:sp>
-      <p:sp>
-        <p:nvSpPr>
-          <p:cNvPr id="9" name="Shape 7"/>
-          <p:cNvSpPr/>
-          <p:nvPr/>
-        </p:nvSpPr>
-        <p:spPr>
-          <a:xfrm>
-            <a:off x="6200775" y="1974056"/>
-            <a:ext cx="5175250" cy="2724150"/>
+          <p:cNvPr id="8" name="Shape 6"/>
+          <p:cNvSpPr/>
+          <p:nvPr/>
+        </p:nvSpPr>
+        <p:spPr>
+          <a:xfrm>
+            <a:off x="4405809" y="1974056"/>
+            <a:ext cx="3380383" cy="2607270"/>
           </a:xfrm>
           <a:prstGeom prst="roundRect">
             <a:avLst>
-              <a:gd name="adj" fmla="val 3613"/>
+              <a:gd name="adj" fmla="val 3775"/>
             </a:avLst>
           </a:prstGeom>
           <a:solidFill>
@@ -5943,35 +6249,194 @@
       </p:sp>
       <p:sp>
         <p:nvSpPr>
+          <p:cNvPr id="9" name="Text 7"/>
+          <p:cNvSpPr/>
+          <p:nvPr/>
+        </p:nvSpPr>
+        <p:spPr>
+          <a:xfrm>
+            <a:off x="4662984" y="2231231"/>
+            <a:ext cx="2952014" cy="314920"/>
+          </a:xfrm>
+          <a:prstGeom prst="rect">
+            <a:avLst/>
+          </a:prstGeom>
+          <a:noFill/>
+          <a:ln/>
+        </p:spPr>
+        <p:txBody>
+          <a:bodyPr wrap="square" lIns="0" tIns="0" rIns="0" bIns="0" rtlCol="0" anchor="t">
+            <a:normAutofit/>
+          </a:bodyPr>
+          <a:lstStyle/>
+          <a:p>
+            <a:pPr algn="l" indent="0" marL="0">
+              <a:lnSpc>
+                <a:spcPts val="2280"/>
+              </a:lnSpc>
+              <a:buNone/>
+            </a:pPr>
+            <a:r>
+              <a:rPr lang="en-US" sz="1900" b="1" dirty="0">
+                <a:solidFill>
+                  <a:srgbClr val="14213D"/>
+                </a:solidFill>
+                <a:latin typeface="IBM Plex Sans" pitchFamily="34" charset="0"/>
+                <a:ea typeface="IBM Plex Sans" pitchFamily="34" charset="-122"/>
+                <a:cs typeface="IBM Plex Sans" pitchFamily="34" charset="-120"/>
+              </a:rPr>
+              <a:t>Servidor</a:t>
+            </a:r>
+            <a:endParaRPr lang="en-US" sz="1900" dirty="0"/>
+          </a:p>
+        </p:txBody>
+      </p:sp>
+      <p:sp>
+        <p:nvSpPr>
           <p:cNvPr id="10" name="Text 8"/>
           <p:cNvSpPr/>
           <p:nvPr/>
         </p:nvSpPr>
         <p:spPr>
           <a:xfrm>
-            <a:off x="6457950" y="2231231"/>
-            <a:ext cx="4800727" cy="330200"/>
-          </a:xfrm>
-          <a:prstGeom prst="rect">
-            <a:avLst/>
-          </a:prstGeom>
-          <a:noFill/>
-          <a:ln/>
-        </p:spPr>
-        <p:txBody>
-          <a:bodyPr wrap="square" lIns="0" tIns="0" rIns="0" bIns="0" rtlCol="0" anchor="t">
-            <a:normAutofit/>
-          </a:bodyPr>
-          <a:lstStyle/>
-          <a:p>
-            <a:pPr algn="l" indent="0" marL="0">
-              <a:lnSpc>
-                <a:spcPts val="2400"/>
-              </a:lnSpc>
-              <a:buNone/>
-            </a:pPr>
-            <a:r>
-              <a:rPr lang="en-US" sz="2000" b="1" dirty="0">
+            <a:off x="4662984" y="2622352"/>
+            <a:ext cx="2952014" cy="558800"/>
+          </a:xfrm>
+          <a:prstGeom prst="rect">
+            <a:avLst/>
+          </a:prstGeom>
+          <a:noFill/>
+          <a:ln/>
+        </p:spPr>
+        <p:txBody>
+          <a:bodyPr wrap="square" lIns="0" tIns="0" rIns="0" bIns="0" rtlCol="0" anchor="t">
+            <a:normAutofit/>
+          </a:bodyPr>
+          <a:lstStyle/>
+          <a:p>
+            <a:pPr algn="l" indent="0" marL="0">
+              <a:lnSpc>
+                <a:spcPts val="2100"/>
+              </a:lnSpc>
+              <a:buNone/>
+            </a:pPr>
+            <a:r>
+              <a:rPr lang="en-US" sz="1500" dirty="0">
+                <a:solidFill>
+                  <a:srgbClr val="4A5568"/>
+                </a:solidFill>
+                <a:latin typeface="IBM Plex Sans" pitchFamily="34" charset="0"/>
+                <a:ea typeface="IBM Plex Sans" pitchFamily="34" charset="-122"/>
+                <a:cs typeface="IBM Plex Sans" pitchFamily="34" charset="-120"/>
+              </a:rPr>
+              <a:t>OVHcloud VPS-1: 2 vCore, 4 GB, Ubuntu 24.04.</a:t>
+            </a:r>
+            <a:endParaRPr lang="en-US" sz="1500" dirty="0"/>
+          </a:p>
+        </p:txBody>
+      </p:sp>
+      <p:sp>
+        <p:nvSpPr>
+          <p:cNvPr id="11" name="Text 9"/>
+          <p:cNvSpPr/>
+          <p:nvPr/>
+        </p:nvSpPr>
+        <p:spPr>
+          <a:xfrm>
+            <a:off x="4662984" y="3257352"/>
+            <a:ext cx="2952014" cy="558800"/>
+          </a:xfrm>
+          <a:prstGeom prst="rect">
+            <a:avLst/>
+          </a:prstGeom>
+          <a:noFill/>
+          <a:ln/>
+        </p:spPr>
+        <p:txBody>
+          <a:bodyPr wrap="square" lIns="0" tIns="0" rIns="0" bIns="0" rtlCol="0" anchor="t">
+            <a:normAutofit/>
+          </a:bodyPr>
+          <a:lstStyle/>
+          <a:p>
+            <a:pPr algn="l" indent="0" marL="0">
+              <a:lnSpc>
+                <a:spcPts val="2100"/>
+              </a:lnSpc>
+              <a:buNone/>
+            </a:pPr>
+            <a:r>
+              <a:rPr lang="en-US" sz="1500" dirty="0">
+                <a:solidFill>
+                  <a:srgbClr val="4A5568"/>
+                </a:solidFill>
+                <a:latin typeface="IBM Plex Sans" pitchFamily="34" charset="0"/>
+                <a:ea typeface="IBM Plex Sans" pitchFamily="34" charset="-122"/>
+                <a:cs typeface="IBM Plex Sans" pitchFamily="34" charset="-120"/>
+              </a:rPr>
+              <a:t>SSH solo con clave y cortafuegos con los puertos 22, 80 y 443.</a:t>
+            </a:r>
+            <a:endParaRPr lang="en-US" sz="1500" dirty="0"/>
+          </a:p>
+        </p:txBody>
+      </p:sp>
+      <p:sp>
+        <p:nvSpPr>
+          <p:cNvPr id="12" name="Shape 10"/>
+          <p:cNvSpPr/>
+          <p:nvPr/>
+        </p:nvSpPr>
+        <p:spPr>
+          <a:xfrm>
+            <a:off x="7995741" y="1974056"/>
+            <a:ext cx="3380284" cy="2607270"/>
+          </a:xfrm>
+          <a:prstGeom prst="roundRect">
+            <a:avLst>
+              <a:gd name="adj" fmla="val 3775"/>
+            </a:avLst>
+          </a:prstGeom>
+          <a:solidFill>
+            <a:srgbClr val="FFFFFF"/>
+          </a:solidFill>
+          <a:ln w="6350">
+            <a:solidFill>
+              <a:srgbClr val="DAD8CF"/>
+            </a:solidFill>
+            <a:prstDash val="solid"/>
+          </a:ln>
+        </p:spPr>
+      </p:sp>
+      <p:sp>
+        <p:nvSpPr>
+          <p:cNvPr id="13" name="Text 11"/>
+          <p:cNvSpPr/>
+          <p:nvPr/>
+        </p:nvSpPr>
+        <p:spPr>
+          <a:xfrm>
+            <a:off x="8252916" y="2231231"/>
+            <a:ext cx="2951912" cy="314920"/>
+          </a:xfrm>
+          <a:prstGeom prst="rect">
+            <a:avLst/>
+          </a:prstGeom>
+          <a:noFill/>
+          <a:ln/>
+        </p:spPr>
+        <p:txBody>
+          <a:bodyPr wrap="square" lIns="0" tIns="0" rIns="0" bIns="0" rtlCol="0" anchor="t">
+            <a:normAutofit/>
+          </a:bodyPr>
+          <a:lstStyle/>
+          <a:p>
+            <a:pPr algn="l" indent="0" marL="0">
+              <a:lnSpc>
+                <a:spcPts val="2280"/>
+              </a:lnSpc>
+              <a:buNone/>
+            </a:pPr>
+            <a:r>
+              <a:rPr lang="en-US" sz="1900" b="1" dirty="0">
                 <a:solidFill>
                   <a:srgbClr val="14213D"/>
                 </a:solidFill>
@@ -5979,22 +6444,22 @@
                 <a:ea typeface="IBM Plex Sans" pitchFamily="34" charset="-122"/>
                 <a:cs typeface="IBM Plex Sans" pitchFamily="34" charset="-120"/>
               </a:rPr>
-              <a:t>Límites conocidos</a:t>
-            </a:r>
-            <a:endParaRPr lang="en-US" sz="2000" dirty="0"/>
-          </a:p>
-        </p:txBody>
-      </p:sp>
-      <p:sp>
-        <p:nvSpPr>
-          <p:cNvPr id="11" name="Text 9"/>
-          <p:cNvSpPr/>
-          <p:nvPr/>
-        </p:nvSpPr>
-        <p:spPr>
-          <a:xfrm>
-            <a:off x="6457950" y="2637631"/>
-            <a:ext cx="4800727" cy="558800"/>
+              <a:t>HTTPS</a:t>
+            </a:r>
+            <a:endParaRPr lang="en-US" sz="1900" dirty="0"/>
+          </a:p>
+        </p:txBody>
+      </p:sp>
+      <p:sp>
+        <p:nvSpPr>
+          <p:cNvPr id="14" name="Text 12"/>
+          <p:cNvSpPr/>
+          <p:nvPr/>
+        </p:nvSpPr>
+        <p:spPr>
+          <a:xfrm>
+            <a:off x="8252916" y="2622352"/>
+            <a:ext cx="2951912" cy="1092200"/>
           </a:xfrm>
           <a:prstGeom prst="rect">
             <a:avLst/>
@@ -6023,7 +6488,7 @@
                 <a:ea typeface="IBM Plex Sans" pitchFamily="34" charset="-122"/>
                 <a:cs typeface="IBM Plex Sans" pitchFamily="34" charset="-120"/>
               </a:rPr>
-              <a:t>Sin login: cualquiera con la URL puede usarlo, no es para documentos confidenciales.</a:t>
+              <a:t>Proxy Caddy con certificado de Let's Encrypt renovado automáticamente y cabecera HSTS.</a:t>
             </a:r>
             <a:endParaRPr lang="en-US" sz="1500" dirty="0"/>
           </a:p>
@@ -6031,14 +6496,14 @@
       </p:sp>
       <p:sp>
         <p:nvSpPr>
-          <p:cNvPr id="12" name="Text 10"/>
-          <p:cNvSpPr/>
-          <p:nvPr/>
-        </p:nvSpPr>
-        <p:spPr>
-          <a:xfrm>
-            <a:off x="6457950" y="3272631"/>
-            <a:ext cx="4800727" cy="558800"/>
+          <p:cNvPr id="15" name="Text 13"/>
+          <p:cNvSpPr/>
+          <p:nvPr/>
+        </p:nvSpPr>
+        <p:spPr>
+          <a:xfrm>
+            <a:off x="8252916" y="3790752"/>
+            <a:ext cx="2951912" cy="558800"/>
           </a:xfrm>
           <a:prstGeom prst="rect">
             <a:avLst/>
@@ -6067,7 +6532,7 @@
                 <a:ea typeface="IBM Plex Sans" pitchFamily="34" charset="-122"/>
                 <a:cs typeface="IBM Plex Sans" pitchFamily="34" charset="-120"/>
               </a:rPr>
-              <a:t>Conformidad PDF/A-1b; otros perfiles no están cubiertos.</a:t>
+              <a:t>La aplicación solo escucha en el bucle local.</a:t>
             </a:r>
             <a:endParaRPr lang="en-US" sz="1500" dirty="0"/>
           </a:p>
@@ -6075,58 +6540,14 @@
       </p:sp>
       <p:sp>
         <p:nvSpPr>
-          <p:cNvPr id="13" name="Text 11"/>
-          <p:cNvSpPr/>
-          <p:nvPr/>
-        </p:nvSpPr>
-        <p:spPr>
-          <a:xfrm>
-            <a:off x="6457950" y="3907631"/>
-            <a:ext cx="4800727" cy="558800"/>
-          </a:xfrm>
-          <a:prstGeom prst="rect">
-            <a:avLst/>
-          </a:prstGeom>
-          <a:noFill/>
-          <a:ln/>
-        </p:spPr>
-        <p:txBody>
-          <a:bodyPr wrap="square" lIns="0" tIns="0" rIns="0" bIns="0" rtlCol="0" anchor="t">
-            <a:normAutofit/>
-          </a:bodyPr>
-          <a:lstStyle/>
-          <a:p>
-            <a:pPr algn="l" indent="0" marL="0">
-              <a:lnSpc>
-                <a:spcPts val="2100"/>
-              </a:lnSpc>
-              <a:buNone/>
-            </a:pPr>
-            <a:r>
-              <a:rPr lang="en-US" sz="1500" dirty="0">
-                <a:solidFill>
-                  <a:srgbClr val="4A5568"/>
-                </a:solidFill>
-                <a:latin typeface="IBM Plex Sans" pitchFamily="34" charset="0"/>
-                <a:ea typeface="IBM Plex Sans" pitchFamily="34" charset="-122"/>
-                <a:cs typeface="IBM Plex Sans" pitchFamily="34" charset="-120"/>
-              </a:rPr>
-              <a:t>Subfiltros de firma admitidos: PKCS#7 y CAdES separados.</a:t>
-            </a:r>
-            <a:endParaRPr lang="en-US" sz="1500" dirty="0"/>
-          </a:p>
-        </p:txBody>
-      </p:sp>
-      <p:sp>
-        <p:nvSpPr>
-          <p:cNvPr id="14" name="Text 12"/>
+          <p:cNvPr id="16" name="Text 14"/>
           <p:cNvSpPr/>
           <p:nvPr/>
         </p:nvSpPr>
         <p:spPr>
           <a:xfrm>
             <a:off x="812800" y="6238280"/>
-            <a:ext cx="2410174" cy="238720"/>
+            <a:ext cx="2807970" cy="238720"/>
           </a:xfrm>
           <a:prstGeom prst="rect">
             <a:avLst/>
@@ -6201,6 +6622,1089 @@
         </p:nvSpPr>
         <p:spPr>
           <a:xfrm>
+            <a:off x="812800" y="812800"/>
+            <a:ext cx="10883392" cy="274241"/>
+          </a:xfrm>
+          <a:prstGeom prst="rect">
+            <a:avLst/>
+          </a:prstGeom>
+          <a:noFill/>
+          <a:ln/>
+        </p:spPr>
+        <p:txBody>
+          <a:bodyPr wrap="square" lIns="0" tIns="0" rIns="0" bIns="0" rtlCol="0" anchor="t">
+            <a:normAutofit/>
+          </a:bodyPr>
+          <a:lstStyle/>
+          <a:p>
+            <a:pPr algn="l" indent="0" marL="0">
+              <a:lnSpc>
+                <a:spcPts val="1960"/>
+              </a:lnSpc>
+              <a:buNone/>
+            </a:pPr>
+            <a:r>
+              <a:rPr lang="en-US" sz="1400" b="1" spc="150" kern="0" dirty="0">
+                <a:solidFill>
+                  <a:srgbClr val="6CC5B5"/>
+                </a:solidFill>
+                <a:latin typeface="IBM Plex Sans" pitchFamily="34" charset="0"/>
+                <a:ea typeface="IBM Plex Sans" pitchFamily="34" charset="-122"/>
+                <a:cs typeface="IBM Plex Sans" pitchFamily="34" charset="-120"/>
+              </a:rPr>
+              <a:t>MEDIDAS REALES</a:t>
+            </a:r>
+            <a:endParaRPr lang="en-US" sz="1400" dirty="0"/>
+          </a:p>
+        </p:txBody>
+      </p:sp>
+      <p:sp>
+        <p:nvSpPr>
+          <p:cNvPr id="3" name="Text 1"/>
+          <p:cNvSpPr/>
+          <p:nvPr>
+            <p:ph type="title"/>
+          </p:nvPr>
+        </p:nvSpPr>
+        <p:spPr>
+          <a:xfrm>
+            <a:off x="812800" y="1163241"/>
+            <a:ext cx="10883392" cy="528241"/>
+          </a:xfrm>
+          <a:prstGeom prst="rect">
+            <a:avLst/>
+          </a:prstGeom>
+          <a:noFill/>
+          <a:ln/>
+        </p:spPr>
+        <p:txBody>
+          <a:bodyPr wrap="square" lIns="0" tIns="0" rIns="0" bIns="0" rtlCol="0" anchor="t">
+            <a:normAutofit/>
+          </a:bodyPr>
+          <a:lstStyle/>
+          <a:p>
+            <a:pPr algn="l" indent="0" marL="0">
+              <a:lnSpc>
+                <a:spcPts val="3960"/>
+              </a:lnSpc>
+              <a:buNone/>
+            </a:pPr>
+            <a:r>
+              <a:rPr lang="en-US" sz="3600" b="1" i="0" dirty="0">
+                <a:solidFill>
+                  <a:srgbClr val="F6F5F0"/>
+                </a:solidFill>
+                <a:latin typeface="Source Serif 4" pitchFamily="18" charset="0"/>
+                <a:ea typeface="Source Serif 4" pitchFamily="18" charset="-122"/>
+                <a:cs typeface="Source Serif 4" pitchFamily="18" charset="-120"/>
+              </a:rPr>
+              <a:t>PDFs de hasta 80 MB, medidos en el servidor</a:t>
+            </a:r>
+            <a:endParaRPr lang="en-US" sz="3600" dirty="0"/>
+          </a:p>
+        </p:txBody>
+      </p:sp>
+      <p:sp>
+        <p:nvSpPr>
+          <p:cNvPr id="4" name="Shape 2"/>
+          <p:cNvSpPr/>
+          <p:nvPr/>
+        </p:nvSpPr>
+        <p:spPr>
+          <a:xfrm>
+            <a:off x="815975" y="1974056"/>
+            <a:ext cx="3380284" cy="1812131"/>
+          </a:xfrm>
+          <a:prstGeom prst="roundRect">
+            <a:avLst>
+              <a:gd name="adj" fmla="val 5431"/>
+            </a:avLst>
+          </a:prstGeom>
+          <a:solidFill>
+            <a:srgbClr val="1E2F55"/>
+          </a:solidFill>
+          <a:ln w="6350">
+            <a:solidFill>
+              <a:srgbClr val="3A4C78"/>
+            </a:solidFill>
+            <a:prstDash val="solid"/>
+          </a:ln>
+        </p:spPr>
+      </p:sp>
+      <p:sp>
+        <p:nvSpPr>
+          <p:cNvPr id="5" name="Text 3"/>
+          <p:cNvSpPr/>
+          <p:nvPr/>
+        </p:nvSpPr>
+        <p:spPr>
+          <a:xfrm>
+            <a:off x="1073150" y="2231231"/>
+            <a:ext cx="2951912" cy="723900"/>
+          </a:xfrm>
+          <a:prstGeom prst="rect">
+            <a:avLst/>
+          </a:prstGeom>
+          <a:noFill/>
+          <a:ln/>
+        </p:spPr>
+        <p:txBody>
+          <a:bodyPr wrap="square" lIns="0" tIns="0" rIns="0" bIns="0" rtlCol="0" anchor="t">
+            <a:normAutofit/>
+          </a:bodyPr>
+          <a:lstStyle/>
+          <a:p>
+            <a:pPr algn="l" indent="0" marL="0">
+              <a:lnSpc>
+                <a:spcPts val="5500"/>
+              </a:lnSpc>
+              <a:buNone/>
+            </a:pPr>
+            <a:r>
+              <a:rPr lang="en-US" sz="5500" b="1" dirty="0">
+                <a:solidFill>
+                  <a:srgbClr val="6CC5B5"/>
+                </a:solidFill>
+                <a:latin typeface="IBM Plex Sans" pitchFamily="34" charset="0"/>
+                <a:ea typeface="IBM Plex Sans" pitchFamily="34" charset="-122"/>
+                <a:cs typeface="IBM Plex Sans" pitchFamily="34" charset="-120"/>
+              </a:rPr>
+              <a:t>5 de 5</a:t>
+            </a:r>
+            <a:endParaRPr lang="en-US" sz="5500" dirty="0"/>
+          </a:p>
+        </p:txBody>
+      </p:sp>
+      <p:sp>
+        <p:nvSpPr>
+          <p:cNvPr id="6" name="Text 4"/>
+          <p:cNvSpPr/>
+          <p:nvPr/>
+        </p:nvSpPr>
+        <p:spPr>
+          <a:xfrm>
+            <a:off x="1073150" y="2980531"/>
+            <a:ext cx="2951912" cy="573881"/>
+          </a:xfrm>
+          <a:prstGeom prst="rect">
+            <a:avLst/>
+          </a:prstGeom>
+          <a:noFill/>
+          <a:ln/>
+        </p:spPr>
+        <p:txBody>
+          <a:bodyPr wrap="square" lIns="0" tIns="0" rIns="0" bIns="0" rtlCol="0" anchor="t">
+            <a:normAutofit/>
+          </a:bodyPr>
+          <a:lstStyle/>
+          <a:p>
+            <a:pPr algn="l" indent="0" marL="0">
+              <a:lnSpc>
+                <a:spcPts val="2160"/>
+              </a:lnSpc>
+              <a:buNone/>
+            </a:pPr>
+            <a:r>
+              <a:rPr lang="en-US" sz="1600" dirty="0">
+                <a:solidFill>
+                  <a:srgbClr val="C9D1E3"/>
+                </a:solidFill>
+                <a:latin typeface="IBM Plex Sans" pitchFamily="34" charset="0"/>
+                <a:ea typeface="IBM Plex Sans" pitchFamily="34" charset="-122"/>
+                <a:cs typeface="IBM Plex Sans" pitchFamily="34" charset="-120"/>
+              </a:rPr>
+              <a:t>subidas simultáneas de 83 MB respondidas con éxito.</a:t>
+            </a:r>
+            <a:endParaRPr lang="en-US" sz="1600" dirty="0"/>
+          </a:p>
+        </p:txBody>
+      </p:sp>
+      <p:sp>
+        <p:nvSpPr>
+          <p:cNvPr id="7" name="Shape 5"/>
+          <p:cNvSpPr/>
+          <p:nvPr/>
+        </p:nvSpPr>
+        <p:spPr>
+          <a:xfrm>
+            <a:off x="4405809" y="1974056"/>
+            <a:ext cx="3380383" cy="1812131"/>
+          </a:xfrm>
+          <a:prstGeom prst="roundRect">
+            <a:avLst>
+              <a:gd name="adj" fmla="val 5431"/>
+            </a:avLst>
+          </a:prstGeom>
+          <a:solidFill>
+            <a:srgbClr val="1E2F55"/>
+          </a:solidFill>
+          <a:ln w="6350">
+            <a:solidFill>
+              <a:srgbClr val="3A4C78"/>
+            </a:solidFill>
+            <a:prstDash val="solid"/>
+          </a:ln>
+        </p:spPr>
+      </p:sp>
+      <p:sp>
+        <p:nvSpPr>
+          <p:cNvPr id="8" name="Text 6"/>
+          <p:cNvSpPr/>
+          <p:nvPr/>
+        </p:nvSpPr>
+        <p:spPr>
+          <a:xfrm>
+            <a:off x="4662984" y="2231231"/>
+            <a:ext cx="2952014" cy="723900"/>
+          </a:xfrm>
+          <a:prstGeom prst="rect">
+            <a:avLst/>
+          </a:prstGeom>
+          <a:noFill/>
+          <a:ln/>
+        </p:spPr>
+        <p:txBody>
+          <a:bodyPr wrap="square" lIns="0" tIns="0" rIns="0" bIns="0" rtlCol="0" anchor="t">
+            <a:normAutofit/>
+          </a:bodyPr>
+          <a:lstStyle/>
+          <a:p>
+            <a:pPr algn="l" indent="0" marL="0">
+              <a:lnSpc>
+                <a:spcPts val="5500"/>
+              </a:lnSpc>
+              <a:buNone/>
+            </a:pPr>
+            <a:r>
+              <a:rPr lang="en-US" sz="5500" b="1" dirty="0">
+                <a:solidFill>
+                  <a:srgbClr val="6CC5B5"/>
+                </a:solidFill>
+                <a:latin typeface="IBM Plex Sans" pitchFamily="34" charset="0"/>
+                <a:ea typeface="IBM Plex Sans" pitchFamily="34" charset="-122"/>
+                <a:cs typeface="IBM Plex Sans" pitchFamily="34" charset="-120"/>
+              </a:rPr>
+              <a:t>1013</a:t>
+            </a:r>
+            <a:endParaRPr lang="en-US" sz="5500" dirty="0"/>
+          </a:p>
+        </p:txBody>
+      </p:sp>
+      <p:sp>
+        <p:nvSpPr>
+          <p:cNvPr id="9" name="Text 7"/>
+          <p:cNvSpPr/>
+          <p:nvPr/>
+        </p:nvSpPr>
+        <p:spPr>
+          <a:xfrm>
+            <a:off x="4662984" y="2980531"/>
+            <a:ext cx="2952014" cy="573881"/>
+          </a:xfrm>
+          <a:prstGeom prst="rect">
+            <a:avLst/>
+          </a:prstGeom>
+          <a:noFill/>
+          <a:ln/>
+        </p:spPr>
+        <p:txBody>
+          <a:bodyPr wrap="square" lIns="0" tIns="0" rIns="0" bIns="0" rtlCol="0" anchor="t">
+            <a:normAutofit/>
+          </a:bodyPr>
+          <a:lstStyle/>
+          <a:p>
+            <a:pPr algn="l" indent="0" marL="0">
+              <a:lnSpc>
+                <a:spcPts val="2160"/>
+              </a:lnSpc>
+              <a:buNone/>
+            </a:pPr>
+            <a:r>
+              <a:rPr lang="en-US" sz="1600" dirty="0">
+                <a:solidFill>
+                  <a:srgbClr val="C9D1E3"/>
+                </a:solidFill>
+                <a:latin typeface="IBM Plex Sans" pitchFamily="34" charset="0"/>
+                <a:ea typeface="IBM Plex Sans" pitchFamily="34" charset="-122"/>
+                <a:cs typeface="IBM Plex Sans" pitchFamily="34" charset="-120"/>
+              </a:rPr>
+              <a:t>MiB de memoria máxima, sobre un límite de 2048.</a:t>
+            </a:r>
+            <a:endParaRPr lang="en-US" sz="1600" dirty="0"/>
+          </a:p>
+        </p:txBody>
+      </p:sp>
+      <p:sp>
+        <p:nvSpPr>
+          <p:cNvPr id="10" name="Shape 8"/>
+          <p:cNvSpPr/>
+          <p:nvPr/>
+        </p:nvSpPr>
+        <p:spPr>
+          <a:xfrm>
+            <a:off x="7995741" y="1974056"/>
+            <a:ext cx="3380284" cy="1812131"/>
+          </a:xfrm>
+          <a:prstGeom prst="roundRect">
+            <a:avLst>
+              <a:gd name="adj" fmla="val 5431"/>
+            </a:avLst>
+          </a:prstGeom>
+          <a:solidFill>
+            <a:srgbClr val="1E2F55"/>
+          </a:solidFill>
+          <a:ln w="6350">
+            <a:solidFill>
+              <a:srgbClr val="3A4C78"/>
+            </a:solidFill>
+            <a:prstDash val="solid"/>
+          </a:ln>
+        </p:spPr>
+      </p:sp>
+      <p:sp>
+        <p:nvSpPr>
+          <p:cNvPr id="11" name="Text 9"/>
+          <p:cNvSpPr/>
+          <p:nvPr/>
+        </p:nvSpPr>
+        <p:spPr>
+          <a:xfrm>
+            <a:off x="8252916" y="2231231"/>
+            <a:ext cx="2951912" cy="723900"/>
+          </a:xfrm>
+          <a:prstGeom prst="rect">
+            <a:avLst/>
+          </a:prstGeom>
+          <a:noFill/>
+          <a:ln/>
+        </p:spPr>
+        <p:txBody>
+          <a:bodyPr wrap="square" lIns="0" tIns="0" rIns="0" bIns="0" rtlCol="0" anchor="t">
+            <a:normAutofit/>
+          </a:bodyPr>
+          <a:lstStyle/>
+          <a:p>
+            <a:pPr algn="l" indent="0" marL="0">
+              <a:lnSpc>
+                <a:spcPts val="5500"/>
+              </a:lnSpc>
+              <a:buNone/>
+            </a:pPr>
+            <a:r>
+              <a:rPr lang="en-US" sz="5500" b="1" dirty="0">
+                <a:solidFill>
+                  <a:srgbClr val="6CC5B5"/>
+                </a:solidFill>
+                <a:latin typeface="IBM Plex Sans" pitchFamily="34" charset="0"/>
+                <a:ea typeface="IBM Plex Sans" pitchFamily="34" charset="-122"/>
+                <a:cs typeface="IBM Plex Sans" pitchFamily="34" charset="-120"/>
+              </a:rPr>
+              <a:t>0</a:t>
+            </a:r>
+            <a:endParaRPr lang="en-US" sz="5500" dirty="0"/>
+          </a:p>
+        </p:txBody>
+      </p:sp>
+      <p:sp>
+        <p:nvSpPr>
+          <p:cNvPr id="12" name="Text 10"/>
+          <p:cNvSpPr/>
+          <p:nvPr/>
+        </p:nvSpPr>
+        <p:spPr>
+          <a:xfrm>
+            <a:off x="8252916" y="2980531"/>
+            <a:ext cx="2951912" cy="573881"/>
+          </a:xfrm>
+          <a:prstGeom prst="rect">
+            <a:avLst/>
+          </a:prstGeom>
+          <a:noFill/>
+          <a:ln/>
+        </p:spPr>
+        <p:txBody>
+          <a:bodyPr wrap="square" lIns="0" tIns="0" rIns="0" bIns="0" rtlCol="0" anchor="t">
+            <a:normAutofit/>
+          </a:bodyPr>
+          <a:lstStyle/>
+          <a:p>
+            <a:pPr algn="l" indent="0" marL="0">
+              <a:lnSpc>
+                <a:spcPts val="2160"/>
+              </a:lnSpc>
+              <a:buNone/>
+            </a:pPr>
+            <a:r>
+              <a:rPr lang="en-US" sz="1600" dirty="0">
+                <a:solidFill>
+                  <a:srgbClr val="C9D1E3"/>
+                </a:solidFill>
+                <a:latin typeface="IBM Plex Sans" pitchFamily="34" charset="0"/>
+                <a:ea typeface="IBM Plex Sans" pitchFamily="34" charset="-122"/>
+                <a:cs typeface="IBM Plex Sans" pitchFamily="34" charset="-120"/>
+              </a:rPr>
+              <a:t>reinicios, cortes por memoria y errores de memoria en la JVM.</a:t>
+            </a:r>
+            <a:endParaRPr lang="en-US" sz="1600" dirty="0"/>
+          </a:p>
+        </p:txBody>
+      </p:sp>
+      <p:sp>
+        <p:nvSpPr>
+          <p:cNvPr id="13" name="Text 11"/>
+          <p:cNvSpPr/>
+          <p:nvPr/>
+        </p:nvSpPr>
+        <p:spPr>
+          <a:xfrm>
+            <a:off x="812800" y="4094163"/>
+            <a:ext cx="10464800" cy="594320"/>
+          </a:xfrm>
+          <a:prstGeom prst="rect">
+            <a:avLst/>
+          </a:prstGeom>
+          <a:noFill/>
+          <a:ln/>
+        </p:spPr>
+        <p:txBody>
+          <a:bodyPr wrap="square" lIns="0" tIns="0" rIns="0" bIns="0" rtlCol="0" anchor="t">
+            <a:normAutofit/>
+          </a:bodyPr>
+          <a:lstStyle/>
+          <a:p>
+            <a:pPr algn="l" indent="0" marL="0">
+              <a:lnSpc>
+                <a:spcPts val="2240"/>
+              </a:lnSpc>
+              <a:buNone/>
+            </a:pPr>
+            <a:r>
+              <a:rPr lang="en-US" sz="1600" dirty="0">
+                <a:solidFill>
+                  <a:srgbClr val="C9D1E3"/>
+                </a:solidFill>
+                <a:latin typeface="IBM Plex Sans" pitchFamily="34" charset="0"/>
+                <a:ea typeface="IBM Plex Sans" pitchFamily="34" charset="-122"/>
+                <a:cs typeface="IBM Plex Sans" pitchFamily="34" charset="-120"/>
+              </a:rPr>
+              <a:t>Un límite de dos análisis a la vez acota el consumo. Con un solo hueco y 5 s de espera, 3 de las 5 peticiones recibían un 503; con dos huecos y 30 s, ninguna.</a:t>
+            </a:r>
+            <a:endParaRPr lang="en-US" sz="1600" dirty="0"/>
+          </a:p>
+        </p:txBody>
+      </p:sp>
+    </p:spTree>
+  </p:cSld>
+  <p:clrMapOvr>
+    <a:masterClrMapping/>
+  </p:clrMapOvr>
+</p:sld>
+</file>
+
+<file path=ppt/slides/slide16.xml><?xml version="1.0" encoding="utf-8"?>
+<p:sld xmlns:a="http://schemas.openxmlformats.org/drawingml/2006/main" xmlns:r="http://schemas.openxmlformats.org/officeDocument/2006/relationships" xmlns:p="http://schemas.openxmlformats.org/presentationml/2006/main">
+  <p:cSld name="Slide 16">
+    <p:bg>
+      <p:bgPr>
+        <a:solidFill>
+          <a:srgbClr val="F6F5F0"/>
+        </a:solidFill>
+      </p:bgPr>
+    </p:bg>
+    <p:spTree>
+      <p:nvGrpSpPr>
+        <p:cNvPr id="1" name=""/>
+        <p:cNvGrpSpPr/>
+        <p:nvPr/>
+      </p:nvGrpSpPr>
+      <p:grpSpPr>
+        <a:xfrm>
+          <a:off x="0" y="0"/>
+          <a:ext cx="0" cy="0"/>
+          <a:chOff x="0" y="0"/>
+          <a:chExt cx="0" cy="0"/>
+        </a:xfrm>
+      </p:grpSpPr>
+      <p:sp>
+        <p:nvSpPr>
+          <p:cNvPr id="2" name="Text 0"/>
+          <p:cNvSpPr/>
+          <p:nvPr/>
+        </p:nvSpPr>
+        <p:spPr>
+          <a:xfrm>
+            <a:off x="812800" y="812800"/>
+            <a:ext cx="10883392" cy="274241"/>
+          </a:xfrm>
+          <a:prstGeom prst="rect">
+            <a:avLst/>
+          </a:prstGeom>
+          <a:noFill/>
+          <a:ln/>
+        </p:spPr>
+        <p:txBody>
+          <a:bodyPr wrap="square" lIns="0" tIns="0" rIns="0" bIns="0" rtlCol="0" anchor="t">
+            <a:normAutofit/>
+          </a:bodyPr>
+          <a:lstStyle/>
+          <a:p>
+            <a:pPr algn="l" indent="0" marL="0">
+              <a:lnSpc>
+                <a:spcPts val="1960"/>
+              </a:lnSpc>
+              <a:buNone/>
+            </a:pPr>
+            <a:r>
+              <a:rPr lang="en-US" sz="1400" b="1" spc="150" kern="0" dirty="0">
+                <a:solidFill>
+                  <a:srgbClr val="1F7A6D"/>
+                </a:solidFill>
+                <a:latin typeface="IBM Plex Sans" pitchFamily="34" charset="0"/>
+                <a:ea typeface="IBM Plex Sans" pitchFamily="34" charset="-122"/>
+                <a:cs typeface="IBM Plex Sans" pitchFamily="34" charset="-120"/>
+              </a:rPr>
+              <a:t>ALCANCE Y LÍMITES</a:t>
+            </a:r>
+            <a:endParaRPr lang="en-US" sz="1400" dirty="0"/>
+          </a:p>
+        </p:txBody>
+      </p:sp>
+      <p:sp>
+        <p:nvSpPr>
+          <p:cNvPr id="3" name="Text 1"/>
+          <p:cNvSpPr/>
+          <p:nvPr>
+            <p:ph type="title"/>
+          </p:nvPr>
+        </p:nvSpPr>
+        <p:spPr>
+          <a:xfrm>
+            <a:off x="812800" y="1163241"/>
+            <a:ext cx="10883392" cy="528241"/>
+          </a:xfrm>
+          <a:prstGeom prst="rect">
+            <a:avLst/>
+          </a:prstGeom>
+          <a:noFill/>
+          <a:ln/>
+        </p:spPr>
+        <p:txBody>
+          <a:bodyPr wrap="square" lIns="0" tIns="0" rIns="0" bIns="0" rtlCol="0" anchor="t">
+            <a:normAutofit/>
+          </a:bodyPr>
+          <a:lstStyle/>
+          <a:p>
+            <a:pPr algn="l" indent="0" marL="0">
+              <a:lnSpc>
+                <a:spcPts val="3960"/>
+              </a:lnSpc>
+              <a:buNone/>
+            </a:pPr>
+            <a:r>
+              <a:rPr lang="en-US" sz="3600" b="1" i="0" dirty="0">
+                <a:solidFill>
+                  <a:srgbClr val="14213D"/>
+                </a:solidFill>
+                <a:latin typeface="Source Serif 4" pitchFamily="18" charset="0"/>
+                <a:ea typeface="Source Serif 4" pitchFamily="18" charset="-122"/>
+                <a:cs typeface="Source Serif 4" pitchFamily="18" charset="-120"/>
+              </a:rPr>
+              <a:t>Lo que hace y lo que queda fuera</a:t>
+            </a:r>
+            <a:endParaRPr lang="en-US" sz="3600" dirty="0"/>
+          </a:p>
+        </p:txBody>
+      </p:sp>
+      <p:sp>
+        <p:nvSpPr>
+          <p:cNvPr id="4" name="Shape 2"/>
+          <p:cNvSpPr/>
+          <p:nvPr/>
+        </p:nvSpPr>
+        <p:spPr>
+          <a:xfrm>
+            <a:off x="815975" y="1974056"/>
+            <a:ext cx="5175250" cy="2724150"/>
+          </a:xfrm>
+          <a:prstGeom prst="roundRect">
+            <a:avLst>
+              <a:gd name="adj" fmla="val 3613"/>
+            </a:avLst>
+          </a:prstGeom>
+          <a:solidFill>
+            <a:srgbClr val="FFFFFF"/>
+          </a:solidFill>
+          <a:ln w="6350">
+            <a:solidFill>
+              <a:srgbClr val="DAD8CF"/>
+            </a:solidFill>
+            <a:prstDash val="solid"/>
+          </a:ln>
+        </p:spPr>
+      </p:sp>
+      <p:sp>
+        <p:nvSpPr>
+          <p:cNvPr id="5" name="Text 3"/>
+          <p:cNvSpPr/>
+          <p:nvPr/>
+        </p:nvSpPr>
+        <p:spPr>
+          <a:xfrm>
+            <a:off x="1073150" y="2231231"/>
+            <a:ext cx="4800727" cy="330200"/>
+          </a:xfrm>
+          <a:prstGeom prst="rect">
+            <a:avLst/>
+          </a:prstGeom>
+          <a:noFill/>
+          <a:ln/>
+        </p:spPr>
+        <p:txBody>
+          <a:bodyPr wrap="square" lIns="0" tIns="0" rIns="0" bIns="0" rtlCol="0" anchor="t">
+            <a:normAutofit/>
+          </a:bodyPr>
+          <a:lstStyle/>
+          <a:p>
+            <a:pPr algn="l" indent="0" marL="0">
+              <a:lnSpc>
+                <a:spcPts val="2400"/>
+              </a:lnSpc>
+              <a:buNone/>
+            </a:pPr>
+            <a:r>
+              <a:rPr lang="en-US" sz="2000" b="1" dirty="0">
+                <a:solidFill>
+                  <a:srgbClr val="14213D"/>
+                </a:solidFill>
+                <a:latin typeface="IBM Plex Sans" pitchFamily="34" charset="0"/>
+                <a:ea typeface="IBM Plex Sans" pitchFamily="34" charset="-122"/>
+                <a:cs typeface="IBM Plex Sans" pitchFamily="34" charset="-120"/>
+              </a:rPr>
+              <a:t>Decisiones</a:t>
+            </a:r>
+            <a:endParaRPr lang="en-US" sz="2000" dirty="0"/>
+          </a:p>
+        </p:txBody>
+      </p:sp>
+      <p:sp>
+        <p:nvSpPr>
+          <p:cNvPr id="6" name="Text 4"/>
+          <p:cNvSpPr/>
+          <p:nvPr/>
+        </p:nvSpPr>
+        <p:spPr>
+          <a:xfrm>
+            <a:off x="1073150" y="2637631"/>
+            <a:ext cx="4800727" cy="558800"/>
+          </a:xfrm>
+          <a:prstGeom prst="rect">
+            <a:avLst/>
+          </a:prstGeom>
+          <a:noFill/>
+          <a:ln/>
+        </p:spPr>
+        <p:txBody>
+          <a:bodyPr wrap="square" lIns="0" tIns="0" rIns="0" bIns="0" rtlCol="0" anchor="t">
+            <a:normAutofit/>
+          </a:bodyPr>
+          <a:lstStyle/>
+          <a:p>
+            <a:pPr algn="l" indent="0" marL="0">
+              <a:lnSpc>
+                <a:spcPts val="2100"/>
+              </a:lnSpc>
+              <a:buNone/>
+            </a:pPr>
+            <a:r>
+              <a:rPr lang="en-US" sz="1500" dirty="0">
+                <a:solidFill>
+                  <a:srgbClr val="4A5568"/>
+                </a:solidFill>
+                <a:latin typeface="IBM Plex Sans" pitchFamily="34" charset="0"/>
+                <a:ea typeface="IBM Plex Sans" pitchFamily="34" charset="-122"/>
+                <a:cs typeface="IBM Plex Sans" pitchFamily="34" charset="-120"/>
+              </a:rPr>
+              <a:t>Servicio sin estado: no guarda documentos ni datos de usuario.</a:t>
+            </a:r>
+            <a:endParaRPr lang="en-US" sz="1500" dirty="0"/>
+          </a:p>
+        </p:txBody>
+      </p:sp>
+      <p:sp>
+        <p:nvSpPr>
+          <p:cNvPr id="7" name="Text 5"/>
+          <p:cNvSpPr/>
+          <p:nvPr/>
+        </p:nvSpPr>
+        <p:spPr>
+          <a:xfrm>
+            <a:off x="1073150" y="3272631"/>
+            <a:ext cx="4800727" cy="558800"/>
+          </a:xfrm>
+          <a:prstGeom prst="rect">
+            <a:avLst/>
+          </a:prstGeom>
+          <a:noFill/>
+          <a:ln/>
+        </p:spPr>
+        <p:txBody>
+          <a:bodyPr wrap="square" lIns="0" tIns="0" rIns="0" bIns="0" rtlCol="0" anchor="t">
+            <a:normAutofit/>
+          </a:bodyPr>
+          <a:lstStyle/>
+          <a:p>
+            <a:pPr algn="l" indent="0" marL="0">
+              <a:lnSpc>
+                <a:spcPts val="2100"/>
+              </a:lnSpc>
+              <a:buNone/>
+            </a:pPr>
+            <a:r>
+              <a:rPr lang="en-US" sz="1500" dirty="0">
+                <a:solidFill>
+                  <a:srgbClr val="4A5568"/>
+                </a:solidFill>
+                <a:latin typeface="IBM Plex Sans" pitchFamily="34" charset="0"/>
+                <a:ea typeface="IBM Plex Sans" pitchFamily="34" charset="-122"/>
+                <a:cs typeface="IBM Plex Sans" pitchFamily="34" charset="-120"/>
+              </a:rPr>
+              <a:t>La revocación solo se consulta para cadenas de confianza, con protección frente a SSRF.</a:t>
+            </a:r>
+            <a:endParaRPr lang="en-US" sz="1500" dirty="0"/>
+          </a:p>
+        </p:txBody>
+      </p:sp>
+      <p:sp>
+        <p:nvSpPr>
+          <p:cNvPr id="8" name="Text 6"/>
+          <p:cNvSpPr/>
+          <p:nvPr/>
+        </p:nvSpPr>
+        <p:spPr>
+          <a:xfrm>
+            <a:off x="1073150" y="3907631"/>
+            <a:ext cx="4800727" cy="292100"/>
+          </a:xfrm>
+          <a:prstGeom prst="rect">
+            <a:avLst/>
+          </a:prstGeom>
+          <a:noFill/>
+          <a:ln/>
+        </p:spPr>
+        <p:txBody>
+          <a:bodyPr wrap="square" lIns="0" tIns="0" rIns="0" bIns="0" rtlCol="0" anchor="t">
+            <a:normAutofit/>
+          </a:bodyPr>
+          <a:lstStyle/>
+          <a:p>
+            <a:pPr algn="l" indent="0" marL="0">
+              <a:lnSpc>
+                <a:spcPts val="2100"/>
+              </a:lnSpc>
+              <a:buNone/>
+            </a:pPr>
+            <a:r>
+              <a:rPr lang="en-US" sz="1500" dirty="0">
+                <a:solidFill>
+                  <a:srgbClr val="4A5568"/>
+                </a:solidFill>
+                <a:latin typeface="IBM Plex Sans" pitchFamily="34" charset="0"/>
+                <a:ea typeface="IBM Plex Sans" pitchFamily="34" charset="-122"/>
+                <a:cs typeface="IBM Plex Sans" pitchFamily="34" charset="-120"/>
+              </a:rPr>
+              <a:t>El dominio no depende de ninguna librería.</a:t>
+            </a:r>
+            <a:endParaRPr lang="en-US" sz="1500" dirty="0"/>
+          </a:p>
+        </p:txBody>
+      </p:sp>
+      <p:sp>
+        <p:nvSpPr>
+          <p:cNvPr id="9" name="Shape 7"/>
+          <p:cNvSpPr/>
+          <p:nvPr/>
+        </p:nvSpPr>
+        <p:spPr>
+          <a:xfrm>
+            <a:off x="6200775" y="1974056"/>
+            <a:ext cx="5175250" cy="2724150"/>
+          </a:xfrm>
+          <a:prstGeom prst="roundRect">
+            <a:avLst>
+              <a:gd name="adj" fmla="val 3613"/>
+            </a:avLst>
+          </a:prstGeom>
+          <a:solidFill>
+            <a:srgbClr val="FFFFFF"/>
+          </a:solidFill>
+          <a:ln w="6350">
+            <a:solidFill>
+              <a:srgbClr val="DAD8CF"/>
+            </a:solidFill>
+            <a:prstDash val="solid"/>
+          </a:ln>
+        </p:spPr>
+      </p:sp>
+      <p:sp>
+        <p:nvSpPr>
+          <p:cNvPr id="10" name="Text 8"/>
+          <p:cNvSpPr/>
+          <p:nvPr/>
+        </p:nvSpPr>
+        <p:spPr>
+          <a:xfrm>
+            <a:off x="6457950" y="2231231"/>
+            <a:ext cx="4800727" cy="330200"/>
+          </a:xfrm>
+          <a:prstGeom prst="rect">
+            <a:avLst/>
+          </a:prstGeom>
+          <a:noFill/>
+          <a:ln/>
+        </p:spPr>
+        <p:txBody>
+          <a:bodyPr wrap="square" lIns="0" tIns="0" rIns="0" bIns="0" rtlCol="0" anchor="t">
+            <a:normAutofit/>
+          </a:bodyPr>
+          <a:lstStyle/>
+          <a:p>
+            <a:pPr algn="l" indent="0" marL="0">
+              <a:lnSpc>
+                <a:spcPts val="2400"/>
+              </a:lnSpc>
+              <a:buNone/>
+            </a:pPr>
+            <a:r>
+              <a:rPr lang="en-US" sz="2000" b="1" dirty="0">
+                <a:solidFill>
+                  <a:srgbClr val="14213D"/>
+                </a:solidFill>
+                <a:latin typeface="IBM Plex Sans" pitchFamily="34" charset="0"/>
+                <a:ea typeface="IBM Plex Sans" pitchFamily="34" charset="-122"/>
+                <a:cs typeface="IBM Plex Sans" pitchFamily="34" charset="-120"/>
+              </a:rPr>
+              <a:t>Límites conocidos</a:t>
+            </a:r>
+            <a:endParaRPr lang="en-US" sz="2000" dirty="0"/>
+          </a:p>
+        </p:txBody>
+      </p:sp>
+      <p:sp>
+        <p:nvSpPr>
+          <p:cNvPr id="11" name="Text 9"/>
+          <p:cNvSpPr/>
+          <p:nvPr/>
+        </p:nvSpPr>
+        <p:spPr>
+          <a:xfrm>
+            <a:off x="6457950" y="2637631"/>
+            <a:ext cx="4800727" cy="558800"/>
+          </a:xfrm>
+          <a:prstGeom prst="rect">
+            <a:avLst/>
+          </a:prstGeom>
+          <a:noFill/>
+          <a:ln/>
+        </p:spPr>
+        <p:txBody>
+          <a:bodyPr wrap="square" lIns="0" tIns="0" rIns="0" bIns="0" rtlCol="0" anchor="t">
+            <a:normAutofit/>
+          </a:bodyPr>
+          <a:lstStyle/>
+          <a:p>
+            <a:pPr algn="l" indent="0" marL="0">
+              <a:lnSpc>
+                <a:spcPts val="2100"/>
+              </a:lnSpc>
+              <a:buNone/>
+            </a:pPr>
+            <a:r>
+              <a:rPr lang="en-US" sz="1500" dirty="0">
+                <a:solidFill>
+                  <a:srgbClr val="4A5568"/>
+                </a:solidFill>
+                <a:latin typeface="IBM Plex Sans" pitchFamily="34" charset="0"/>
+                <a:ea typeface="IBM Plex Sans" pitchFamily="34" charset="-122"/>
+                <a:cs typeface="IBM Plex Sans" pitchFamily="34" charset="-120"/>
+              </a:rPr>
+              <a:t>Sin login: cualquiera con la URL puede usarlo, no es para documentos confidenciales.</a:t>
+            </a:r>
+            <a:endParaRPr lang="en-US" sz="1500" dirty="0"/>
+          </a:p>
+        </p:txBody>
+      </p:sp>
+      <p:sp>
+        <p:nvSpPr>
+          <p:cNvPr id="12" name="Text 10"/>
+          <p:cNvSpPr/>
+          <p:nvPr/>
+        </p:nvSpPr>
+        <p:spPr>
+          <a:xfrm>
+            <a:off x="6457950" y="3272631"/>
+            <a:ext cx="4800727" cy="558800"/>
+          </a:xfrm>
+          <a:prstGeom prst="rect">
+            <a:avLst/>
+          </a:prstGeom>
+          <a:noFill/>
+          <a:ln/>
+        </p:spPr>
+        <p:txBody>
+          <a:bodyPr wrap="square" lIns="0" tIns="0" rIns="0" bIns="0" rtlCol="0" anchor="t">
+            <a:normAutofit/>
+          </a:bodyPr>
+          <a:lstStyle/>
+          <a:p>
+            <a:pPr algn="l" indent="0" marL="0">
+              <a:lnSpc>
+                <a:spcPts val="2100"/>
+              </a:lnSpc>
+              <a:buNone/>
+            </a:pPr>
+            <a:r>
+              <a:rPr lang="en-US" sz="1500" dirty="0">
+                <a:solidFill>
+                  <a:srgbClr val="4A5568"/>
+                </a:solidFill>
+                <a:latin typeface="IBM Plex Sans" pitchFamily="34" charset="0"/>
+                <a:ea typeface="IBM Plex Sans" pitchFamily="34" charset="-122"/>
+                <a:cs typeface="IBM Plex Sans" pitchFamily="34" charset="-120"/>
+              </a:rPr>
+              <a:t>Conformidad PDF/A-1b; otros perfiles no están cubiertos.</a:t>
+            </a:r>
+            <a:endParaRPr lang="en-US" sz="1500" dirty="0"/>
+          </a:p>
+        </p:txBody>
+      </p:sp>
+      <p:sp>
+        <p:nvSpPr>
+          <p:cNvPr id="13" name="Text 11"/>
+          <p:cNvSpPr/>
+          <p:nvPr/>
+        </p:nvSpPr>
+        <p:spPr>
+          <a:xfrm>
+            <a:off x="6457950" y="3907631"/>
+            <a:ext cx="4800727" cy="558800"/>
+          </a:xfrm>
+          <a:prstGeom prst="rect">
+            <a:avLst/>
+          </a:prstGeom>
+          <a:noFill/>
+          <a:ln/>
+        </p:spPr>
+        <p:txBody>
+          <a:bodyPr wrap="square" lIns="0" tIns="0" rIns="0" bIns="0" rtlCol="0" anchor="t">
+            <a:normAutofit/>
+          </a:bodyPr>
+          <a:lstStyle/>
+          <a:p>
+            <a:pPr algn="l" indent="0" marL="0">
+              <a:lnSpc>
+                <a:spcPts val="2100"/>
+              </a:lnSpc>
+              <a:buNone/>
+            </a:pPr>
+            <a:r>
+              <a:rPr lang="en-US" sz="1500" dirty="0">
+                <a:solidFill>
+                  <a:srgbClr val="4A5568"/>
+                </a:solidFill>
+                <a:latin typeface="IBM Plex Sans" pitchFamily="34" charset="0"/>
+                <a:ea typeface="IBM Plex Sans" pitchFamily="34" charset="-122"/>
+                <a:cs typeface="IBM Plex Sans" pitchFamily="34" charset="-120"/>
+              </a:rPr>
+              <a:t>Subfiltros de firma admitidos: PKCS#7 y CAdES separados.</a:t>
+            </a:r>
+            <a:endParaRPr lang="en-US" sz="1500" dirty="0"/>
+          </a:p>
+        </p:txBody>
+      </p:sp>
+      <p:sp>
+        <p:nvSpPr>
+          <p:cNvPr id="14" name="Text 12"/>
+          <p:cNvSpPr/>
+          <p:nvPr/>
+        </p:nvSpPr>
+        <p:spPr>
+          <a:xfrm>
+            <a:off x="812800" y="6238280"/>
+            <a:ext cx="2807970" cy="238720"/>
+          </a:xfrm>
+          <a:prstGeom prst="rect">
+            <a:avLst/>
+          </a:prstGeom>
+          <a:noFill/>
+          <a:ln/>
+        </p:spPr>
+        <p:txBody>
+          <a:bodyPr wrap="square" lIns="0" tIns="0" rIns="0" bIns="0" rtlCol="0" anchor="t">
+            <a:normAutofit/>
+          </a:bodyPr>
+          <a:lstStyle/>
+          <a:p>
+            <a:pPr algn="l" indent="0" marL="0">
+              <a:lnSpc>
+                <a:spcPts val="1680"/>
+              </a:lnSpc>
+              <a:buNone/>
+            </a:pPr>
+            <a:r>
+              <a:rPr lang="en-US" sz="1200" dirty="0">
+                <a:solidFill>
+                  <a:srgbClr val="5B6478"/>
+                </a:solidFill>
+                <a:latin typeface="IBM Plex Sans" pitchFamily="34" charset="0"/>
+                <a:ea typeface="IBM Plex Sans" pitchFamily="34" charset="-122"/>
+                <a:cs typeface="IBM Plex Sans" pitchFamily="34" charset="-120"/>
+              </a:rPr>
+              <a:t>PDF Inspector &amp; Signature Verifier</a:t>
+            </a:r>
+            <a:endParaRPr lang="en-US" sz="1200" dirty="0"/>
+          </a:p>
+        </p:txBody>
+      </p:sp>
+    </p:spTree>
+  </p:cSld>
+  <p:clrMapOvr>
+    <a:masterClrMapping/>
+  </p:clrMapOvr>
+</p:sld>
+</file>
+
+<file path=ppt/slides/slide17.xml><?xml version="1.0" encoding="utf-8"?>
+<p:sld xmlns:a="http://schemas.openxmlformats.org/drawingml/2006/main" xmlns:r="http://schemas.openxmlformats.org/officeDocument/2006/relationships" xmlns:p="http://schemas.openxmlformats.org/presentationml/2006/main">
+  <p:cSld name="Slide 17">
+    <p:bg>
+      <p:bgPr>
+        <a:solidFill>
+          <a:srgbClr val="14213D"/>
+        </a:solidFill>
+      </p:bgPr>
+    </p:bg>
+    <p:spTree>
+      <p:nvGrpSpPr>
+        <p:cNvPr id="1" name=""/>
+        <p:cNvGrpSpPr/>
+        <p:nvPr/>
+      </p:nvGrpSpPr>
+      <p:grpSpPr>
+        <a:xfrm>
+          <a:off x="0" y="0"/>
+          <a:ext cx="0" cy="0"/>
+          <a:chOff x="0" y="0"/>
+          <a:chExt cx="0" cy="0"/>
+        </a:xfrm>
+      </p:grpSpPr>
+      <p:sp>
+        <p:nvSpPr>
+          <p:cNvPr id="2" name="Text 0"/>
+          <p:cNvSpPr/>
+          <p:nvPr/>
+        </p:nvSpPr>
+        <p:spPr>
+          <a:xfrm>
             <a:off x="812800" y="1907580"/>
             <a:ext cx="10883392" cy="292100"/>
           </a:xfrm>
@@ -6241,7 +7745,9 @@
         <p:nvSpPr>
           <p:cNvPr id="3" name="Text 1"/>
           <p:cNvSpPr/>
-          <p:nvPr/>
+          <p:nvPr>
+            <p:ph type="title"/>
+          </p:nvPr>
         </p:nvSpPr>
         <p:spPr>
           <a:xfrm>
@@ -6267,13 +7773,13 @@
               <a:buNone/>
             </a:pPr>
             <a:r>
-              <a:rPr lang="en-US" sz="5200" b="1" dirty="0">
+              <a:rPr lang="en-US" sz="5200" b="1" i="0" dirty="0">
                 <a:solidFill>
                   <a:srgbClr val="F6F5F0"/>
                 </a:solidFill>
-                <a:latin typeface="Source Serif 4" pitchFamily="34" charset="0"/>
-                <a:ea typeface="Source Serif 4" pitchFamily="34" charset="-122"/>
-                <a:cs typeface="Source Serif 4" pitchFamily="34" charset="-120"/>
+                <a:latin typeface="Source Serif 4" pitchFamily="18" charset="0"/>
+                <a:ea typeface="Source Serif 4" pitchFamily="18" charset="-122"/>
+                <a:cs typeface="Source Serif 4" pitchFamily="18" charset="-120"/>
               </a:rPr>
               <a:t>Pruébalo con tu propio PDF</a:t>
             </a:r>
@@ -6493,7 +7999,9 @@
         <p:nvSpPr>
           <p:cNvPr id="3" name="Text 1"/>
           <p:cNvSpPr/>
-          <p:nvPr/>
+          <p:nvPr>
+            <p:ph type="title"/>
+          </p:nvPr>
         </p:nvSpPr>
         <p:spPr>
           <a:xfrm>
@@ -6519,13 +8027,13 @@
               <a:buNone/>
             </a:pPr>
             <a:r>
-              <a:rPr lang="en-US" sz="3600" b="1" dirty="0">
+              <a:rPr lang="en-US" sz="3600" b="1" i="0" dirty="0">
                 <a:solidFill>
                   <a:srgbClr val="14213D"/>
                 </a:solidFill>
-                <a:latin typeface="Source Serif 4" pitchFamily="34" charset="0"/>
-                <a:ea typeface="Source Serif 4" pitchFamily="34" charset="-122"/>
-                <a:cs typeface="Source Serif 4" pitchFamily="34" charset="-120"/>
+                <a:latin typeface="Source Serif 4" pitchFamily="18" charset="0"/>
+                <a:ea typeface="Source Serif 4" pitchFamily="18" charset="-122"/>
+                <a:cs typeface="Source Serif 4" pitchFamily="18" charset="-120"/>
               </a:rPr>
               <a:t>Un PDF firmado plantea cuatro preguntas</a:t>
             </a:r>
@@ -7002,7 +8510,7 @@
         <p:spPr>
           <a:xfrm>
             <a:off x="812800" y="6238280"/>
-            <a:ext cx="2410174" cy="238720"/>
+            <a:ext cx="2807970" cy="238720"/>
           </a:xfrm>
           <a:prstGeom prst="rect">
             <a:avLst/>
@@ -7117,7 +8625,9 @@
         <p:nvSpPr>
           <p:cNvPr id="3" name="Text 1"/>
           <p:cNvSpPr/>
-          <p:nvPr/>
+          <p:nvPr>
+            <p:ph type="title"/>
+          </p:nvPr>
         </p:nvSpPr>
         <p:spPr>
           <a:xfrm>
@@ -7143,13 +8653,13 @@
               <a:buNone/>
             </a:pPr>
             <a:r>
-              <a:rPr lang="en-US" sz="3600" b="1" dirty="0">
+              <a:rPr lang="en-US" sz="3600" b="1" i="0" dirty="0">
                 <a:solidFill>
                   <a:srgbClr val="14213D"/>
                 </a:solidFill>
-                <a:latin typeface="Source Serif 4" pitchFamily="34" charset="0"/>
-                <a:ea typeface="Source Serif 4" pitchFamily="34" charset="-122"/>
-                <a:cs typeface="Source Serif 4" pitchFamily="34" charset="-120"/>
+                <a:latin typeface="Source Serif 4" pitchFamily="18" charset="0"/>
+                <a:ea typeface="Source Serif 4" pitchFamily="18" charset="-122"/>
+                <a:cs typeface="Source Serif 4" pitchFamily="18" charset="-120"/>
               </a:rPr>
               <a:t>Un informe JSON, sin guardar el documento</a:t>
             </a:r>
@@ -7900,7 +9410,7 @@
         <p:spPr>
           <a:xfrm>
             <a:off x="812800" y="6238280"/>
-            <a:ext cx="2410174" cy="238720"/>
+            <a:ext cx="2807970" cy="238720"/>
           </a:xfrm>
           <a:prstGeom prst="rect">
             <a:avLst/>
@@ -8015,7 +9525,9 @@
         <p:nvSpPr>
           <p:cNvPr id="3" name="Text 1"/>
           <p:cNvSpPr/>
-          <p:nvPr/>
+          <p:nvPr>
+            <p:ph type="title"/>
+          </p:nvPr>
         </p:nvSpPr>
         <p:spPr>
           <a:xfrm>
@@ -8041,13 +9553,13 @@
               <a:buNone/>
             </a:pPr>
             <a:r>
-              <a:rPr lang="en-US" sz="3600" b="1" dirty="0">
+              <a:rPr lang="en-US" sz="3600" b="1" i="0" dirty="0">
                 <a:solidFill>
                   <a:srgbClr val="F6F5F0"/>
                 </a:solidFill>
-                <a:latin typeface="Source Serif 4" pitchFamily="34" charset="0"/>
-                <a:ea typeface="Source Serif 4" pitchFamily="34" charset="-122"/>
-                <a:cs typeface="Source Serif 4" pitchFamily="34" charset="-120"/>
+                <a:latin typeface="Source Serif 4" pitchFamily="18" charset="0"/>
+                <a:ea typeface="Source Serif 4" pitchFamily="18" charset="-122"/>
+                <a:cs typeface="Source Serif 4" pitchFamily="18" charset="-120"/>
               </a:rPr>
               <a:t>Hexagonal, y comprobada por tests</a:t>
             </a:r>
@@ -8179,7 +9691,7 @@
         <p:spPr>
           <a:xfrm>
             <a:off x="3111500" y="2612132"/>
-            <a:ext cx="406400" cy="523180"/>
+            <a:ext cx="426720" cy="523180"/>
           </a:xfrm>
           <a:prstGeom prst="rect">
             <a:avLst/>
@@ -8360,7 +9872,7 @@
         <p:spPr>
           <a:xfrm>
             <a:off x="5918200" y="2612132"/>
-            <a:ext cx="406400" cy="523180"/>
+            <a:ext cx="426720" cy="523180"/>
           </a:xfrm>
           <a:prstGeom prst="rect">
             <a:avLst/>
@@ -8519,7 +10031,7 @@
         <p:spPr>
           <a:xfrm>
             <a:off x="8724900" y="2612132"/>
-            <a:ext cx="406400" cy="523180"/>
+            <a:ext cx="426720" cy="523180"/>
           </a:xfrm>
           <a:prstGeom prst="rect">
             <a:avLst/>
@@ -8734,7 +10246,7 @@
             <a:r>
               <a:rPr lang="en-US" sz="1700" b="1" dirty="0">
                 <a:solidFill>
-                  <a:srgbClr val="C9D1E3"/>
+                  <a:srgbClr val="F6F5F0"/>
                 </a:solidFill>
                 <a:latin typeface="IBM Plex Sans" pitchFamily="34" charset="0"/>
                 <a:ea typeface="IBM Plex Sans" pitchFamily="34" charset="-122"/>
@@ -8837,7 +10349,9 @@
         <p:nvSpPr>
           <p:cNvPr id="3" name="Text 1"/>
           <p:cNvSpPr/>
-          <p:nvPr/>
+          <p:nvPr>
+            <p:ph type="title"/>
+          </p:nvPr>
         </p:nvSpPr>
         <p:spPr>
           <a:xfrm>
@@ -8863,13 +10377,13 @@
               <a:buNone/>
             </a:pPr>
             <a:r>
-              <a:rPr lang="en-US" sz="3600" b="1" dirty="0">
+              <a:rPr lang="en-US" sz="3600" b="1" i="0" dirty="0">
                 <a:solidFill>
                   <a:srgbClr val="14213D"/>
                 </a:solidFill>
-                <a:latin typeface="Source Serif 4" pitchFamily="34" charset="0"/>
-                <a:ea typeface="Source Serif 4" pitchFamily="34" charset="-122"/>
-                <a:cs typeface="Source Serif 4" pitchFamily="34" charset="-120"/>
+                <a:latin typeface="Source Serif 4" pitchFamily="18" charset="0"/>
+                <a:ea typeface="Source Serif 4" pitchFamily="18" charset="-122"/>
+                <a:cs typeface="Source Serif 4" pitchFamily="18" charset="-120"/>
               </a:rPr>
               <a:t>Distingue tres situaciones tras firmar</a:t>
             </a:r>
@@ -9297,7 +10811,7 @@
         <p:spPr>
           <a:xfrm>
             <a:off x="812800" y="6238280"/>
-            <a:ext cx="2410174" cy="238720"/>
+            <a:ext cx="2807970" cy="238720"/>
           </a:xfrm>
           <a:prstGeom prst="rect">
             <a:avLst/>
@@ -9412,7 +10926,9 @@
         <p:nvSpPr>
           <p:cNvPr id="3" name="Text 1"/>
           <p:cNvSpPr/>
-          <p:nvPr/>
+          <p:nvPr>
+            <p:ph type="title"/>
+          </p:nvPr>
         </p:nvSpPr>
         <p:spPr>
           <a:xfrm>
@@ -9438,13 +10954,13 @@
               <a:buNone/>
             </a:pPr>
             <a:r>
-              <a:rPr lang="en-US" sz="3600" b="1" dirty="0">
+              <a:rPr lang="en-US" sz="3600" b="1" i="0" dirty="0">
                 <a:solidFill>
                   <a:srgbClr val="14213D"/>
                 </a:solidFill>
-                <a:latin typeface="Source Serif 4" pitchFamily="34" charset="0"/>
-                <a:ea typeface="Source Serif 4" pitchFamily="34" charset="-122"/>
-                <a:cs typeface="Source Serif 4" pitchFamily="34" charset="-120"/>
+                <a:latin typeface="Source Serif 4" pitchFamily="18" charset="0"/>
+                <a:ea typeface="Source Serif 4" pitchFamily="18" charset="-122"/>
+                <a:cs typeface="Source Serif 4" pitchFamily="18" charset="-120"/>
               </a:rPr>
               <a:t>Una conclusión por firma, con sus motivos</a:t>
             </a:r>
@@ -9664,7 +11180,7 @@
         <p:spPr>
           <a:xfrm>
             <a:off x="5283200" y="3093343"/>
-            <a:ext cx="457200" cy="594320"/>
+            <a:ext cx="487680" cy="594320"/>
           </a:xfrm>
           <a:prstGeom prst="rect">
             <a:avLst/>
@@ -9939,7 +11455,7 @@
         <p:spPr>
           <a:xfrm>
             <a:off x="812800" y="6238280"/>
-            <a:ext cx="2410174" cy="238720"/>
+            <a:ext cx="2807970" cy="238720"/>
           </a:xfrm>
           <a:prstGeom prst="rect">
             <a:avLst/>
@@ -10054,7 +11570,9 @@
         <p:nvSpPr>
           <p:cNvPr id="3" name="Text 1"/>
           <p:cNvSpPr/>
-          <p:nvPr/>
+          <p:nvPr>
+            <p:ph type="title"/>
+          </p:nvPr>
         </p:nvSpPr>
         <p:spPr>
           <a:xfrm>
@@ -10080,13 +11598,13 @@
               <a:buNone/>
             </a:pPr>
             <a:r>
-              <a:rPr lang="en-US" sz="3600" b="1" dirty="0">
+              <a:rPr lang="en-US" sz="3600" b="1" i="0" dirty="0">
                 <a:solidFill>
                   <a:srgbClr val="14213D"/>
                 </a:solidFill>
-                <a:latin typeface="Source Serif 4" pitchFamily="34" charset="0"/>
-                <a:ea typeface="Source Serif 4" pitchFamily="34" charset="-122"/>
-                <a:cs typeface="Source Serif 4" pitchFamily="34" charset="-120"/>
+                <a:latin typeface="Source Serif 4" pitchFamily="18" charset="0"/>
+                <a:ea typeface="Source Serif 4" pitchFamily="18" charset="-122"/>
+                <a:cs typeface="Source Serif 4" pitchFamily="18" charset="-120"/>
               </a:rPr>
               <a:t>Dos pantallas, sin frameworks</a:t>
             </a:r>
@@ -10400,7 +11918,7 @@
             <a:r>
               <a:rPr lang="en-US" sz="1600" b="1" dirty="0">
                 <a:solidFill>
-                  <a:srgbClr val="4A5568"/>
+                  <a:srgbClr val="14213D"/>
                 </a:solidFill>
                 <a:latin typeface="IBM Plex Sans" pitchFamily="34" charset="0"/>
                 <a:ea typeface="IBM Plex Sans" pitchFamily="34" charset="-122"/>
@@ -10476,7 +11994,7 @@
         <p:spPr>
           <a:xfrm>
             <a:off x="812800" y="6238280"/>
-            <a:ext cx="2410174" cy="238720"/>
+            <a:ext cx="2807970" cy="238720"/>
           </a:xfrm>
           <a:prstGeom prst="rect">
             <a:avLst/>
@@ -10591,7 +12109,9 @@
         <p:nvSpPr>
           <p:cNvPr id="3" name="Text 1"/>
           <p:cNvSpPr/>
-          <p:nvPr/>
+          <p:nvPr>
+            <p:ph type="title"/>
+          </p:nvPr>
         </p:nvSpPr>
         <p:spPr>
           <a:xfrm>
@@ -10617,13 +12137,13 @@
               <a:buNone/>
             </a:pPr>
             <a:r>
-              <a:rPr lang="en-US" sz="3600" b="1" dirty="0">
+              <a:rPr lang="en-US" sz="3600" b="1" i="0" dirty="0">
                 <a:solidFill>
                   <a:srgbClr val="14213D"/>
                 </a:solidFill>
-                <a:latin typeface="Source Serif 4" pitchFamily="34" charset="0"/>
-                <a:ea typeface="Source Serif 4" pitchFamily="34" charset="-122"/>
-                <a:cs typeface="Source Serif 4" pitchFamily="34" charset="-120"/>
+                <a:latin typeface="Source Serif 4" pitchFamily="18" charset="0"/>
+                <a:ea typeface="Source Serif 4" pitchFamily="18" charset="-122"/>
+                <a:cs typeface="Source Serif 4" pitchFamily="18" charset="-120"/>
               </a:rPr>
               <a:t>El mismo contrato, antes y después de tocarlo</a:t>
             </a:r>
@@ -10655,7 +12175,7 @@
       </p:sp>
       <p:pic>
         <p:nvPicPr>
-          <p:cNvPr id="5" name="Image 0" descr="Resultado de Validar: banner verde «Firma válida», tarjeta de la firma de Ana García (demo) con sello de tiempo, integridad íntegra, cadena de confianza y la cadena de certificados desplegada">    </p:cNvPr>
+          <p:cNvPr id="5" name="Image 0" descr="Resultado de Validar: banner verde «Firma válida», tarjeta de la firma de Ana García (demo) con sello de tiempo de confianza, integridad íntegra, cadena de confianza y fecha declarada marcada como no verificada">    </p:cNvPr>
           <p:cNvPicPr>
             <a:picLocks noChangeAspect="1"/>
           </p:cNvPicPr>
@@ -10669,12 +12189,37 @@
         </p:blipFill>
         <p:spPr>
           <a:xfrm>
-            <a:off x="1764475" y="1977231"/>
-            <a:ext cx="3278251" cy="3162300"/>
-          </a:xfrm>
-          <a:prstGeom prst="rect">
-            <a:avLst/>
-          </a:prstGeom>
+            <a:off x="819150" y="2062558"/>
+            <a:ext cx="5168900" cy="2991646"/>
+          </a:xfrm>
+          <a:custGeom>
+            <a:avLst/>
+            <a:gdLst/>
+            <a:ahLst/>
+            <a:cxnLst/>
+            <a:rect l="l" t="t" r="r" b="b"/>
+            <a:pathLst>
+              <a:path w="5168900" h="2991646">
+                <a:moveTo>
+                  <a:pt x="0" y="9923"/>
+                </a:moveTo>
+                <a:arcTo wR="95250" hR="95250" stAng="10800000" swAng="358796"/>
+                <a:lnTo>
+                  <a:pt x="5168382" y="0"/>
+                </a:lnTo>
+                <a:arcTo wR="95250" hR="95250" stAng="21241204" swAng="358796"/>
+                <a:lnTo>
+                  <a:pt x="5168900" y="2981723"/>
+                </a:lnTo>
+                <a:arcTo wR="95250" hR="95250" stAng="0" swAng="358796"/>
+                <a:lnTo>
+                  <a:pt x="518" y="2991646"/>
+                </a:lnTo>
+                <a:arcTo wR="95250" hR="95250" stAng="10441204" swAng="358796"/>
+                <a:close/>
+              </a:path>
+            </a:pathLst>
+          </a:custGeom>
         </p:spPr>
       </p:pic>
       <p:sp>
@@ -10711,7 +12256,7 @@
         <p:spPr>
           <a:xfrm>
             <a:off x="812800" y="5247481"/>
-            <a:ext cx="5337048" cy="265410"/>
+            <a:ext cx="5337048" cy="505420"/>
           </a:xfrm>
           <a:prstGeom prst="rect">
             <a:avLst/>
@@ -10734,24 +12279,24 @@
             <a:r>
               <a:rPr lang="en-US" sz="1400" b="1" dirty="0">
                 <a:solidFill>
+                  <a:srgbClr val="1F7A6D"/>
+                </a:solidFill>
+                <a:latin typeface="IBM Plex Sans" pitchFamily="34" charset="0"/>
+                <a:ea typeface="IBM Plex Sans" pitchFamily="34" charset="-122"/>
+                <a:cs typeface="IBM Plex Sans" pitchFamily="34" charset="-120"/>
+              </a:rPr>
+              <a:t>Firma válida</a:t>
+            </a:r>
+            <a:r>
+              <a:rPr lang="en-US" sz="1400" dirty="0">
+                <a:solidFill>
                   <a:srgbClr val="4A5568"/>
                 </a:solidFill>
                 <a:latin typeface="IBM Plex Sans" pitchFamily="34" charset="0"/>
                 <a:ea typeface="IBM Plex Sans" pitchFamily="34" charset="-122"/>
                 <a:cs typeface="IBM Plex Sans" pitchFamily="34" charset="-120"/>
               </a:rPr>
-              <a:t>Firma válida</a:t>
-            </a:r>
-            <a:r>
-              <a:rPr lang="en-US" sz="1400" dirty="0">
-                <a:solidFill>
-                  <a:srgbClr val="4A5568"/>
-                </a:solidFill>
-                <a:latin typeface="IBM Plex Sans" pitchFamily="34" charset="0"/>
-                <a:ea typeface="IBM Plex Sans" pitchFamily="34" charset="-122"/>
-                <a:cs typeface="IBM Plex Sans" pitchFamily="34" charset="-120"/>
-              </a:rPr>
-              <a:t>: íntegra, con sello de tiempo y cadena de confianza.</a:t>
+              <a:t>: íntegra, con sello de tiempo de confianza y cadena de confianza.</a:t>
             </a:r>
             <a:endParaRPr lang="en-US" sz="1400" dirty="0"/>
           </a:p>
@@ -10781,7 +12326,7 @@
       </p:sp>
       <p:pic>
         <p:nvPicPr>
-          <p:cNvPr id="9" name="Image 1" descr="Resultado de Validar: banner rojo «Firma inválida», el documento se modificó después de la última firma; integridad «Modificado tras la firma» y 3 revisiones">    </p:cNvPr>
+          <p:cNvPr id="9" name="Image 1" descr="Resultado de Validar: banner rojo «Firma inválida», el documento se modificó después de la última firma; integridad «Modificado tras la firma» y 3 revisiones, con las páginas agrupadas por tamaño">    </p:cNvPr>
           <p:cNvPicPr>
             <a:picLocks noChangeAspect="1"/>
           </p:cNvPicPr>
@@ -10795,8 +12340,8 @@
         </p:blipFill>
         <p:spPr>
           <a:xfrm>
-            <a:off x="6288039" y="1977231"/>
-            <a:ext cx="5000722" cy="3162300"/>
+            <a:off x="6203950" y="2007157"/>
+            <a:ext cx="5168900" cy="3102448"/>
           </a:xfrm>
           <a:custGeom>
             <a:avLst/>
@@ -10805,23 +12350,23 @@
             <a:cxnLst/>
             <a:rect l="l" t="t" r="r" b="b"/>
             <a:pathLst>
-              <a:path w="5000722" h="3162300">
+              <a:path w="5168900" h="3102448">
                 <a:moveTo>
-                  <a:pt x="0" y="656"/>
+                  <a:pt x="0" y="65324"/>
                 </a:moveTo>
-                <a:arcTo wR="95250" hR="95250" stAng="15796254" swAng="403746"/>
+                <a:arcTo wR="95250" hR="95250" stAng="10800000" swAng="2597991"/>
                 <a:lnTo>
-                  <a:pt x="4989561" y="0"/>
+                  <a:pt x="5142971" y="0"/>
                 </a:lnTo>
-                <a:arcTo wR="95250" hR="95250" stAng="16200000" swAng="403746"/>
+                <a:arcTo wR="95250" hR="95250" stAng="19002009" swAng="2597991"/>
                 <a:lnTo>
-                  <a:pt x="5000722" y="3161644"/>
+                  <a:pt x="5168900" y="3037124"/>
                 </a:lnTo>
-                <a:arcTo wR="95250" hR="95250" stAng="4996254" swAng="403746"/>
+                <a:arcTo wR="95250" hR="95250" stAng="0" swAng="2597991"/>
                 <a:lnTo>
-                  <a:pt x="11161" y="3162300"/>
+                  <a:pt x="25929" y="3102448"/>
                 </a:lnTo>
-                <a:arcTo wR="95250" hR="95250" stAng="5400000" swAng="403746"/>
+                <a:arcTo wR="95250" hR="95250" stAng="8202009" swAng="2597991"/>
                 <a:close/>
               </a:path>
             </a:pathLst>
@@ -10885,23 +12430,23 @@
             <a:r>
               <a:rPr lang="en-US" sz="1400" b="1" dirty="0">
                 <a:solidFill>
+                  <a:srgbClr val="B3261E"/>
+                </a:solidFill>
+                <a:latin typeface="IBM Plex Sans" pitchFamily="34" charset="0"/>
+                <a:ea typeface="IBM Plex Sans" pitchFamily="34" charset="-122"/>
+                <a:cs typeface="IBM Plex Sans" pitchFamily="34" charset="-120"/>
+              </a:rPr>
+              <a:t>Firma inválida</a:t>
+            </a:r>
+            <a:r>
+              <a:rPr lang="en-US" sz="1400" dirty="0">
+                <a:solidFill>
                   <a:srgbClr val="4A5568"/>
                 </a:solidFill>
                 <a:latin typeface="IBM Plex Sans" pitchFamily="34" charset="0"/>
                 <a:ea typeface="IBM Plex Sans" pitchFamily="34" charset="-122"/>
                 <a:cs typeface="IBM Plex Sans" pitchFamily="34" charset="-120"/>
               </a:rPr>
-              <a:t>Firma inválida</a:t>
-            </a:r>
-            <a:r>
-              <a:rPr lang="en-US" sz="1400" dirty="0">
-                <a:solidFill>
-                  <a:srgbClr val="4A5568"/>
-                </a:solidFill>
-                <a:latin typeface="IBM Plex Sans" pitchFamily="34" charset="0"/>
-                <a:ea typeface="IBM Plex Sans" pitchFamily="34" charset="-122"/>
-                <a:cs typeface="IBM Plex Sans" pitchFamily="34" charset="-120"/>
-              </a:rPr>
               <a:t>: una actualización posterior cambió el documento.</a:t>
             </a:r>
             <a:endParaRPr lang="en-US" sz="1400" dirty="0"/>
@@ -10917,7 +12462,7 @@
         <p:spPr>
           <a:xfrm>
             <a:off x="812800" y="6238280"/>
-            <a:ext cx="2410174" cy="238720"/>
+            <a:ext cx="2807970" cy="238720"/>
           </a:xfrm>
           <a:prstGeom prst="rect">
             <a:avLst/>
@@ -10993,7 +12538,7 @@
         <p:spPr>
           <a:xfrm>
             <a:off x="812800" y="812800"/>
-            <a:ext cx="10883392" cy="274241"/>
+            <a:ext cx="10883392" cy="270371"/>
           </a:xfrm>
           <a:prstGeom prst="rect">
             <a:avLst/>
@@ -11022,7 +12567,7 @@
                 <a:ea typeface="IBM Plex Sans" pitchFamily="34" charset="-122"/>
                 <a:cs typeface="IBM Plex Sans" pitchFamily="34" charset="-120"/>
               </a:rPr>
-              <a:t>FIRMAR, EN LA APLICACIÓN</a:t>
+              <a:t>EL DOCUMENTO, DE UN VISTAZO</a:t>
             </a:r>
             <a:endParaRPr lang="en-US" sz="1400" dirty="0"/>
           </a:p>
@@ -11032,43 +12577,45 @@
         <p:nvSpPr>
           <p:cNvPr id="3" name="Text 1"/>
           <p:cNvSpPr/>
-          <p:nvPr/>
-        </p:nvSpPr>
-        <p:spPr>
-          <a:xfrm>
-            <a:off x="812800" y="1163241"/>
-            <a:ext cx="10883392" cy="528241"/>
-          </a:xfrm>
-          <a:prstGeom prst="rect">
-            <a:avLst/>
-          </a:prstGeom>
-          <a:noFill/>
-          <a:ln/>
-        </p:spPr>
-        <p:txBody>
-          <a:bodyPr wrap="square" lIns="0" tIns="0" rIns="0" bIns="0" rtlCol="0" anchor="t">
-            <a:normAutofit/>
-          </a:bodyPr>
-          <a:lstStyle/>
-          <a:p>
-            <a:pPr algn="l" indent="0" marL="0">
-              <a:lnSpc>
-                <a:spcPts val="3960"/>
-              </a:lnSpc>
-              <a:buNone/>
-            </a:pPr>
-            <a:r>
-              <a:rPr lang="en-US" sz="3600" b="1" dirty="0">
+          <p:nvPr>
+            <p:ph type="title"/>
+          </p:nvPr>
+        </p:nvSpPr>
+        <p:spPr>
+          <a:xfrm>
+            <a:off x="812800" y="1159371"/>
+            <a:ext cx="10883392" cy="520402"/>
+          </a:xfrm>
+          <a:prstGeom prst="rect">
+            <a:avLst/>
+          </a:prstGeom>
+          <a:noFill/>
+          <a:ln/>
+        </p:spPr>
+        <p:txBody>
+          <a:bodyPr wrap="square" lIns="0" tIns="0" rIns="0" bIns="0" rtlCol="0" anchor="t">
+            <a:normAutofit/>
+          </a:bodyPr>
+          <a:lstStyle/>
+          <a:p>
+            <a:pPr algn="l" indent="0" marL="0">
+              <a:lnSpc>
+                <a:spcPts val="3923"/>
+              </a:lnSpc>
+              <a:buNone/>
+            </a:pPr>
+            <a:r>
+              <a:rPr lang="en-US" sz="3566" b="1" i="0" dirty="0">
                 <a:solidFill>
                   <a:srgbClr val="14213D"/>
                 </a:solidFill>
-                <a:latin typeface="Source Serif 4" pitchFamily="34" charset="0"/>
-                <a:ea typeface="Source Serif 4" pitchFamily="34" charset="-122"/>
-                <a:cs typeface="Source Serif 4" pitchFamily="34" charset="-120"/>
-              </a:rPr>
-              <a:t>Firma con AutoFirma sin salir del navegador</a:t>
-            </a:r>
-            <a:endParaRPr lang="en-US" sz="3600" dirty="0"/>
+                <a:latin typeface="Source Serif 4" pitchFamily="18" charset="0"/>
+                <a:ea typeface="Source Serif 4" pitchFamily="18" charset="-122"/>
+                <a:cs typeface="Source Serif 4" pitchFamily="18" charset="-120"/>
+              </a:rPr>
+              <a:t>Páginas agrupadas y recortes a la vista</a:t>
+            </a:r>
+            <a:endParaRPr lang="en-US" sz="3566" dirty="0"/>
           </a:p>
         </p:txBody>
       </p:sp>
@@ -11080,12 +12627,12 @@
         </p:nvSpPr>
         <p:spPr>
           <a:xfrm>
-            <a:off x="812800" y="1970881"/>
-            <a:ext cx="6223000" cy="3790950"/>
+            <a:off x="812800" y="1959173"/>
+            <a:ext cx="2984500" cy="3937000"/>
           </a:xfrm>
           <a:prstGeom prst="roundRect">
             <a:avLst>
-              <a:gd name="adj" fmla="val 2680"/>
+              <a:gd name="adj" fmla="val 3404"/>
             </a:avLst>
           </a:prstGeom>
           <a:solidFill>
@@ -11096,7 +12643,7 @@
       </p:sp>
       <p:pic>
         <p:nvPicPr>
-          <p:cNvPr id="5" name="Image 0" descr="Pantalla Firmar: aviso de que la clave privada nunca sale del equipo, zona para soltar el PDF (hasta 80 MB), fichero seleccionado y campo opcional «Motivo de la firma»">    </p:cNvPr>
+          <p:cNvPr id="5" name="Image 0" descr="Tarjetas Estructura del documento y Recortes: tres grupos de páginas (2 páginas A4 vertical 0°, 1 página A4 horizontal 90°, 1 página A3 horizontal 0°) con sus números, y la página 4 con su recorte por cada lado">    </p:cNvPr>
           <p:cNvPicPr>
             <a:picLocks noChangeAspect="1"/>
           </p:cNvPicPr>
@@ -11104,17 +12651,17 @@
         </p:nvPicPr>
         <p:blipFill>
           <a:blip r:embed="rId1"/>
-          <a:srcRect l="-81" r="-81" t="0" b="0"/>
+          <a:srcRect l="0" r="0" t="-156" b="-156"/>
           <a:stretch/>
         </p:blipFill>
         <p:spPr>
           <a:xfrm>
-            <a:off x="819150" y="1977231"/>
-            <a:ext cx="6210300" cy="3778250"/>
+            <a:off x="819150" y="1965523"/>
+            <a:ext cx="2971800" cy="3924300"/>
           </a:xfrm>
           <a:prstGeom prst="roundRect">
             <a:avLst>
-              <a:gd name="adj" fmla="val 2521"/>
+              <a:gd name="adj" fmla="val 3205"/>
             </a:avLst>
           </a:prstGeom>
         </p:spPr>
@@ -11127,12 +12674,12 @@
         </p:nvSpPr>
         <p:spPr>
           <a:xfrm>
-            <a:off x="815975" y="1974056"/>
-            <a:ext cx="6216650" cy="3784600"/>
+            <a:off x="815975" y="1962348"/>
+            <a:ext cx="2978150" cy="3930650"/>
           </a:xfrm>
           <a:prstGeom prst="roundRect">
             <a:avLst>
-              <a:gd name="adj" fmla="val 2601"/>
+              <a:gd name="adj" fmla="val 3305"/>
             </a:avLst>
           </a:prstGeom>
           <a:noFill/>
@@ -11146,35 +12693,62 @@
       </p:sp>
       <p:sp>
         <p:nvSpPr>
-          <p:cNvPr id="7" name="Text 4"/>
-          <p:cNvSpPr/>
-          <p:nvPr/>
-        </p:nvSpPr>
-        <p:spPr>
-          <a:xfrm>
-            <a:off x="7340600" y="1970881"/>
-            <a:ext cx="4159758" cy="594320"/>
-          </a:xfrm>
-          <a:prstGeom prst="rect">
-            <a:avLst/>
-          </a:prstGeom>
-          <a:noFill/>
-          <a:ln/>
-        </p:spPr>
-        <p:txBody>
-          <a:bodyPr wrap="square" lIns="0" tIns="0" rIns="0" bIns="0" rtlCol="0" anchor="t">
-            <a:normAutofit/>
-          </a:bodyPr>
-          <a:lstStyle/>
-          <a:p>
-            <a:pPr algn="l" indent="0" marL="0">
-              <a:lnSpc>
-                <a:spcPts val="2240"/>
-              </a:lnSpc>
-              <a:buNone/>
-            </a:pPr>
-            <a:r>
-              <a:rPr lang="en-US" sz="1600" dirty="0">
+          <p:cNvPr id="7" name="Shape 4"/>
+          <p:cNvSpPr/>
+          <p:nvPr/>
+        </p:nvSpPr>
+        <p:spPr>
+          <a:xfrm>
+            <a:off x="4105275" y="1962348"/>
+            <a:ext cx="7270750" cy="1347391"/>
+          </a:xfrm>
+          <a:prstGeom prst="roundRect">
+            <a:avLst>
+              <a:gd name="adj" fmla="val 7305"/>
+            </a:avLst>
+          </a:prstGeom>
+          <a:solidFill>
+            <a:srgbClr val="FFFFFF"/>
+          </a:solidFill>
+          <a:ln w="6350">
+            <a:solidFill>
+              <a:srgbClr val="DAD8CF"/>
+            </a:solidFill>
+            <a:prstDash val="solid"/>
+          </a:ln>
+        </p:spPr>
+      </p:sp>
+      <p:sp>
+        <p:nvSpPr>
+          <p:cNvPr id="8" name="Text 5"/>
+          <p:cNvSpPr/>
+          <p:nvPr/>
+        </p:nvSpPr>
+        <p:spPr>
+          <a:xfrm>
+            <a:off x="4337050" y="2194123"/>
+            <a:ext cx="7011416" cy="299641"/>
+          </a:xfrm>
+          <a:prstGeom prst="rect">
+            <a:avLst/>
+          </a:prstGeom>
+          <a:noFill/>
+          <a:ln/>
+        </p:spPr>
+        <p:txBody>
+          <a:bodyPr wrap="square" lIns="0" tIns="0" rIns="0" bIns="0" rtlCol="0" anchor="t">
+            <a:normAutofit/>
+          </a:bodyPr>
+          <a:lstStyle/>
+          <a:p>
+            <a:pPr algn="l" indent="0" marL="0">
+              <a:lnSpc>
+                <a:spcPts val="2160"/>
+              </a:lnSpc>
+              <a:buNone/>
+            </a:pPr>
+            <a:r>
+              <a:rPr lang="en-US" sz="1800" b="1" dirty="0">
                 <a:solidFill>
                   <a:srgbClr val="14213D"/>
                 </a:solidFill>
@@ -11182,43 +12756,114 @@
                 <a:ea typeface="IBM Plex Sans" pitchFamily="34" charset="-122"/>
                 <a:cs typeface="IBM Plex Sans" pitchFamily="34" charset="-120"/>
               </a:rPr>
-              <a:t>1. Se elige el PDF y, si se quiere, el motivo de la firma.</a:t>
-            </a:r>
-            <a:endParaRPr lang="en-US" sz="1600" dirty="0"/>
-          </a:p>
-        </p:txBody>
-      </p:sp>
-      <p:sp>
-        <p:nvSpPr>
-          <p:cNvPr id="8" name="Text 5"/>
-          <p:cNvSpPr/>
-          <p:nvPr/>
-        </p:nvSpPr>
-        <p:spPr>
-          <a:xfrm>
-            <a:off x="7340600" y="2717602"/>
-            <a:ext cx="4159758" cy="594320"/>
-          </a:xfrm>
-          <a:prstGeom prst="rect">
-            <a:avLst/>
-          </a:prstGeom>
-          <a:noFill/>
-          <a:ln/>
-        </p:spPr>
-        <p:txBody>
-          <a:bodyPr wrap="square" lIns="0" tIns="0" rIns="0" bIns="0" rtlCol="0" anchor="t">
-            <a:normAutofit/>
-          </a:bodyPr>
-          <a:lstStyle/>
-          <a:p>
-            <a:pPr algn="l" indent="0" marL="0">
-              <a:lnSpc>
-                <a:spcPts val="2240"/>
-              </a:lnSpc>
-              <a:buNone/>
-            </a:pPr>
-            <a:r>
-              <a:rPr lang="en-US" sz="1600" dirty="0">
+              <a:t>Páginas agrupadas</a:t>
+            </a:r>
+            <a:endParaRPr lang="en-US" sz="1800" dirty="0"/>
+          </a:p>
+        </p:txBody>
+      </p:sp>
+      <p:sp>
+        <p:nvSpPr>
+          <p:cNvPr id="9" name="Text 6"/>
+          <p:cNvSpPr/>
+          <p:nvPr/>
+        </p:nvSpPr>
+        <p:spPr>
+          <a:xfrm>
+            <a:off x="4337050" y="2544564"/>
+            <a:ext cx="7011416" cy="558800"/>
+          </a:xfrm>
+          <a:prstGeom prst="rect">
+            <a:avLst/>
+          </a:prstGeom>
+          <a:noFill/>
+          <a:ln/>
+        </p:spPr>
+        <p:txBody>
+          <a:bodyPr wrap="square" lIns="0" tIns="0" rIns="0" bIns="0" rtlCol="0" anchor="t">
+            <a:normAutofit/>
+          </a:bodyPr>
+          <a:lstStyle/>
+          <a:p>
+            <a:pPr algn="l" indent="0" marL="0">
+              <a:lnSpc>
+                <a:spcPts val="2100"/>
+              </a:lnSpc>
+              <a:buNone/>
+            </a:pPr>
+            <a:r>
+              <a:rPr lang="en-US" sz="1500" dirty="0">
+                <a:solidFill>
+                  <a:srgbClr val="4A5568"/>
+                </a:solidFill>
+                <a:latin typeface="IBM Plex Sans" pitchFamily="34" charset="0"/>
+                <a:ea typeface="IBM Plex Sans" pitchFamily="34" charset="-122"/>
+                <a:cs typeface="IBM Plex Sans" pitchFamily="34" charset="-120"/>
+              </a:rPr>
+              <a:t>Las páginas con el mismo tamaño y la misma rotación forman un grupo plegado. Al abrirlo aparecen sus números en rangos, como «1–12, 15».</a:t>
+            </a:r>
+            <a:endParaRPr lang="en-US" sz="1500" dirty="0"/>
+          </a:p>
+        </p:txBody>
+      </p:sp>
+      <p:sp>
+        <p:nvSpPr>
+          <p:cNvPr id="10" name="Shape 7"/>
+          <p:cNvSpPr/>
+          <p:nvPr/>
+        </p:nvSpPr>
+        <p:spPr>
+          <a:xfrm>
+            <a:off x="4105275" y="3493889"/>
+            <a:ext cx="7270750" cy="1347391"/>
+          </a:xfrm>
+          <a:prstGeom prst="roundRect">
+            <a:avLst>
+              <a:gd name="adj" fmla="val 7305"/>
+            </a:avLst>
+          </a:prstGeom>
+          <a:solidFill>
+            <a:srgbClr val="FFFFFF"/>
+          </a:solidFill>
+          <a:ln w="6350">
+            <a:solidFill>
+              <a:srgbClr val="DAD8CF"/>
+            </a:solidFill>
+            <a:prstDash val="solid"/>
+          </a:ln>
+        </p:spPr>
+      </p:sp>
+      <p:sp>
+        <p:nvSpPr>
+          <p:cNvPr id="11" name="Text 8"/>
+          <p:cNvSpPr/>
+          <p:nvPr/>
+        </p:nvSpPr>
+        <p:spPr>
+          <a:xfrm>
+            <a:off x="4337050" y="3725664"/>
+            <a:ext cx="7011416" cy="299641"/>
+          </a:xfrm>
+          <a:prstGeom prst="rect">
+            <a:avLst/>
+          </a:prstGeom>
+          <a:noFill/>
+          <a:ln/>
+        </p:spPr>
+        <p:txBody>
+          <a:bodyPr wrap="square" lIns="0" tIns="0" rIns="0" bIns="0" rtlCol="0" anchor="t">
+            <a:normAutofit/>
+          </a:bodyPr>
+          <a:lstStyle/>
+          <a:p>
+            <a:pPr algn="l" indent="0" marL="0">
+              <a:lnSpc>
+                <a:spcPts val="2160"/>
+              </a:lnSpc>
+              <a:buNone/>
+            </a:pPr>
+            <a:r>
+              <a:rPr lang="en-US" sz="1800" b="1" dirty="0">
                 <a:solidFill>
                   <a:srgbClr val="14213D"/>
                 </a:solidFill>
@@ -11226,66 +12871,66 @@
                 <a:ea typeface="IBM Plex Sans" pitchFamily="34" charset="-122"/>
                 <a:cs typeface="IBM Plex Sans" pitchFamily="34" charset="-120"/>
               </a:rPr>
-              <a:t>2. AutoFirma abre su selector de certificado y firma en el equipo.</a:t>
-            </a:r>
-            <a:endParaRPr lang="en-US" sz="1600" dirty="0"/>
-          </a:p>
-        </p:txBody>
-      </p:sp>
-      <p:sp>
-        <p:nvSpPr>
-          <p:cNvPr id="9" name="Text 6"/>
-          <p:cNvSpPr/>
-          <p:nvPr/>
-        </p:nvSpPr>
-        <p:spPr>
-          <a:xfrm>
-            <a:off x="7340600" y="3464322"/>
-            <a:ext cx="4159758" cy="594320"/>
-          </a:xfrm>
-          <a:prstGeom prst="rect">
-            <a:avLst/>
-          </a:prstGeom>
-          <a:noFill/>
-          <a:ln/>
-        </p:spPr>
-        <p:txBody>
-          <a:bodyPr wrap="square" lIns="0" tIns="0" rIns="0" bIns="0" rtlCol="0" anchor="t">
-            <a:normAutofit/>
-          </a:bodyPr>
-          <a:lstStyle/>
-          <a:p>
-            <a:pPr algn="l" indent="0" marL="0">
-              <a:lnSpc>
-                <a:spcPts val="2240"/>
-              </a:lnSpc>
-              <a:buNone/>
-            </a:pPr>
-            <a:r>
-              <a:rPr lang="en-US" sz="1600" dirty="0">
-                <a:solidFill>
-                  <a:srgbClr val="14213D"/>
-                </a:solidFill>
-                <a:latin typeface="IBM Plex Sans" pitchFamily="34" charset="0"/>
-                <a:ea typeface="IBM Plex Sans" pitchFamily="34" charset="-122"/>
-                <a:cs typeface="IBM Plex Sans" pitchFamily="34" charset="-120"/>
-              </a:rPr>
-              <a:t>3. Se descarga el PDF firmado o se valida con un clic.</a:t>
-            </a:r>
-            <a:endParaRPr lang="en-US" sz="1600" dirty="0"/>
-          </a:p>
-        </p:txBody>
-      </p:sp>
-      <p:sp>
-        <p:nvSpPr>
-          <p:cNvPr id="10" name="Text 7"/>
+              <a:t>Recortes</a:t>
+            </a:r>
+            <a:endParaRPr lang="en-US" sz="1800" dirty="0"/>
+          </a:p>
+        </p:txBody>
+      </p:sp>
+      <p:sp>
+        <p:nvSpPr>
+          <p:cNvPr id="12" name="Text 9"/>
+          <p:cNvSpPr/>
+          <p:nvPr/>
+        </p:nvSpPr>
+        <p:spPr>
+          <a:xfrm>
+            <a:off x="4337050" y="4076105"/>
+            <a:ext cx="7011416" cy="558800"/>
+          </a:xfrm>
+          <a:prstGeom prst="rect">
+            <a:avLst/>
+          </a:prstGeom>
+          <a:noFill/>
+          <a:ln/>
+        </p:spPr>
+        <p:txBody>
+          <a:bodyPr wrap="square" lIns="0" tIns="0" rIns="0" bIns="0" rtlCol="0" anchor="t">
+            <a:normAutofit/>
+          </a:bodyPr>
+          <a:lstStyle/>
+          <a:p>
+            <a:pPr algn="l" indent="0" marL="0">
+              <a:lnSpc>
+                <a:spcPts val="2100"/>
+              </a:lnSpc>
+              <a:buNone/>
+            </a:pPr>
+            <a:r>
+              <a:rPr lang="en-US" sz="1500" dirty="0">
+                <a:solidFill>
+                  <a:srgbClr val="4A5568"/>
+                </a:solidFill>
+                <a:latin typeface="IBM Plex Sans" pitchFamily="34" charset="0"/>
+                <a:ea typeface="IBM Plex Sans" pitchFamily="34" charset="-122"/>
+                <a:cs typeface="IBM Plex Sans" pitchFamily="34" charset="-120"/>
+              </a:rPr>
+              <a:t>Solo se listan las páginas cuya zona visible (CropBox) no coincide con la página completa, con lo que se recorta por cada lado.</a:t>
+            </a:r>
+            <a:endParaRPr lang="en-US" sz="1500" dirty="0"/>
+          </a:p>
+        </p:txBody>
+      </p:sp>
+      <p:sp>
+        <p:nvSpPr>
+          <p:cNvPr id="13" name="Text 10"/>
           <p:cNvSpPr/>
           <p:nvPr/>
         </p:nvSpPr>
         <p:spPr>
           <a:xfrm>
             <a:off x="812800" y="6238280"/>
-            <a:ext cx="2410174" cy="238720"/>
+            <a:ext cx="2807970" cy="238720"/>
           </a:xfrm>
           <a:prstGeom prst="rect">
             <a:avLst/>
@@ -11329,38 +12974,38 @@
 </file>
 
 <file path=ppt/theme/theme1.xml><?xml version="1.0" encoding="utf-8"?>
-<a:theme xmlns:a="http://schemas.openxmlformats.org/drawingml/2006/main" name="Office Theme">
+<a:theme xmlns:a="http://schemas.openxmlformats.org/drawingml/2006/main" name="PDF Inspector - TFM">
   <a:themeElements>
-    <a:clrScheme name="Office">
+    <a:clrScheme name="PDF Inspector - TFM">
       <a:dk1>
-        <a:sysClr val="windowText" lastClr="000000"/>
+        <a:srgbClr val="14213D"/>
       </a:dk1>
       <a:lt1>
-        <a:sysClr val="window" lastClr="FFFFFF"/>
+        <a:srgbClr val="F6F5F0"/>
       </a:lt1>
       <a:dk2>
-        <a:srgbClr val="44546A"/>
+        <a:srgbClr val="4D566A"/>
       </a:dk2>
       <a:lt2>
-        <a:srgbClr val="E7E6E6"/>
+        <a:srgbClr val="DFE0DE"/>
       </a:lt2>
       <a:accent1>
-        <a:srgbClr val="4472C4"/>
+        <a:srgbClr val="6CC5B5"/>
       </a:accent1>
       <a:accent2>
-        <a:srgbClr val="ED7D31"/>
+        <a:srgbClr val="1F7A6D"/>
       </a:accent2>
       <a:accent3>
-        <a:srgbClr val="A5A5A5"/>
+        <a:srgbClr val="8EA0C4"/>
       </a:accent3>
       <a:accent4>
-        <a:srgbClr val="FFC000"/>
+        <a:srgbClr val="4A5568"/>
       </a:accent4>
       <a:accent5>
-        <a:srgbClr val="5B9BD5"/>
+        <a:srgbClr val="C9D1E3"/>
       </a:accent5>
       <a:accent6>
-        <a:srgbClr val="70AD47"/>
+        <a:srgbClr val="5B6478"/>
       </a:accent6>
       <a:hlink>
         <a:srgbClr val="0563C1"/>
@@ -11369,9 +13014,9 @@
         <a:srgbClr val="954F72"/>
       </a:folHlink>
     </a:clrScheme>
-    <a:fontScheme name="Office">
+    <a:fontScheme name="PDF Inspector - TFM">
       <a:majorFont>
-        <a:latin typeface="Calibri Light" panose="020F0302020204030204"/>
+        <a:latin typeface="IBM Plex Sans"/>
         <a:ea typeface=""/>
         <a:cs typeface=""/>
         <a:font script="Jpan" typeface="游ゴシック Light"/>
@@ -11423,7 +13068,7 @@
         <a:font script="Tfng" typeface="Ebrima"/>
       </a:majorFont>
       <a:minorFont>
-        <a:latin typeface="Calibri" panose="020F0502020204030204"/>
+        <a:latin typeface="IBM Plex Sans"/>
         <a:ea typeface=""/>
         <a:cs typeface=""/>
         <a:font script="Jpan" typeface="游ゴシック"/>
@@ -11615,10 +13260,5 @@
   </a:themeElements>
   <a:objectDefaults/>
   <a:extraClrSchemeLst/>
-  <a:extLst>
-    <a:ext uri="{05A4C25C-085E-4340-85A3-A5531E510DB2}">
-      <thm15:themeFamily xmlns:thm15="http://schemas.microsoft.com/office/thememl/2012/main" name="Office Theme" id="{62F939B6-93AF-4DB8-9C6B-D6C7DFDC589F}" vid="{4A3C46E8-61CC-4603-A589-7422A47A8E4A}"/>
-    </a:ext>
-  </a:extLst>
 </a:theme>
 </file>
--- a/docs/PDF-Inspector-TFM.pptx
+++ b/docs/PDF-Inspector-TFM.pptx
@@ -1134,7 +1134,7 @@
           <a:p>
             <a:r>
               <a:rPr lang="en-US" dirty="0"/>
-              <a:t>La carga automática de las listas de confianza (TSL) queda como trabajo futuro. Los subfiltros no soportados se informan como UNSUPPORTED en vez de fallar.</a:t>
+              <a:t>Las anclas no se descargan en el servidor: una herramienta de mantenimiento descarga la LOTL de la UE y la TSL española, verifica sus firmas XML contra certificados fijados por huella y regenera el almacén; un job semanal de GitHub Actions abre un PR cuando la lista cambia. Hoy son 145 anclas: 77 CA cualificadas para firma y 68 TSA cualificadas. Ampliar a otros países sería seguir los demás punteros de la LOTL. Subfiltros de firma admitidos: PKCS#7 y CAdES separados; el resto se informa como UNSUPPORTED. El dominio no depende de ninguna librería.</a:t>
             </a:r>
             <a:endParaRPr lang="en-US" dirty="0"/>
           </a:p>
@@ -2150,6 +2150,102 @@
           <a:chExt cx="0" cy="0"/>
         </a:xfrm>
       </p:grpSpPr>
+      <p:sp>
+        <p:nvSpPr>
+          <p:cNvPr id="2" name="Title Placeholder 1"/>
+          <p:cNvSpPr/>
+          <p:nvPr>
+            <p:ph type="title"/>
+          </p:nvPr>
+        </p:nvSpPr>
+        <p:spPr>
+          <a:xfrm>
+            <a:off x="812800" y="1163241"/>
+            <a:ext cx="10566400" cy="502841"/>
+          </a:xfrm>
+          <a:prstGeom prst="rect">
+            <a:avLst/>
+          </a:prstGeom>
+          <a:noFill/>
+          <a:ln/>
+        </p:spPr>
+        <p:txBody>
+          <a:bodyPr wrap="square" lIns="0" tIns="0" rIns="0" bIns="0" rtlCol="0" anchor="t"/>
+          <a:lstStyle>
+            <a:lvl1pPr algn="l" indent="0" marL="0">
+              <a:lnSpc>
+                <a:spcPct val="115000"/>
+              </a:lnSpc>
+              <a:buNone/>
+              <a:defRPr lang="en-US" sz="3600" dirty="0">
+                <a:solidFill>
+                  <a:srgbClr val="14213D"/>
+                </a:solidFill>
+                <a:latin typeface="Source Serif 4" pitchFamily="34" charset="0"/>
+                <a:ea typeface="Source Serif 4" pitchFamily="34" charset="-122"/>
+                <a:cs typeface="Source Serif 4" pitchFamily="34" charset="-120"/>
+              </a:defRPr>
+            </a:lvl1pPr>
+          </a:lstStyle>
+          <a:p>
+            <a:pPr algn="l" indent="0" marL="0">
+              <a:lnSpc>
+                <a:spcPct val="115000"/>
+              </a:lnSpc>
+              <a:buNone/>
+            </a:pPr>
+            <a:endParaRPr lang="en-US" sz="3600" dirty="0"/>
+          </a:p>
+        </p:txBody>
+      </p:sp>
+      <p:sp>
+        <p:nvSpPr>
+          <p:cNvPr id="3" name="Text Placeholder 2"/>
+          <p:cNvSpPr/>
+          <p:nvPr>
+            <p:ph idx="101" type="body"/>
+          </p:nvPr>
+        </p:nvSpPr>
+        <p:spPr>
+          <a:xfrm>
+            <a:off x="812800" y="1970881"/>
+            <a:ext cx="10566400" cy="4074319"/>
+          </a:xfrm>
+          <a:prstGeom prst="rect">
+            <a:avLst/>
+          </a:prstGeom>
+          <a:noFill/>
+          <a:ln/>
+        </p:spPr>
+        <p:txBody>
+          <a:bodyPr wrap="square" lIns="0" tIns="0" rIns="0" bIns="0" rtlCol="0" anchor="t"/>
+          <a:lstStyle>
+            <a:lvl1pPr algn="l" indent="0" marL="0">
+              <a:lnSpc>
+                <a:spcPct val="140000"/>
+              </a:lnSpc>
+              <a:buNone/>
+              <a:defRPr lang="en-US" sz="1600" dirty="0">
+                <a:solidFill>
+                  <a:srgbClr val="14213D"/>
+                </a:solidFill>
+                <a:latin typeface="IBM Plex Sans" pitchFamily="34" charset="0"/>
+                <a:ea typeface="IBM Plex Sans" pitchFamily="34" charset="-122"/>
+                <a:cs typeface="IBM Plex Sans" pitchFamily="34" charset="-120"/>
+              </a:defRPr>
+            </a:lvl1pPr>
+          </a:lstStyle>
+          <a:p>
+            <a:pPr algn="l" indent="0" marL="0">
+              <a:lnSpc>
+                <a:spcPct val="140000"/>
+              </a:lnSpc>
+              <a:buNone/>
+            </a:pPr>
+            <a:endParaRPr lang="en-US" sz="1600" dirty="0"/>
+          </a:p>
+        </p:txBody>
+      </p:sp>
     </p:spTree>
   </p:cSld>
   <p:clrMap bg1="lt1" tx1="dk1" bg2="lt2" tx2="dk2" accent1="accent1" accent2="accent2" accent3="accent3" accent4="accent4" accent5="accent5" accent6="accent6" hlink="hlink" folHlink="folHlink"/>
@@ -4845,7 +4941,7 @@
                 <a:ea typeface="IBM Plex Sans" pitchFamily="34" charset="-122"/>
                 <a:cs typeface="IBM Plex Sans" pitchFamily="34" charset="-120"/>
               </a:rPr>
-              <a:t>486</a:t>
+              <a:t>528</a:t>
             </a:r>
             <a:endParaRPr lang="en-US" sz="6000" dirty="0"/>
           </a:p>
@@ -7224,11 +7320,11 @@
         <p:spPr>
           <a:xfrm>
             <a:off x="815975" y="1974056"/>
-            <a:ext cx="5175250" cy="2724150"/>
+            <a:ext cx="5175250" cy="2990850"/>
           </a:xfrm>
           <a:prstGeom prst="roundRect">
             <a:avLst>
-              <a:gd name="adj" fmla="val 3613"/>
+              <a:gd name="adj" fmla="val 3291"/>
             </a:avLst>
           </a:prstGeom>
           <a:solidFill>
@@ -7383,7 +7479,7 @@
         <p:spPr>
           <a:xfrm>
             <a:off x="1073150" y="3907631"/>
-            <a:ext cx="4800727" cy="292100"/>
+            <a:ext cx="4800727" cy="825500"/>
           </a:xfrm>
           <a:prstGeom prst="rect">
             <a:avLst/>
@@ -7412,7 +7508,7 @@
                 <a:ea typeface="IBM Plex Sans" pitchFamily="34" charset="-122"/>
                 <a:cs typeface="IBM Plex Sans" pitchFamily="34" charset="-120"/>
               </a:rPr>
-              <a:t>El dominio no depende de ninguna librería.</a:t>
+              <a:t>Anclas de confianza generadas de la Lista de Confianza oficial, con firma verificada y actualización semanal.</a:t>
             </a:r>
             <a:endParaRPr lang="en-US" sz="1500" dirty="0"/>
           </a:p>
@@ -7427,11 +7523,11 @@
         <p:spPr>
           <a:xfrm>
             <a:off x="6200775" y="1974056"/>
-            <a:ext cx="5175250" cy="2724150"/>
+            <a:ext cx="5175250" cy="2990850"/>
           </a:xfrm>
           <a:prstGeom prst="roundRect">
             <a:avLst>
-              <a:gd name="adj" fmla="val 3613"/>
+              <a:gd name="adj" fmla="val 3291"/>
             </a:avLst>
           </a:prstGeom>
           <a:solidFill>
@@ -7615,7 +7711,7 @@
                 <a:ea typeface="IBM Plex Sans" pitchFamily="34" charset="-122"/>
                 <a:cs typeface="IBM Plex Sans" pitchFamily="34" charset="-120"/>
               </a:rPr>
-              <a:t>Subfiltros de firma admitidos: PKCS#7 y CAdES separados.</a:t>
+              <a:t>Solo confía en CA españolas: las de otros países de la UE salen como no admitidas.</a:t>
             </a:r>
             <a:endParaRPr lang="en-US" sz="1500" dirty="0"/>
           </a:p>
@@ -8676,11 +8772,11 @@
         <p:spPr>
           <a:xfrm>
             <a:off x="815975" y="1974056"/>
-            <a:ext cx="3397250" cy="1215330"/>
+            <a:ext cx="3397250" cy="1455341"/>
           </a:xfrm>
           <a:prstGeom prst="roundRect">
             <a:avLst>
-              <a:gd name="adj" fmla="val 8099"/>
+              <a:gd name="adj" fmla="val 6763"/>
             </a:avLst>
           </a:prstGeom>
           <a:solidFill>
@@ -8813,11 +8909,11 @@
         <p:spPr>
           <a:xfrm>
             <a:off x="4397375" y="1974056"/>
-            <a:ext cx="3397250" cy="1215330"/>
+            <a:ext cx="3397250" cy="1455341"/>
           </a:xfrm>
           <a:prstGeom prst="roundRect">
             <a:avLst>
-              <a:gd name="adj" fmla="val 8099"/>
+              <a:gd name="adj" fmla="val 6763"/>
             </a:avLst>
           </a:prstGeom>
           <a:solidFill>
@@ -8928,11 +9024,11 @@
         <p:spPr>
           <a:xfrm>
             <a:off x="7978775" y="1974056"/>
-            <a:ext cx="3397250" cy="1215330"/>
+            <a:ext cx="3397250" cy="1455341"/>
           </a:xfrm>
           <a:prstGeom prst="roundRect">
             <a:avLst>
-              <a:gd name="adj" fmla="val 8099"/>
+              <a:gd name="adj" fmla="val 6763"/>
             </a:avLst>
           </a:prstGeom>
           <a:solidFill>
@@ -8999,7 +9095,7 @@
         <p:spPr>
           <a:xfrm>
             <a:off x="8185150" y="2502991"/>
-            <a:ext cx="3074035" cy="505420"/>
+            <a:ext cx="3074035" cy="745430"/>
           </a:xfrm>
           <a:prstGeom prst="rect">
             <a:avLst/>
@@ -9028,7 +9124,7 @@
                 <a:ea typeface="IBM Plex Sans" pitchFamily="34" charset="-122"/>
                 <a:cs typeface="IBM Plex Sans" pitchFamily="34" charset="-120"/>
               </a:rPr>
-              <a:t>Validación PKIX contra un almacén de confianza configurable.</a:t>
+              <a:t>Validación PKIX contra las CA y TSA cualificadas de la Lista de Confianza española.</a:t>
             </a:r>
             <a:endParaRPr lang="en-US" sz="1400" dirty="0"/>
           </a:p>
@@ -9042,7 +9138,7 @@
         </p:nvSpPr>
         <p:spPr>
           <a:xfrm>
-            <a:off x="815975" y="3373537"/>
+            <a:off x="815975" y="3613547"/>
             <a:ext cx="3397250" cy="1215330"/>
           </a:xfrm>
           <a:prstGeom prst="roundRect">
@@ -9069,7 +9165,7 @@
         </p:nvSpPr>
         <p:spPr>
           <a:xfrm>
-            <a:off x="1022350" y="3579912"/>
+            <a:off x="1022350" y="3819922"/>
             <a:ext cx="3074035" cy="284460"/>
           </a:xfrm>
           <a:prstGeom prst="rect">
@@ -9113,7 +9209,7 @@
         </p:nvSpPr>
         <p:spPr>
           <a:xfrm>
-            <a:off x="1022350" y="3902472"/>
+            <a:off x="1022350" y="4142482"/>
             <a:ext cx="3074035" cy="505420"/>
           </a:xfrm>
           <a:prstGeom prst="rect">
@@ -9157,7 +9253,7 @@
         </p:nvSpPr>
         <p:spPr>
           <a:xfrm>
-            <a:off x="4397375" y="3373537"/>
+            <a:off x="4397375" y="3613547"/>
             <a:ext cx="3397250" cy="1215330"/>
           </a:xfrm>
           <a:prstGeom prst="roundRect">
@@ -9184,7 +9280,7 @@
         </p:nvSpPr>
         <p:spPr>
           <a:xfrm>
-            <a:off x="4603750" y="3579912"/>
+            <a:off x="4603750" y="3819922"/>
             <a:ext cx="3074035" cy="284460"/>
           </a:xfrm>
           <a:prstGeom prst="rect">
@@ -9228,7 +9324,7 @@
         </p:nvSpPr>
         <p:spPr>
           <a:xfrm>
-            <a:off x="4603750" y="3902472"/>
+            <a:off x="4603750" y="4142482"/>
             <a:ext cx="3074035" cy="505420"/>
           </a:xfrm>
           <a:prstGeom prst="rect">
@@ -9294,7 +9390,7 @@
         </p:nvSpPr>
         <p:spPr>
           <a:xfrm>
-            <a:off x="7978775" y="3373537"/>
+            <a:off x="7978775" y="3613547"/>
             <a:ext cx="3397250" cy="1215330"/>
           </a:xfrm>
           <a:prstGeom prst="roundRect">
@@ -9321,7 +9417,7 @@
         </p:nvSpPr>
         <p:spPr>
           <a:xfrm>
-            <a:off x="8185150" y="3579912"/>
+            <a:off x="8185150" y="3819922"/>
             <a:ext cx="3074035" cy="284460"/>
           </a:xfrm>
           <a:prstGeom prst="rect">
@@ -9365,7 +9461,7 @@
         </p:nvSpPr>
         <p:spPr>
           <a:xfrm>
-            <a:off x="8185150" y="3902472"/>
+            <a:off x="8185150" y="4142482"/>
             <a:ext cx="3074035" cy="505420"/>
           </a:xfrm>
           <a:prstGeom prst="rect">

--- a/docs/PDF-Inspector-TFM.pptx
+++ b/docs/PDF-Inspector-TFM.pptx
@@ -3217,7 +3217,7 @@
         </p:nvGraphicFramePr>
         <p:xfrm>
           <a:off x="825500" y="1983581"/>
-          <a:ext cx="10553700" cy="3074690"/>
+          <a:ext cx="10553700" cy="3359150"/>
         </p:xfrm>
         <a:graphic>
           <a:graphicData uri="http://schemas.openxmlformats.org/drawingml/2006/table">
@@ -4500,7 +4500,7 @@
                   </a:tcPr>
                 </a:tc>
               </a:tr>
-              <a:tr h="439241">
+              <a:tr h="723702">
                 <a:tc>
                   <a:txBody>
                     <a:bodyPr/>
@@ -4589,7 +4589,7 @@
                           <a:ea typeface="IBM Plex Sans" pitchFamily="34" charset="-122"/>
                           <a:cs typeface="IBM Plex Sans" pitchFamily="34" charset="-120"/>
                         </a:rPr>
-                        <a:t>JUnit 5, AssertJ, Mockito, ArchUnit</a:t>
+                        <a:t>JUnit 6, AssertJ, Mockito, ArchUnit</a:t>
                       </a:r>
                       <a:endParaRPr lang="en-US" sz="1600" dirty="0">
                         <a:latin typeface="IBM Plex Sans" charset="0"/>
@@ -4657,7 +4657,7 @@
                           <a:ea typeface="IBM Plex Sans" pitchFamily="34" charset="-122"/>
                           <a:cs typeface="IBM Plex Sans" pitchFamily="34" charset="-120"/>
                         </a:rPr>
-                        <a:t>ArchUnit 1.5.1</a:t>
+                        <a:t>JUnit 6.0.3 · ArchUnit 1.5.1</a:t>
                       </a:r>
                       <a:endParaRPr lang="en-US" sz="1600" dirty="0">
                         <a:latin typeface="IBM Plex Sans" charset="0"/>
@@ -9139,11 +9139,11 @@
         <p:spPr>
           <a:xfrm>
             <a:off x="815975" y="3613547"/>
-            <a:ext cx="3397250" cy="1215330"/>
+            <a:ext cx="3397250" cy="1455341"/>
           </a:xfrm>
           <a:prstGeom prst="roundRect">
             <a:avLst>
-              <a:gd name="adj" fmla="val 8099"/>
+              <a:gd name="adj" fmla="val 6763"/>
             </a:avLst>
           </a:prstGeom>
           <a:solidFill>
@@ -9210,7 +9210,7 @@
         <p:spPr>
           <a:xfrm>
             <a:off x="1022350" y="4142482"/>
-            <a:ext cx="3074035" cy="505420"/>
+            <a:ext cx="3074035" cy="745430"/>
           </a:xfrm>
           <a:prstGeom prst="rect">
             <a:avLst/>
@@ -9239,7 +9239,7 @@
                 <a:ea typeface="IBM Plex Sans" pitchFamily="34" charset="-122"/>
                 <a:cs typeface="IBM Plex Sans" pitchFamily="34" charset="-120"/>
               </a:rPr>
-              <a:t>OCSP y CRL, opcional y con tiempo máximo de 2 s.</a:t>
+              <a:t>OCSP y CRL de toda la cadena, opcional: 2 s por consulta y 6 s por firma.</a:t>
             </a:r>
             <a:endParaRPr lang="en-US" sz="1400" dirty="0"/>
           </a:p>
@@ -9254,11 +9254,11 @@
         <p:spPr>
           <a:xfrm>
             <a:off x="4397375" y="3613547"/>
-            <a:ext cx="3397250" cy="1215330"/>
+            <a:ext cx="3397250" cy="1455341"/>
           </a:xfrm>
           <a:prstGeom prst="roundRect">
             <a:avLst>
-              <a:gd name="adj" fmla="val 8099"/>
+              <a:gd name="adj" fmla="val 6763"/>
             </a:avLst>
           </a:prstGeom>
           <a:solidFill>
@@ -9391,11 +9391,11 @@
         <p:spPr>
           <a:xfrm>
             <a:off x="7978775" y="3613547"/>
-            <a:ext cx="3397250" cy="1215330"/>
+            <a:ext cx="3397250" cy="1455341"/>
           </a:xfrm>
           <a:prstGeom prst="roundRect">
             <a:avLst>
-              <a:gd name="adj" fmla="val 8099"/>
+              <a:gd name="adj" fmla="val 6763"/>
             </a:avLst>
           </a:prstGeom>
           <a:solidFill>
@@ -11536,7 +11536,7 @@
                 <a:ea typeface="IBM Plex Sans" pitchFamily="34" charset="-122"/>
                 <a:cs typeface="IBM Plex Sans" pitchFamily="34" charset="-120"/>
               </a:rPr>
-              <a:t>: firma inválida o documento modificado.</a:t>
+              <a:t>: firma inválida, documento modificado o certificado revocado.</a:t>
             </a:r>
             <a:endParaRPr lang="en-US" sz="1800" dirty="0"/>
           </a:p>
